--- a/presentations/b08-ddi/B08_DDI.pptx
+++ b/presentations/b08-ddi/B08_DDI.pptx
@@ -122,7 +122,7 @@
   <p:extLst>
     <p:ext uri="{521415D9-36F7-43E2-AB2F-B90AF26B5E84}">
       <p14:sectionLst xmlns:p14="http://schemas.microsoft.com/office/powerpoint/2010/main">
-        <p14:section name="Why DNS" id="{40ca38df-484e-30dd-007b-01343e3adfc9}">
+        <p14:section name="Why DNS" id="{dc514537-ab03-2c63-2e2f-f65f8700fe08}">
           <p14:sldIdLst>
             <p14:sldId id="256"/>
             <p14:sldId id="257"/>
@@ -130,7 +130,7 @@
             <p14:sldId id="259"/>
           </p14:sldIdLst>
         </p14:section>
-        <p14:section name="What changes" id="{866df3d5-d0c7-f7c2-f4fc-4f678584fa4b}">
+        <p14:section name="What changes" id="{07d377ac-5dbb-5e63-fd84-a83efb6f905d}">
           <p14:sldIdLst>
             <p14:sldId id="260"/>
             <p14:sldId id="261"/>
@@ -139,12 +139,12 @@
             <p14:sldId id="264"/>
           </p14:sldIdLst>
         </p14:section>
-        <p14:section name="Who owns it" id="{cf48f7e3-29e2-238b-d78a-dd230a0e47ee}">
+        <p14:section name="Who owns it" id="{f698a0a1-d73a-5471-81ce-1cadc99bd487}">
           <p14:sldIdLst>
             <p14:sldId id="265"/>
           </p14:sldIdLst>
         </p14:section>
-        <p14:section name="How to do it" id="{32626ac1-de5e-30ad-eb90-f328c51f3dfb}">
+        <p14:section name="How to do it" id="{1549212d-805c-2864-c13c-bc3764f038d3}">
           <p14:sldIdLst>
             <p14:sldId id="266"/>
             <p14:sldId id="267"/>
@@ -152,7 +152,7 @@
             <p14:sldId id="269"/>
           </p14:sldIdLst>
         </p14:section>
-        <p14:section name="Backup" id="{2df8152a-aaaa-45f9-225c-f455dfec6f0a}">
+        <p14:section name="Backup" id="{ddfe8ffc-ba2c-b1cd-495d-2a7e6dfe4fd9}">
           <p14:sldIdLst>
             <p14:sldId id="270"/>
             <p14:sldId id="271"/>
@@ -562,7 +562,7 @@
           <a:p>
             <a:r>
               <a:rPr lang="en-US" dirty="0"/>
-              <a:t>[0:00–0:33]  This briefing comes from Book 08 of the Modernization Workbook, DNS, DHCP and IPAM: governing the name and address layer as one control plane across the data center, every cloud and the branch edge.
+              <a:t>[0:00–0:33]  This briefing comes from Book 08 of the Federal Modernization Workbook, DNS, DHCP and IPAM: governing the name and address layer as one control plane across the data center, every cloud and the branch edge.
 I'll take four questions: why DNS is now the control plane, what has to change, who owns it, and how to migrate and run it.
 The short version: every connection starts with a name, so whoever governs the name layer governs the enterprise.
 Workbook: Book 08, index; Chapter 01 — DNS Is Now the Control Plane.</a:t>
@@ -653,7 +653,7 @@
           <a:p>
             <a:r>
               <a:rPr lang="en-US" dirty="0"/>
-              <a:t>[9:27–10:38]  Who owns it? In an AD estate, DNS belonged to whoever ran the domain controllers; DnsAdmins has full control of every zone by default. A single policy plane concentrates that authority, so its owners have to be named on purpose, one decider per decision.
+              <a:t>[9:28–10:38]  Who owns it? In an AD estate, DNS belonged to whoever ran the domain controllers; DnsAdmins has full control of every zone by default. A single policy plane concentrates that authority, so its owners have to be named on purpose, one decider per decision.
 The sponsor and CIO decide the platform model and when AD DNS and Windows DHCP retire. The CISO and ISSO set the requirements: designated resolvers, allowed transports, DNSSEC and logging. The authorizing official accepts residual risk, including every standing exception.
 The DNS/DDI team runs the policy plane and decides what the edge points at; network engineering configures it. AD administrators own the inventory until AD DNS retires, and cloud teams run their DNS as consumers of the plane.
 Record changes come in three classes. Standard changes inside a delegated namespace are pre-approved. Policy-driven records, like private endpoint entries, need no per-change approval, but the policy itself is change-controlled. High-impact changes, zones, delegations, forwarding, SRV, wildcards and response policy, go to the change board.
@@ -837,7 +837,7 @@
           <a:p>
             <a:r>
               <a:rPr lang="en-US" dirty="0"/>
-              <a:t>[11:49–12:53]  Once it's running, one policy plane is only an improvement if divisions can still run their own networks through it. So each division gets a scope covering its own zones, IP spaces and DHCP scopes, with manager, operator and auditor roles, and automation accounts are held to the same scopes. Infrastructure as code, ITSM workflows and ACME DNS-01 certificate automation all go through one API and one audit trail.
+              <a:t>[11:49–12:54]  Once it's running, one policy plane is only an improvement if divisions can still run their own networks through it. So each division gets a scope covering its own zones, IP spaces and DHCP scopes, with manager, operator and auditor roles, and automation accounts are held to the same scopes. Infrastructure as code, ITSM workflows and ACME DNS-01 certificate automation all go through one API and one audit trail.
 Locator records are resolved every 15 minutes from every site and virtual network until the last domain controller retires. Drift reports compare the source of truth with every copy, and hygiene jobs catch stale records and dangling CNAMEs.
 The evidence floor is M-21-31: DNS queries, responses and errors, encrypted ones included, zone transfers, and DHCP lease history with MAC and IP addresses, kept twelve months in active storage and eighteen months cold. The lease history is what turns an address into a device.
 Workbook: Book 08, Chapter 11 — Operating the Control Plane: Delegation, Automation and Evidence.</a:t>
@@ -928,7 +928,7 @@
           <a:p>
             <a:r>
               <a:rPr lang="en-US" dirty="0"/>
-              <a:t>[12:53–14:03]  Choose the platform on the evidence it produces for your own boundary.
+              <a:t>[12:54–14:03]  Choose the platform on the evidence it produces for your own boundary.
 Commercial DDI licensing is quoted per agency, so get every quote on the same assumptions. The cloud-native pieces have public meters, and appear in every model. Azure DNS Private Resolver charges per endpoint: 180 dollars a month for each inbound endpoint and each outbound endpoint, plus 2 dollars 50 per ruleset. A hub with one of each is about 362 dollars 50 a month per region, and a second region doubles it.
 Authorization belongs to an offering, not a vendor. As one example, Infoblox Government Cloud has been FedRAMP Certified at Moderate since December 15, 2022. BlueCat and EfficientIP have no Marketplace listing, so they run inside the agency's boundary. And a Moderate authorization doesn't cover GCC High or DoD.
 Some risk remains. Sync lag becomes the new source of divergence. A management-plane outage blocks changes, though resolution continues from local state. And encrypted DNS bypass stays possible wherever endpoint controls are incomplete.
@@ -1020,7 +1020,7 @@
           <a:p>
             <a:r>
               <a:rPr lang="en-US" dirty="0"/>
-              <a:t>[14:03–15:07]  So, four decisions.
+              <a:t>[14:03–15:08]  So, four decisions.
 Authorize a single authoritative DDI policy plane, and assign an owner, typically the enterprise architecture or network operations lead.
 Have that owner settle the five configuration decisions within 90 days, and report the residual risk to the authorizing official.
 Choose the platform model on evidence: authorization at the right impact level, and quotes on the same assumptions.
@@ -1382,7 +1382,7 @@
           <a:p>
             <a:r>
               <a:rPr lang="en-US" dirty="0"/>
-              <a:t>[1:41–2:50]  Run those platforms independently and you get split-brain DNS: the same name returning different answers depending on where the query starts. Designed split-horizon is fine. The problem is unintentional drift between systems with no shared state.
+              <a:t>[1:41–2:51]  Run those platforms independently and you get split-brain DNS: the same name returning different answers depending on where the query starts. Designed split-horizon is fine. The problem is unintentional drift between systems with no shared state.
 It takes three forms. Private-IP split-brain: an EC2 instance gets an Azure private endpoint's private address only through a Route 53 forwarding rule. If the rule is missing or stale, the name still resolves, to the public address. Microsoft attributes roughly 70 percent of private-endpoint access-denied cases to exactly that. SaaS split-brain: GCC uses the Worldwide endpoint list, so the risk is path consistency, a stale forwarder or browser DoH to a public resolver. And security-policy split-brain: a block applies only on the resolver that answers, so the posture is the weakest resolver a client can reach.
 The failure is silent, the change rate outruns any manual process, and every system has its own timing. Only a control plane that holds the policy objects keeps them in step.
 Workbook: Book 08, Chapter 02 — Split-Brain DNS: The Structural Problem.</a:t>
@@ -1473,7 +1473,7 @@
           <a:p>
             <a:r>
               <a:rPr lang="en-US" dirty="0"/>
-              <a:t>[2:50–3:55]  The federal mandates never name a product, but together they describe a governed name layer. It's worth being precise about who requires what.
+              <a:t>[2:51–3:56]  The federal mandates never name a product, but together they describe a governed name layer. It's worth being precise about who requires what.
 OMB M-22-09 requires encrypted DNS wherever it's technically supported, with endpoints explicitly configured to use agency-designated resolvers. It also notes that DNS must already be routed through CISA-operated infrastructure. The requirement that all egress resolution go through Protective DNS comes from CISA's own guidance, which cites the statute. OMB M-21-31 makes DNS logging a basic, EL1 requirement, encrypted queries included, with the source host identifiable. M-08-23 and SP 800-53 carry DNSSEC. And version 3.3 of the TIC 3.0 catalog, published in September 2026, lists five DNS capabilities, from sinkholing to Protective DNS.
 NIST SP 800-81 Revision 3, final on March 19, 2026, is the practical guide to all of this: guidance, not a mandate. And FedRAMP certifies a cloud service, not an architecture; the agency still authorizes its own DDI system.
 Workbook: Book 08, Chapter 03 — Federal Requirements: NIST SP 800-81, FedRAMP and Zero Trust.</a:t>
@@ -1564,7 +1564,7 @@
           <a:p>
             <a:r>
               <a:rPr lang="en-US" dirty="0"/>
-              <a:t>[3:55–5:00]  What has to change starts with Active Directory. For twenty years AD has been the hidden DNS service of the on-premises network: a domain's name becomes a zone, and every domain-joined machine points at the domain controllers for all of its resolution.
+              <a:t>[3:56–5:01]  What has to change starts with Active Directory. For twenty years AD has been the hidden DNS service of the on-premises network: a domain's name becomes a zone, and every domain-joined machine points at the domain controllers for all of its resolution.
 Netlogon on each domain controller registers the SRV locator records that clients use to find LDAP, Kerberos and the global catalog. Secure dynamic update keeps those records current. Forwarders, GlobalNames, reverse and signed zones each need a decision.
 Microsoft Entra ID inherits none of it. It hosts no zones and publishes no locator records, yet hybrid-joined devices still look for a domain controller, and Entra Domain Services adds a DNS authority of its own.
 So the locator records stay where domain controllers can register them securely, on AD DNS or a DDI platform that accepts GSS-TSIG updates, until the last domain controller goes. Everything else moves zone by zone, once it's inventoried.
@@ -1656,7 +1656,7 @@
           <a:p>
             <a:r>
               <a:rPr lang="en-US" dirty="0"/>
-              <a:t>[5:00–6:10]  Every control in the policy plane assumes the query reaches it. Three ordinary mechanisms decide whether it does, and none of them reports when it doesn't.
+              <a:t>[5:01–6:10]  Every control in the policy plane assumes the query reaches it. Three ordinary mechanisms decide whether it does, and none of them reports when it doesn't.
 First, the edge. Cisco Catalyst SD-WAN's redirect-dns action, as one example, sends branch DNS to a policy-designated resolver, IPv4 and UDP only. It must be a network-addressable agency resolver, not a loopback agent on the device, and any SASE resolver belongs behind it.
 Second, encrypted DNS. DNS over TLS and DNS over QUIC use port 853, so block them except to approved resolvers. DNS over HTTPS shares port 443 with all web traffic, so it's governed at the endpoint: Windows DoH policy, the Edge and Chrome DoH mode, and an NXDOMAIN answer for Firefox's canary domain.
 Third, rogue DHCP. One rogue server handing out its own resolver in option 6 moves a whole subnet at once, and rogue IPv6 router advertisements do the same. AD authorization doesn't stop them; DHCP snooping and RA Guard on the switches do.
@@ -1931,7 +1931,7 @@
           <a:p>
             <a:r>
               <a:rPr lang="en-US" dirty="0"/>
-              <a:t>[8:28–9:27]  A branch client's query passes the SD-WAN edge to an agency-controlled resolver, then the DDI policy plane, with its response policy zones, DNSSEC, IPAM and forwarding rules, then the per-cloud private zones. Internet-bound recursion leaves through CISA's Protective DNS.
+              <a:t>[8:28–9:28]  A branch client's query passes the SD-WAN edge to an agency-controlled resolver, then the DDI policy plane, with its response policy zones, DNSSEC, IPAM and forwarding rules, then the per-cloud private zones. Internet-bound recursion leaves through CISA's Protective DNS.
 Five decisions carry almost all of the operational risk. One: the redirect-dns target is a network-addressable agency resolver. Two: the agency resolver is the first hop, and any other resolver is its forwarder. Three: the policy plane holds every per-cloud conditional forwarding rule. Four: AD DNS is inventoried and reprovisioned before any domain controller goes. Five: OCSP and CRL endpoints resolve from every origin.
 Each fails silently: the query still resolves, just outside policy or to the wrong address. So each comes with a check, run in the live configuration rather than the design document, before the next SD-WAN or DDI change.
 Workbook: Book 08, Chapter 08 — Reference Architecture and the Five Critical Decisions.</a:t>
@@ -2229,7 +2229,7 @@
                   <a:schemeClr val="accent5"/>
                 </a:solidFill>
               </a:rPr>
-              <a:t>Modernization Workbook  ·  Book 08 DNS, DHCP &amp; IPAM</a:t>
+              <a:t>Federal Modernization Workbook  ·  Book 08 DNS, DHCP &amp; IPAM</a:t>
             </a:r>
             <a:endParaRPr lang="en-US" sz="1000" dirty="0"/>
           </a:p>
@@ -2710,7 +2710,90 @@
       </p:sp>
       <p:sp>
         <p:nvSpPr>
-          <p:cNvPr id="4" name="Agenda line"/>
+          <p:cNvPr id="4" name="Presenter"/>
+          <p:cNvSpPr txBox="1"/>
+          <p:nvPr/>
+        </p:nvSpPr>
+        <p:spPr>
+          <a:xfrm>
+            <a:off x="731520" y="5897880"/>
+            <a:ext cx="6858000" cy="365760"/>
+          </a:xfrm>
+          <a:prstGeom prst="rect">
+            <a:avLst/>
+          </a:prstGeom>
+          <a:noFill/>
+          <a:ln/>
+        </p:spPr>
+        <p:txBody>
+          <a:bodyPr wrap="square" lIns="0" tIns="0" rIns="0" bIns="0" rtlCol="0" anchor="ctr"/>
+          <a:lstStyle/>
+          <a:p>
+            <a:pPr indent="0" marL="0">
+              <a:buNone/>
+            </a:pPr>
+            <a:r>
+              <a:rPr lang="en-US" sz="1600" dirty="0">
+                <a:solidFill>
+                  <a:srgbClr val="64748B"/>
+                </a:solidFill>
+              </a:rPr>
+              <a:t>Presented by  </a:t>
+            </a:r>
+            <a:pPr indent="0" marL="0">
+              <a:buNone/>
+            </a:pPr>
+            <a:r>
+              <a:rPr lang="en-US" sz="1600" b="1" dirty="0">
+                <a:solidFill>
+                  <a:srgbClr val="1F2A44"/>
+                </a:solidFill>
+              </a:rPr>
+              <a:t>Michael F. Stratton</a:t>
+            </a:r>
+            <a:endParaRPr lang="en-US" sz="1600" dirty="0"/>
+          </a:p>
+        </p:txBody>
+      </p:sp>
+      <p:sp>
+        <p:nvSpPr>
+          <p:cNvPr id="5" name="Disclaimer"/>
+          <p:cNvSpPr txBox="1"/>
+          <p:nvPr/>
+        </p:nvSpPr>
+        <p:spPr>
+          <a:xfrm>
+            <a:off x="731520" y="6309360"/>
+            <a:ext cx="8686800" cy="274320"/>
+          </a:xfrm>
+          <a:prstGeom prst="rect">
+            <a:avLst/>
+          </a:prstGeom>
+          <a:noFill/>
+          <a:ln/>
+        </p:spPr>
+        <p:txBody>
+          <a:bodyPr wrap="square" lIns="0" tIns="0" rIns="0" bIns="0" rtlCol="0" anchor="ctr"/>
+          <a:lstStyle/>
+          <a:p>
+            <a:pPr indent="0" marL="0">
+              <a:buNone/>
+            </a:pPr>
+            <a:r>
+              <a:rPr lang="en-US" sz="1050" dirty="0">
+                <a:solidFill>
+                  <a:srgbClr val="64748B"/>
+                </a:solidFill>
+              </a:rPr>
+              <a:t>Not an official U.S. government publication. Independent technical analysis; not reviewed or endorsed by any federal agency.</a:t>
+            </a:r>
+            <a:endParaRPr lang="en-US" sz="1050" dirty="0"/>
+          </a:p>
+        </p:txBody>
+      </p:sp>
+      <p:sp>
+        <p:nvSpPr>
+          <p:cNvPr id="6" name="Agenda line"/>
           <p:cNvSpPr txBox="1"/>
           <p:nvPr/>
         </p:nvSpPr>
@@ -2812,7 +2895,7 @@
       </p:sp>
       <p:sp>
         <p:nvSpPr>
-          <p:cNvPr id="5" name="Series line"/>
+          <p:cNvPr id="7" name="Series line"/>
           <p:cNvSpPr txBox="1"/>
           <p:nvPr/>
         </p:nvSpPr>
@@ -2840,7 +2923,7 @@
                   <a:srgbClr val="1F2A44"/>
                 </a:solidFill>
               </a:rPr>
-              <a:t>Modernization Workbook</a:t>
+              <a:t>Federal Modernization Workbook</a:t>
             </a:r>
             <a:endParaRPr lang="en-US" sz="1600" dirty="0"/>
           </a:p>
@@ -2928,7 +3011,13 @@
       </p:sp>
       <p:sp>
         <p:nvSpPr>
-          <p:cNvPr id="3" name="Tag Who"/>
+          <p:cNvPr id="3" name="Tag Who" descr="">
+            <a:extLst>
+              <a:ext uri="{C183D7F6-B498-43B3-948B-1728B52AA6E4}">
+                <adec:decorative xmlns:adec="http://schemas.microsoft.com/office/drawing/2017/decorative" val="1"/>
+              </a:ext>
+            </a:extLst>
+          </p:cNvPr>
           <p:cNvSpPr/>
           <p:nvPr/>
         </p:nvSpPr>
@@ -2991,7 +3080,13 @@
       </p:sp>
       <p:sp>
         <p:nvSpPr>
-          <p:cNvPr id="5" name="Who col 1"/>
+          <p:cNvPr id="5" name="Who col 1" descr="">
+            <a:extLst>
+              <a:ext uri="{C183D7F6-B498-43B3-948B-1728B52AA6E4}">
+                <adec:decorative xmlns:adec="http://schemas.microsoft.com/office/drawing/2017/decorative" val="1"/>
+              </a:ext>
+            </a:extLst>
+          </p:cNvPr>
           <p:cNvSpPr/>
           <p:nvPr/>
         </p:nvSpPr>
@@ -3025,7 +3120,13 @@
       </p:sp>
       <p:sp>
         <p:nvSpPr>
-          <p:cNvPr id="6" name="Icon FaBuildingColumns"/>
+          <p:cNvPr id="6" name="Icon FaBuildingColumns" descr="">
+            <a:extLst>
+              <a:ext uri="{C183D7F6-B498-43B3-948B-1728B52AA6E4}">
+                <adec:decorative xmlns:adec="http://schemas.microsoft.com/office/drawing/2017/decorative" val="1"/>
+              </a:ext>
+            </a:extLst>
+          </p:cNvPr>
           <p:cNvSpPr/>
           <p:nvPr/>
         </p:nvSpPr>
@@ -3050,7 +3151,13 @@
       </p:sp>
       <p:pic>
         <p:nvPicPr>
-          <p:cNvPr id="7" name="Image 0" descr="C:\Users\whale\git\mwb-b08\presentations\_build\icons\FaBuildingColumns.png">    </p:cNvPr>
+          <p:cNvPr id="7" name="Image 0" descr="">
+            <a:extLst>
+              <a:ext uri="{C183D7F6-B498-43B3-948B-1728B52AA6E4}">
+                <adec:decorative xmlns:adec="http://schemas.microsoft.com/office/drawing/2017/decorative" val="1"/>
+              </a:ext>
+            </a:extLst>
+          </p:cNvPr>
           <p:cNvPicPr>
             <a:picLocks noChangeAspect="1"/>
           </p:cNvPicPr>
@@ -3237,7 +3344,13 @@
       </p:sp>
       <p:sp>
         <p:nvSpPr>
-          <p:cNvPr id="10" name="Who col 2"/>
+          <p:cNvPr id="10" name="Who col 2" descr="">
+            <a:extLst>
+              <a:ext uri="{C183D7F6-B498-43B3-948B-1728B52AA6E4}">
+                <adec:decorative xmlns:adec="http://schemas.microsoft.com/office/drawing/2017/decorative" val="1"/>
+              </a:ext>
+            </a:extLst>
+          </p:cNvPr>
           <p:cNvSpPr/>
           <p:nvPr/>
         </p:nvSpPr>
@@ -3271,7 +3384,13 @@
       </p:sp>
       <p:sp>
         <p:nvSpPr>
-          <p:cNvPr id="11" name="Icon FaUsersGear"/>
+          <p:cNvPr id="11" name="Icon FaUsersGear" descr="">
+            <a:extLst>
+              <a:ext uri="{C183D7F6-B498-43B3-948B-1728B52AA6E4}">
+                <adec:decorative xmlns:adec="http://schemas.microsoft.com/office/drawing/2017/decorative" val="1"/>
+              </a:ext>
+            </a:extLst>
+          </p:cNvPr>
           <p:cNvSpPr/>
           <p:nvPr/>
         </p:nvSpPr>
@@ -3296,7 +3415,13 @@
       </p:sp>
       <p:pic>
         <p:nvPicPr>
-          <p:cNvPr id="12" name="Image 1" descr="C:\Users\whale\git\mwb-b08\presentations\_build\icons\FaUsersGear.png">    </p:cNvPr>
+          <p:cNvPr id="12" name="Image 1" descr="">
+            <a:extLst>
+              <a:ext uri="{C183D7F6-B498-43B3-948B-1728B52AA6E4}">
+                <adec:decorative xmlns:adec="http://schemas.microsoft.com/office/drawing/2017/decorative" val="1"/>
+              </a:ext>
+            </a:extLst>
+          </p:cNvPr>
           <p:cNvPicPr>
             <a:picLocks noChangeAspect="1"/>
           </p:cNvPicPr>
@@ -3483,7 +3608,13 @@
       </p:sp>
       <p:sp>
         <p:nvSpPr>
-          <p:cNvPr id="15" name="Who col 3"/>
+          <p:cNvPr id="15" name="Who col 3" descr="">
+            <a:extLst>
+              <a:ext uri="{C183D7F6-B498-43B3-948B-1728B52AA6E4}">
+                <adec:decorative xmlns:adec="http://schemas.microsoft.com/office/drawing/2017/decorative" val="1"/>
+              </a:ext>
+            </a:extLst>
+          </p:cNvPr>
           <p:cNvSpPr/>
           <p:nvPr/>
         </p:nvSpPr>
@@ -3517,7 +3648,13 @@
       </p:sp>
       <p:sp>
         <p:nvSpPr>
-          <p:cNvPr id="16" name="Icon FaPeopleArrows"/>
+          <p:cNvPr id="16" name="Icon FaPeopleArrows" descr="">
+            <a:extLst>
+              <a:ext uri="{C183D7F6-B498-43B3-948B-1728B52AA6E4}">
+                <adec:decorative xmlns:adec="http://schemas.microsoft.com/office/drawing/2017/decorative" val="1"/>
+              </a:ext>
+            </a:extLst>
+          </p:cNvPr>
           <p:cNvSpPr/>
           <p:nvPr/>
         </p:nvSpPr>
@@ -3542,7 +3679,13 @@
       </p:sp>
       <p:pic>
         <p:nvPicPr>
-          <p:cNvPr id="17" name="Image 2" descr="C:\Users\whale\git\mwb-b08\presentations\_build\icons\FaPeopleArrows.png">    </p:cNvPr>
+          <p:cNvPr id="17" name="Image 2" descr="">
+            <a:extLst>
+              <a:ext uri="{C183D7F6-B498-43B3-948B-1728B52AA6E4}">
+                <adec:decorative xmlns:adec="http://schemas.microsoft.com/office/drawing/2017/decorative" val="1"/>
+              </a:ext>
+            </a:extLst>
+          </p:cNvPr>
           <p:cNvPicPr>
             <a:picLocks noChangeAspect="1"/>
           </p:cNvPicPr>
@@ -3765,7 +3908,13 @@
       </p:sp>
       <p:sp>
         <p:nvSpPr>
-          <p:cNvPr id="21" name="Class 1"/>
+          <p:cNvPr id="21" name="Class 1" descr="">
+            <a:extLst>
+              <a:ext uri="{C183D7F6-B498-43B3-948B-1728B52AA6E4}">
+                <adec:decorative xmlns:adec="http://schemas.microsoft.com/office/drawing/2017/decorative" val="1"/>
+              </a:ext>
+            </a:extLst>
+          </p:cNvPr>
           <p:cNvSpPr/>
           <p:nvPr/>
         </p:nvSpPr>
@@ -3846,7 +3995,13 @@
       </p:sp>
       <p:sp>
         <p:nvSpPr>
-          <p:cNvPr id="23" name="Class 2"/>
+          <p:cNvPr id="23" name="Class 2" descr="">
+            <a:extLst>
+              <a:ext uri="{C183D7F6-B498-43B3-948B-1728B52AA6E4}">
+                <adec:decorative xmlns:adec="http://schemas.microsoft.com/office/drawing/2017/decorative" val="1"/>
+              </a:ext>
+            </a:extLst>
+          </p:cNvPr>
           <p:cNvSpPr/>
           <p:nvPr/>
         </p:nvSpPr>
@@ -3927,7 +4082,13 @@
       </p:sp>
       <p:sp>
         <p:nvSpPr>
-          <p:cNvPr id="25" name="Class 3"/>
+          <p:cNvPr id="25" name="Class 3" descr="">
+            <a:extLst>
+              <a:ext uri="{C183D7F6-B498-43B3-948B-1728B52AA6E4}">
+                <adec:decorative xmlns:adec="http://schemas.microsoft.com/office/drawing/2017/decorative" val="1"/>
+              </a:ext>
+            </a:extLst>
+          </p:cNvPr>
           <p:cNvSpPr/>
           <p:nvPr/>
         </p:nvSpPr>
@@ -4155,7 +4316,13 @@
       </p:sp>
       <p:sp>
         <p:nvSpPr>
-          <p:cNvPr id="3" name="Tag How"/>
+          <p:cNvPr id="3" name="Tag How" descr="">
+            <a:extLst>
+              <a:ext uri="{C183D7F6-B498-43B3-948B-1728B52AA6E4}">
+                <adec:decorative xmlns:adec="http://schemas.microsoft.com/office/drawing/2017/decorative" val="1"/>
+              </a:ext>
+            </a:extLst>
+          </p:cNvPr>
           <p:cNvSpPr/>
           <p:nvPr/>
         </p:nvSpPr>
@@ -4237,7 +4404,7 @@
         <a:graphic>
           <a:graphicData uri="http://schemas.openxmlformats.org/drawingml/2006/table">
             <a:tbl>
-              <a:tblPr/>
+              <a:tblPr firstRow="1" bandRow="1"/>
               <a:tblGrid>
                 <a:gridCol w="1874520"/>
                 <a:gridCol w="3246120"/>
@@ -5691,7 +5858,13 @@
       </p:graphicFrame>
       <p:sp>
         <p:nvSpPr>
-          <p:cNvPr id="6" name="Loop box"/>
+          <p:cNvPr id="6" name="Loop box" descr="">
+            <a:extLst>
+              <a:ext uri="{C183D7F6-B498-43B3-948B-1728B52AA6E4}">
+                <adec:decorative xmlns:adec="http://schemas.microsoft.com/office/drawing/2017/decorative" val="1"/>
+              </a:ext>
+            </a:extLst>
+          </p:cNvPr>
           <p:cNvSpPr/>
           <p:nvPr/>
         </p:nvSpPr>
@@ -5725,7 +5898,13 @@
       </p:sp>
       <p:sp>
         <p:nvSpPr>
-          <p:cNvPr id="7" name="Icon FaArrowsRotate"/>
+          <p:cNvPr id="7" name="Icon FaArrowsRotate" descr="">
+            <a:extLst>
+              <a:ext uri="{C183D7F6-B498-43B3-948B-1728B52AA6E4}">
+                <adec:decorative xmlns:adec="http://schemas.microsoft.com/office/drawing/2017/decorative" val="1"/>
+              </a:ext>
+            </a:extLst>
+          </p:cNvPr>
           <p:cNvSpPr/>
           <p:nvPr/>
         </p:nvSpPr>
@@ -5750,7 +5929,13 @@
       </p:sp>
       <p:pic>
         <p:nvPicPr>
-          <p:cNvPr id="8" name="Image 0" descr="C:\Users\whale\git\mwb-b08\presentations\_build\icons\FaArrowsRotate.png">    </p:cNvPr>
+          <p:cNvPr id="8" name="Image 0" descr="">
+            <a:extLst>
+              <a:ext uri="{C183D7F6-B498-43B3-948B-1728B52AA6E4}">
+                <adec:decorative xmlns:adec="http://schemas.microsoft.com/office/drawing/2017/decorative" val="1"/>
+              </a:ext>
+            </a:extLst>
+          </p:cNvPr>
           <p:cNvPicPr>
             <a:picLocks noChangeAspect="1"/>
           </p:cNvPicPr>
@@ -5925,7 +6110,13 @@
       </p:sp>
       <p:sp>
         <p:nvSpPr>
-          <p:cNvPr id="11" name="Rollback"/>
+          <p:cNvPr id="11" name="Rollback" descr="">
+            <a:extLst>
+              <a:ext uri="{C183D7F6-B498-43B3-948B-1728B52AA6E4}">
+                <adec:decorative xmlns:adec="http://schemas.microsoft.com/office/drawing/2017/decorative" val="1"/>
+              </a:ext>
+            </a:extLst>
+          </p:cNvPr>
           <p:cNvSpPr/>
           <p:nvPr/>
         </p:nvSpPr>
@@ -5959,7 +6150,13 @@
       </p:sp>
       <p:sp>
         <p:nvSpPr>
-          <p:cNvPr id="12" name="Icon FaTriangleExclamation"/>
+          <p:cNvPr id="12" name="Icon FaTriangleExclamation" descr="">
+            <a:extLst>
+              <a:ext uri="{C183D7F6-B498-43B3-948B-1728B52AA6E4}">
+                <adec:decorative xmlns:adec="http://schemas.microsoft.com/office/drawing/2017/decorative" val="1"/>
+              </a:ext>
+            </a:extLst>
+          </p:cNvPr>
           <p:cNvSpPr/>
           <p:nvPr/>
         </p:nvSpPr>
@@ -5984,7 +6181,13 @@
       </p:sp>
       <p:pic>
         <p:nvPicPr>
-          <p:cNvPr id="13" name="Image 1" descr="C:\Users\whale\git\mwb-b08\presentations\_build\icons\FaTriangleExclamation.png">    </p:cNvPr>
+          <p:cNvPr id="13" name="Image 1" descr="">
+            <a:extLst>
+              <a:ext uri="{C183D7F6-B498-43B3-948B-1728B52AA6E4}">
+                <adec:decorative xmlns:adec="http://schemas.microsoft.com/office/drawing/2017/decorative" val="1"/>
+              </a:ext>
+            </a:extLst>
+          </p:cNvPr>
           <p:cNvPicPr>
             <a:picLocks noChangeAspect="1"/>
           </p:cNvPicPr>
@@ -6202,7 +6405,13 @@
       </p:sp>
       <p:sp>
         <p:nvSpPr>
-          <p:cNvPr id="3" name="Tag How"/>
+          <p:cNvPr id="3" name="Tag How" descr="">
+            <a:extLst>
+              <a:ext uri="{C183D7F6-B498-43B3-948B-1728B52AA6E4}">
+                <adec:decorative xmlns:adec="http://schemas.microsoft.com/office/drawing/2017/decorative" val="1"/>
+              </a:ext>
+            </a:extLst>
+          </p:cNvPr>
           <p:cNvSpPr/>
           <p:nvPr/>
         </p:nvSpPr>
@@ -6301,7 +6510,13 @@
       </p:sp>
       <p:sp>
         <p:nvSpPr>
-          <p:cNvPr id="6" name="Icon FaSitemap"/>
+          <p:cNvPr id="6" name="Icon FaSitemap" descr="">
+            <a:extLst>
+              <a:ext uri="{C183D7F6-B498-43B3-948B-1728B52AA6E4}">
+                <adec:decorative xmlns:adec="http://schemas.microsoft.com/office/drawing/2017/decorative" val="1"/>
+              </a:ext>
+            </a:extLst>
+          </p:cNvPr>
           <p:cNvSpPr/>
           <p:nvPr/>
         </p:nvSpPr>
@@ -6326,7 +6541,13 @@
       </p:sp>
       <p:pic>
         <p:nvPicPr>
-          <p:cNvPr id="7" name="Image 0" descr="C:\Users\whale\git\mwb-b08\presentations\_build\icons\FaSitemap.png">    </p:cNvPr>
+          <p:cNvPr id="7" name="Image 0" descr="">
+            <a:extLst>
+              <a:ext uri="{C183D7F6-B498-43B3-948B-1728B52AA6E4}">
+                <adec:decorative xmlns:adec="http://schemas.microsoft.com/office/drawing/2017/decorative" val="1"/>
+              </a:ext>
+            </a:extLst>
+          </p:cNvPr>
           <p:cNvPicPr>
             <a:picLocks noChangeAspect="1"/>
           </p:cNvPicPr>
@@ -6400,7 +6621,13 @@
       </p:sp>
       <p:sp>
         <p:nvSpPr>
-          <p:cNvPr id="9" name="Icon FaCodeBranch"/>
+          <p:cNvPr id="9" name="Icon FaCodeBranch" descr="">
+            <a:extLst>
+              <a:ext uri="{C183D7F6-B498-43B3-948B-1728B52AA6E4}">
+                <adec:decorative xmlns:adec="http://schemas.microsoft.com/office/drawing/2017/decorative" val="1"/>
+              </a:ext>
+            </a:extLst>
+          </p:cNvPr>
           <p:cNvSpPr/>
           <p:nvPr/>
         </p:nvSpPr>
@@ -6425,7 +6652,13 @@
       </p:sp>
       <p:pic>
         <p:nvPicPr>
-          <p:cNvPr id="10" name="Image 1" descr="C:\Users\whale\git\mwb-b08\presentations\_build\icons\FaCodeBranch.png">    </p:cNvPr>
+          <p:cNvPr id="10" name="Image 1" descr="">
+            <a:extLst>
+              <a:ext uri="{C183D7F6-B498-43B3-948B-1728B52AA6E4}">
+                <adec:decorative xmlns:adec="http://schemas.microsoft.com/office/drawing/2017/decorative" val="1"/>
+              </a:ext>
+            </a:extLst>
+          </p:cNvPr>
           <p:cNvPicPr>
             <a:picLocks noChangeAspect="1"/>
           </p:cNvPicPr>
@@ -6499,7 +6732,13 @@
       </p:sp>
       <p:sp>
         <p:nvSpPr>
-          <p:cNvPr id="12" name="Icon FaChartLine"/>
+          <p:cNvPr id="12" name="Icon FaChartLine" descr="">
+            <a:extLst>
+              <a:ext uri="{C183D7F6-B498-43B3-948B-1728B52AA6E4}">
+                <adec:decorative xmlns:adec="http://schemas.microsoft.com/office/drawing/2017/decorative" val="1"/>
+              </a:ext>
+            </a:extLst>
+          </p:cNvPr>
           <p:cNvSpPr/>
           <p:nvPr/>
         </p:nvSpPr>
@@ -6524,7 +6763,13 @@
       </p:sp>
       <p:pic>
         <p:nvPicPr>
-          <p:cNvPr id="13" name="Image 2" descr="C:\Users\whale\git\mwb-b08\presentations\_build\icons\FaChartLine.png">    </p:cNvPr>
+          <p:cNvPr id="13" name="Image 2" descr="">
+            <a:extLst>
+              <a:ext uri="{C183D7F6-B498-43B3-948B-1728B52AA6E4}">
+                <adec:decorative xmlns:adec="http://schemas.microsoft.com/office/drawing/2017/decorative" val="1"/>
+              </a:ext>
+            </a:extLst>
+          </p:cNvPr>
           <p:cNvPicPr>
             <a:picLocks noChangeAspect="1"/>
           </p:cNvPicPr>
@@ -6598,7 +6843,13 @@
       </p:sp>
       <p:sp>
         <p:nvSpPr>
-          <p:cNvPr id="15" name="Logging box"/>
+          <p:cNvPr id="15" name="Logging box" descr="">
+            <a:extLst>
+              <a:ext uri="{C183D7F6-B498-43B3-948B-1728B52AA6E4}">
+                <adec:decorative xmlns:adec="http://schemas.microsoft.com/office/drawing/2017/decorative" val="1"/>
+              </a:ext>
+            </a:extLst>
+          </p:cNvPr>
           <p:cNvSpPr/>
           <p:nvPr/>
         </p:nvSpPr>
@@ -6632,7 +6883,13 @@
       </p:sp>
       <p:sp>
         <p:nvSpPr>
-          <p:cNvPr id="16" name="Icon FaFileShield"/>
+          <p:cNvPr id="16" name="Icon FaFileShield" descr="">
+            <a:extLst>
+              <a:ext uri="{C183D7F6-B498-43B3-948B-1728B52AA6E4}">
+                <adec:decorative xmlns:adec="http://schemas.microsoft.com/office/drawing/2017/decorative" val="1"/>
+              </a:ext>
+            </a:extLst>
+          </p:cNvPr>
           <p:cNvSpPr/>
           <p:nvPr/>
         </p:nvSpPr>
@@ -6657,7 +6914,13 @@
       </p:sp>
       <p:pic>
         <p:nvPicPr>
-          <p:cNvPr id="17" name="Image 3" descr="C:\Users\whale\git\mwb-b08\presentations\_build\icons\FaFileShield.png">    </p:cNvPr>
+          <p:cNvPr id="17" name="Image 3" descr="">
+            <a:extLst>
+              <a:ext uri="{C183D7F6-B498-43B3-948B-1728B52AA6E4}">
+                <adec:decorative xmlns:adec="http://schemas.microsoft.com/office/drawing/2017/decorative" val="1"/>
+              </a:ext>
+            </a:extLst>
+          </p:cNvPr>
           <p:cNvPicPr>
             <a:picLocks noChangeAspect="1"/>
           </p:cNvPicPr>
@@ -6814,7 +7077,13 @@
       </p:sp>
       <p:sp>
         <p:nvSpPr>
-          <p:cNvPr id="20" name="Checklist"/>
+          <p:cNvPr id="20" name="Checklist" descr="">
+            <a:extLst>
+              <a:ext uri="{C183D7F6-B498-43B3-948B-1728B52AA6E4}">
+                <adec:decorative xmlns:adec="http://schemas.microsoft.com/office/drawing/2017/decorative" val="1"/>
+              </a:ext>
+            </a:extLst>
+          </p:cNvPr>
           <p:cNvSpPr/>
           <p:nvPr/>
         </p:nvSpPr>
@@ -6848,7 +7117,13 @@
       </p:sp>
       <p:sp>
         <p:nvSpPr>
-          <p:cNvPr id="21" name="Icon FaListCheck"/>
+          <p:cNvPr id="21" name="Icon FaListCheck" descr="">
+            <a:extLst>
+              <a:ext uri="{C183D7F6-B498-43B3-948B-1728B52AA6E4}">
+                <adec:decorative xmlns:adec="http://schemas.microsoft.com/office/drawing/2017/decorative" val="1"/>
+              </a:ext>
+            </a:extLst>
+          </p:cNvPr>
           <p:cNvSpPr/>
           <p:nvPr/>
         </p:nvSpPr>
@@ -6873,7 +7148,13 @@
       </p:sp>
       <p:pic>
         <p:nvPicPr>
-          <p:cNvPr id="22" name="Image 4" descr="C:\Users\whale\git\mwb-b08\presentations\_build\icons\FaListCheck.png">    </p:cNvPr>
+          <p:cNvPr id="22" name="Image 4" descr="">
+            <a:extLst>
+              <a:ext uri="{C183D7F6-B498-43B3-948B-1728B52AA6E4}">
+                <adec:decorative xmlns:adec="http://schemas.microsoft.com/office/drawing/2017/decorative" val="1"/>
+              </a:ext>
+            </a:extLst>
+          </p:cNvPr>
           <p:cNvPicPr>
             <a:picLocks noChangeAspect="1"/>
           </p:cNvPicPr>
@@ -7091,7 +7372,13 @@
       </p:sp>
       <p:sp>
         <p:nvSpPr>
-          <p:cNvPr id="3" name="Tag How"/>
+          <p:cNvPr id="3" name="Tag How" descr="">
+            <a:extLst>
+              <a:ext uri="{C183D7F6-B498-43B3-948B-1728B52AA6E4}">
+                <adec:decorative xmlns:adec="http://schemas.microsoft.com/office/drawing/2017/decorative" val="1"/>
+              </a:ext>
+            </a:extLst>
+          </p:cNvPr>
           <p:cNvSpPr/>
           <p:nvPr/>
         </p:nvSpPr>
@@ -7173,7 +7460,7 @@
         <a:graphic>
           <a:graphicData uri="http://schemas.openxmlformats.org/drawingml/2006/table">
             <a:tbl>
-              <a:tblPr/>
+              <a:tblPr firstRow="1" bandRow="1"/>
               <a:tblGrid>
                 <a:gridCol w="3429000"/>
                 <a:gridCol w="2148840"/>
@@ -7910,7 +8197,13 @@
       </p:sp>
       <p:sp>
         <p:nvSpPr>
-          <p:cNvPr id="7" name="Auth box"/>
+          <p:cNvPr id="7" name="Auth box" descr="">
+            <a:extLst>
+              <a:ext uri="{C183D7F6-B498-43B3-948B-1728B52AA6E4}">
+                <adec:decorative xmlns:adec="http://schemas.microsoft.com/office/drawing/2017/decorative" val="1"/>
+              </a:ext>
+            </a:extLst>
+          </p:cNvPr>
           <p:cNvSpPr/>
           <p:nvPr/>
         </p:nvSpPr>
@@ -7944,7 +8237,13 @@
       </p:sp>
       <p:sp>
         <p:nvSpPr>
-          <p:cNvPr id="8" name="Icon FaLandmark"/>
+          <p:cNvPr id="8" name="Icon FaLandmark" descr="">
+            <a:extLst>
+              <a:ext uri="{C183D7F6-B498-43B3-948B-1728B52AA6E4}">
+                <adec:decorative xmlns:adec="http://schemas.microsoft.com/office/drawing/2017/decorative" val="1"/>
+              </a:ext>
+            </a:extLst>
+          </p:cNvPr>
           <p:cNvSpPr/>
           <p:nvPr/>
         </p:nvSpPr>
@@ -7969,7 +8268,13 @@
       </p:sp>
       <p:pic>
         <p:nvPicPr>
-          <p:cNvPr id="9" name="Image 0" descr="C:\Users\whale\git\mwb-b08\presentations\_build\icons\FaLandmark.png">    </p:cNvPr>
+          <p:cNvPr id="9" name="Image 0" descr="">
+            <a:extLst>
+              <a:ext uri="{C183D7F6-B498-43B3-948B-1728B52AA6E4}">
+                <adec:decorative xmlns:adec="http://schemas.microsoft.com/office/drawing/2017/decorative" val="1"/>
+              </a:ext>
+            </a:extLst>
+          </p:cNvPr>
           <p:cNvPicPr>
             <a:picLocks noChangeAspect="1"/>
           </p:cNvPicPr>
@@ -8126,7 +8431,13 @@
       </p:sp>
       <p:sp>
         <p:nvSpPr>
-          <p:cNvPr id="12" name="Residual"/>
+          <p:cNvPr id="12" name="Residual" descr="">
+            <a:extLst>
+              <a:ext uri="{C183D7F6-B498-43B3-948B-1728B52AA6E4}">
+                <adec:decorative xmlns:adec="http://schemas.microsoft.com/office/drawing/2017/decorative" val="1"/>
+              </a:ext>
+            </a:extLst>
+          </p:cNvPr>
           <p:cNvSpPr/>
           <p:nvPr/>
         </p:nvSpPr>
@@ -8160,7 +8471,13 @@
       </p:sp>
       <p:sp>
         <p:nvSpPr>
-          <p:cNvPr id="13" name="Icon FaScaleBalanced"/>
+          <p:cNvPr id="13" name="Icon FaScaleBalanced" descr="">
+            <a:extLst>
+              <a:ext uri="{C183D7F6-B498-43B3-948B-1728B52AA6E4}">
+                <adec:decorative xmlns:adec="http://schemas.microsoft.com/office/drawing/2017/decorative" val="1"/>
+              </a:ext>
+            </a:extLst>
+          </p:cNvPr>
           <p:cNvSpPr/>
           <p:nvPr/>
         </p:nvSpPr>
@@ -8185,7 +8502,13 @@
       </p:sp>
       <p:pic>
         <p:nvPicPr>
-          <p:cNvPr id="14" name="Image 1" descr="C:\Users\whale\git\mwb-b08\presentations\_build\icons\FaScaleBalanced.png">    </p:cNvPr>
+          <p:cNvPr id="14" name="Image 1" descr="">
+            <a:extLst>
+              <a:ext uri="{C183D7F6-B498-43B3-948B-1728B52AA6E4}">
+                <adec:decorative xmlns:adec="http://schemas.microsoft.com/office/drawing/2017/decorative" val="1"/>
+              </a:ext>
+            </a:extLst>
+          </p:cNvPr>
           <p:cNvPicPr>
             <a:picLocks noChangeAspect="1"/>
           </p:cNvPicPr>
@@ -8403,7 +8726,13 @@
       </p:sp>
       <p:sp>
         <p:nvSpPr>
-          <p:cNvPr id="3" name="Tag How"/>
+          <p:cNvPr id="3" name="Tag How" descr="">
+            <a:extLst>
+              <a:ext uri="{C183D7F6-B498-43B3-948B-1728B52AA6E4}">
+                <adec:decorative xmlns:adec="http://schemas.microsoft.com/office/drawing/2017/decorative" val="1"/>
+              </a:ext>
+            </a:extLst>
+          </p:cNvPr>
           <p:cNvSpPr/>
           <p:nvPr/>
         </p:nvSpPr>
@@ -8466,7 +8795,13 @@
       </p:sp>
       <p:sp>
         <p:nvSpPr>
-          <p:cNvPr id="5" name="Ask 1"/>
+          <p:cNvPr id="5" name="Ask 1" descr="">
+            <a:extLst>
+              <a:ext uri="{C183D7F6-B498-43B3-948B-1728B52AA6E4}">
+                <adec:decorative xmlns:adec="http://schemas.microsoft.com/office/drawing/2017/decorative" val="1"/>
+              </a:ext>
+            </a:extLst>
+          </p:cNvPr>
           <p:cNvSpPr/>
           <p:nvPr/>
         </p:nvSpPr>
@@ -8500,7 +8835,13 @@
       </p:sp>
       <p:sp>
         <p:nvSpPr>
-          <p:cNvPr id="6" name="Icon FaSitemap"/>
+          <p:cNvPr id="6" name="Icon FaSitemap" descr="">
+            <a:extLst>
+              <a:ext uri="{C183D7F6-B498-43B3-948B-1728B52AA6E4}">
+                <adec:decorative xmlns:adec="http://schemas.microsoft.com/office/drawing/2017/decorative" val="1"/>
+              </a:ext>
+            </a:extLst>
+          </p:cNvPr>
           <p:cNvSpPr/>
           <p:nvPr/>
         </p:nvSpPr>
@@ -8525,7 +8866,13 @@
       </p:sp>
       <p:pic>
         <p:nvPicPr>
-          <p:cNvPr id="7" name="Image 0" descr="C:\Users\whale\git\mwb-b08\presentations\_build\icons\FaSitemap.png">    </p:cNvPr>
+          <p:cNvPr id="7" name="Image 0" descr="">
+            <a:extLst>
+              <a:ext uri="{C183D7F6-B498-43B3-948B-1728B52AA6E4}">
+                <adec:decorative xmlns:adec="http://schemas.microsoft.com/office/drawing/2017/decorative" val="1"/>
+              </a:ext>
+            </a:extLst>
+          </p:cNvPr>
           <p:cNvPicPr>
             <a:picLocks noChangeAspect="1"/>
           </p:cNvPicPr>
@@ -8602,7 +8949,13 @@
       </p:sp>
       <p:sp>
         <p:nvSpPr>
-          <p:cNvPr id="9" name="Ask 2"/>
+          <p:cNvPr id="9" name="Ask 2" descr="">
+            <a:extLst>
+              <a:ext uri="{C183D7F6-B498-43B3-948B-1728B52AA6E4}">
+                <adec:decorative xmlns:adec="http://schemas.microsoft.com/office/drawing/2017/decorative" val="1"/>
+              </a:ext>
+            </a:extLst>
+          </p:cNvPr>
           <p:cNvSpPr/>
           <p:nvPr/>
         </p:nvSpPr>
@@ -8636,7 +8989,13 @@
       </p:sp>
       <p:sp>
         <p:nvSpPr>
-          <p:cNvPr id="10" name="Icon FaListCheck"/>
+          <p:cNvPr id="10" name="Icon FaListCheck" descr="">
+            <a:extLst>
+              <a:ext uri="{C183D7F6-B498-43B3-948B-1728B52AA6E4}">
+                <adec:decorative xmlns:adec="http://schemas.microsoft.com/office/drawing/2017/decorative" val="1"/>
+              </a:ext>
+            </a:extLst>
+          </p:cNvPr>
           <p:cNvSpPr/>
           <p:nvPr/>
         </p:nvSpPr>
@@ -8661,7 +9020,13 @@
       </p:sp>
       <p:pic>
         <p:nvPicPr>
-          <p:cNvPr id="11" name="Image 1" descr="C:\Users\whale\git\mwb-b08\presentations\_build\icons\FaListCheck.png">    </p:cNvPr>
+          <p:cNvPr id="11" name="Image 1" descr="">
+            <a:extLst>
+              <a:ext uri="{C183D7F6-B498-43B3-948B-1728B52AA6E4}">
+                <adec:decorative xmlns:adec="http://schemas.microsoft.com/office/drawing/2017/decorative" val="1"/>
+              </a:ext>
+            </a:extLst>
+          </p:cNvPr>
           <p:cNvPicPr>
             <a:picLocks noChangeAspect="1"/>
           </p:cNvPicPr>
@@ -8738,7 +9103,13 @@
       </p:sp>
       <p:sp>
         <p:nvSpPr>
-          <p:cNvPr id="13" name="Ask 3"/>
+          <p:cNvPr id="13" name="Ask 3" descr="">
+            <a:extLst>
+              <a:ext uri="{C183D7F6-B498-43B3-948B-1728B52AA6E4}">
+                <adec:decorative xmlns:adec="http://schemas.microsoft.com/office/drawing/2017/decorative" val="1"/>
+              </a:ext>
+            </a:extLst>
+          </p:cNvPr>
           <p:cNvSpPr/>
           <p:nvPr/>
         </p:nvSpPr>
@@ -8772,7 +9143,13 @@
       </p:sp>
       <p:sp>
         <p:nvSpPr>
-          <p:cNvPr id="14" name="Icon FaScaleBalanced"/>
+          <p:cNvPr id="14" name="Icon FaScaleBalanced" descr="">
+            <a:extLst>
+              <a:ext uri="{C183D7F6-B498-43B3-948B-1728B52AA6E4}">
+                <adec:decorative xmlns:adec="http://schemas.microsoft.com/office/drawing/2017/decorative" val="1"/>
+              </a:ext>
+            </a:extLst>
+          </p:cNvPr>
           <p:cNvSpPr/>
           <p:nvPr/>
         </p:nvSpPr>
@@ -8797,7 +9174,13 @@
       </p:sp>
       <p:pic>
         <p:nvPicPr>
-          <p:cNvPr id="15" name="Image 2" descr="C:\Users\whale\git\mwb-b08\presentations\_build\icons\FaScaleBalanced.png">    </p:cNvPr>
+          <p:cNvPr id="15" name="Image 2" descr="">
+            <a:extLst>
+              <a:ext uri="{C183D7F6-B498-43B3-948B-1728B52AA6E4}">
+                <adec:decorative xmlns:adec="http://schemas.microsoft.com/office/drawing/2017/decorative" val="1"/>
+              </a:ext>
+            </a:extLst>
+          </p:cNvPr>
           <p:cNvPicPr>
             <a:picLocks noChangeAspect="1"/>
           </p:cNvPicPr>
@@ -8874,7 +9257,13 @@
       </p:sp>
       <p:sp>
         <p:nvSpPr>
-          <p:cNvPr id="17" name="Ask 4"/>
+          <p:cNvPr id="17" name="Ask 4" descr="">
+            <a:extLst>
+              <a:ext uri="{C183D7F6-B498-43B3-948B-1728B52AA6E4}">
+                <adec:decorative xmlns:adec="http://schemas.microsoft.com/office/drawing/2017/decorative" val="1"/>
+              </a:ext>
+            </a:extLst>
+          </p:cNvPr>
           <p:cNvSpPr/>
           <p:nvPr/>
         </p:nvSpPr>
@@ -8908,7 +9297,13 @@
       </p:sp>
       <p:sp>
         <p:nvSpPr>
-          <p:cNvPr id="18" name="Icon FaUserCheck"/>
+          <p:cNvPr id="18" name="Icon FaUserCheck" descr="">
+            <a:extLst>
+              <a:ext uri="{C183D7F6-B498-43B3-948B-1728B52AA6E4}">
+                <adec:decorative xmlns:adec="http://schemas.microsoft.com/office/drawing/2017/decorative" val="1"/>
+              </a:ext>
+            </a:extLst>
+          </p:cNvPr>
           <p:cNvSpPr/>
           <p:nvPr/>
         </p:nvSpPr>
@@ -8933,7 +9328,13 @@
       </p:sp>
       <p:pic>
         <p:nvPicPr>
-          <p:cNvPr id="19" name="Image 3" descr="C:\Users\whale\git\mwb-b08\presentations\_build\icons\FaUserCheck.png">    </p:cNvPr>
+          <p:cNvPr id="19" name="Image 3" descr="">
+            <a:extLst>
+              <a:ext uri="{C183D7F6-B498-43B3-948B-1728B52AA6E4}">
+                <adec:decorative xmlns:adec="http://schemas.microsoft.com/office/drawing/2017/decorative" val="1"/>
+              </a:ext>
+            </a:extLst>
+          </p:cNvPr>
           <p:cNvPicPr>
             <a:picLocks noChangeAspect="1"/>
           </p:cNvPicPr>
@@ -9010,7 +9411,13 @@
       </p:sp>
       <p:sp>
         <p:nvSpPr>
-          <p:cNvPr id="21" name="Next"/>
+          <p:cNvPr id="21" name="Next" descr="">
+            <a:extLst>
+              <a:ext uri="{C183D7F6-B498-43B3-948B-1728B52AA6E4}">
+                <adec:decorative xmlns:adec="http://schemas.microsoft.com/office/drawing/2017/decorative" val="1"/>
+              </a:ext>
+            </a:extLst>
+          </p:cNvPr>
           <p:cNvSpPr/>
           <p:nvPr/>
         </p:nvSpPr>
@@ -9044,7 +9451,13 @@
       </p:sp>
       <p:sp>
         <p:nvSpPr>
-          <p:cNvPr id="22" name="Icon FaRoute"/>
+          <p:cNvPr id="22" name="Icon FaRoute" descr="">
+            <a:extLst>
+              <a:ext uri="{C183D7F6-B498-43B3-948B-1728B52AA6E4}">
+                <adec:decorative xmlns:adec="http://schemas.microsoft.com/office/drawing/2017/decorative" val="1"/>
+              </a:ext>
+            </a:extLst>
+          </p:cNvPr>
           <p:cNvSpPr/>
           <p:nvPr/>
         </p:nvSpPr>
@@ -9069,7 +9482,13 @@
       </p:sp>
       <p:pic>
         <p:nvPicPr>
-          <p:cNvPr id="23" name="Image 4" descr="C:\Users\whale\git\mwb-b08\presentations\_build\icons\FaRoute.png">    </p:cNvPr>
+          <p:cNvPr id="23" name="Image 4" descr="">
+            <a:extLst>
+              <a:ext uri="{C183D7F6-B498-43B3-948B-1728B52AA6E4}">
+                <adec:decorative xmlns:adec="http://schemas.microsoft.com/office/drawing/2017/decorative" val="1"/>
+              </a:ext>
+            </a:extLst>
+          </p:cNvPr>
           <p:cNvPicPr>
             <a:picLocks noChangeAspect="1"/>
           </p:cNvPicPr>
@@ -9711,7 +10130,13 @@
       </p:sp>
       <p:sp>
         <p:nvSpPr>
-          <p:cNvPr id="3" name="Tag Why"/>
+          <p:cNvPr id="3" name="Tag Why" descr="">
+            <a:extLst>
+              <a:ext uri="{C183D7F6-B498-43B3-948B-1728B52AA6E4}">
+                <adec:decorative xmlns:adec="http://schemas.microsoft.com/office/drawing/2017/decorative" val="1"/>
+              </a:ext>
+            </a:extLst>
+          </p:cNvPr>
           <p:cNvSpPr/>
           <p:nvPr/>
         </p:nvSpPr>
@@ -9810,7 +10235,13 @@
       </p:sp>
       <p:sp>
         <p:nvSpPr>
-          <p:cNvPr id="6" name="Job 0"/>
+          <p:cNvPr id="6" name="Job 0" descr="">
+            <a:extLst>
+              <a:ext uri="{C183D7F6-B498-43B3-948B-1728B52AA6E4}">
+                <adec:decorative xmlns:adec="http://schemas.microsoft.com/office/drawing/2017/decorative" val="1"/>
+              </a:ext>
+            </a:extLst>
+          </p:cNvPr>
           <p:cNvSpPr/>
           <p:nvPr/>
         </p:nvSpPr>
@@ -9891,7 +10322,13 @@
       </p:sp>
       <p:sp>
         <p:nvSpPr>
-          <p:cNvPr id="8" name="Job 1"/>
+          <p:cNvPr id="8" name="Job 1" descr="">
+            <a:extLst>
+              <a:ext uri="{C183D7F6-B498-43B3-948B-1728B52AA6E4}">
+                <adec:decorative xmlns:adec="http://schemas.microsoft.com/office/drawing/2017/decorative" val="1"/>
+              </a:ext>
+            </a:extLst>
+          </p:cNvPr>
           <p:cNvSpPr/>
           <p:nvPr/>
         </p:nvSpPr>
@@ -9972,7 +10409,13 @@
       </p:sp>
       <p:sp>
         <p:nvSpPr>
-          <p:cNvPr id="10" name="Job 2"/>
+          <p:cNvPr id="10" name="Job 2" descr="">
+            <a:extLst>
+              <a:ext uri="{C183D7F6-B498-43B3-948B-1728B52AA6E4}">
+                <adec:decorative xmlns:adec="http://schemas.microsoft.com/office/drawing/2017/decorative" val="1"/>
+              </a:ext>
+            </a:extLst>
+          </p:cNvPr>
           <p:cNvSpPr/>
           <p:nvPr/>
         </p:nvSpPr>
@@ -10053,7 +10496,13 @@
       </p:sp>
       <p:sp>
         <p:nvSpPr>
-          <p:cNvPr id="12" name="Job 3"/>
+          <p:cNvPr id="12" name="Job 3" descr="">
+            <a:extLst>
+              <a:ext uri="{C183D7F6-B498-43B3-948B-1728B52AA6E4}">
+                <adec:decorative xmlns:adec="http://schemas.microsoft.com/office/drawing/2017/decorative" val="1"/>
+              </a:ext>
+            </a:extLst>
+          </p:cNvPr>
           <p:cNvSpPr/>
           <p:nvPr/>
         </p:nvSpPr>
@@ -10134,7 +10583,13 @@
       </p:sp>
       <p:sp>
         <p:nvSpPr>
-          <p:cNvPr id="14" name="Job 4"/>
+          <p:cNvPr id="14" name="Job 4" descr="">
+            <a:extLst>
+              <a:ext uri="{C183D7F6-B498-43B3-948B-1728B52AA6E4}">
+                <adec:decorative xmlns:adec="http://schemas.microsoft.com/office/drawing/2017/decorative" val="1"/>
+              </a:ext>
+            </a:extLst>
+          </p:cNvPr>
           <p:cNvSpPr/>
           <p:nvPr/>
         </p:nvSpPr>
@@ -10215,7 +10670,13 @@
       </p:sp>
       <p:sp>
         <p:nvSpPr>
-          <p:cNvPr id="16" name="Job 5"/>
+          <p:cNvPr id="16" name="Job 5" descr="">
+            <a:extLst>
+              <a:ext uri="{C183D7F6-B498-43B3-948B-1728B52AA6E4}">
+                <adec:decorative xmlns:adec="http://schemas.microsoft.com/office/drawing/2017/decorative" val="1"/>
+              </a:ext>
+            </a:extLst>
+          </p:cNvPr>
           <p:cNvSpPr/>
           <p:nvPr/>
         </p:nvSpPr>
@@ -10296,7 +10757,13 @@
       </p:sp>
       <p:sp>
         <p:nvSpPr>
-          <p:cNvPr id="18" name="Platforms box"/>
+          <p:cNvPr id="18" name="Platforms box" descr="">
+            <a:extLst>
+              <a:ext uri="{C183D7F6-B498-43B3-948B-1728B52AA6E4}">
+                <adec:decorative xmlns:adec="http://schemas.microsoft.com/office/drawing/2017/decorative" val="1"/>
+              </a:ext>
+            </a:extLst>
+          </p:cNvPr>
           <p:cNvSpPr/>
           <p:nvPr/>
         </p:nvSpPr>
@@ -10330,7 +10797,13 @@
       </p:sp>
       <p:sp>
         <p:nvSpPr>
-          <p:cNvPr id="19" name="Icon FaCubes"/>
+          <p:cNvPr id="19" name="Icon FaCubes" descr="">
+            <a:extLst>
+              <a:ext uri="{C183D7F6-B498-43B3-948B-1728B52AA6E4}">
+                <adec:decorative xmlns:adec="http://schemas.microsoft.com/office/drawing/2017/decorative" val="1"/>
+              </a:ext>
+            </a:extLst>
+          </p:cNvPr>
           <p:cNvSpPr/>
           <p:nvPr/>
         </p:nvSpPr>
@@ -10355,7 +10828,13 @@
       </p:sp>
       <p:pic>
         <p:nvPicPr>
-          <p:cNvPr id="20" name="Image 0" descr="C:\Users\whale\git\mwb-b08\presentations\_build\icons\FaCubes.png">    </p:cNvPr>
+          <p:cNvPr id="20" name="Image 0" descr="">
+            <a:extLst>
+              <a:ext uri="{C183D7F6-B498-43B3-948B-1728B52AA6E4}">
+                <adec:decorative xmlns:adec="http://schemas.microsoft.com/office/drawing/2017/decorative" val="1"/>
+              </a:ext>
+            </a:extLst>
+          </p:cNvPr>
           <p:cNvPicPr>
             <a:picLocks noChangeAspect="1"/>
           </p:cNvPicPr>
@@ -10544,7 +11023,13 @@
       </p:sp>
       <p:sp>
         <p:nvSpPr>
-          <p:cNvPr id="23" name="One plane"/>
+          <p:cNvPr id="23" name="One plane" descr="">
+            <a:extLst>
+              <a:ext uri="{C183D7F6-B498-43B3-948B-1728B52AA6E4}">
+                <adec:decorative xmlns:adec="http://schemas.microsoft.com/office/drawing/2017/decorative" val="1"/>
+              </a:ext>
+            </a:extLst>
+          </p:cNvPr>
           <p:cNvSpPr/>
           <p:nvPr/>
         </p:nvSpPr>
@@ -10578,7 +11063,13 @@
       </p:sp>
       <p:sp>
         <p:nvSpPr>
-          <p:cNvPr id="24" name="Icon FaSitemap"/>
+          <p:cNvPr id="24" name="Icon FaSitemap" descr="">
+            <a:extLst>
+              <a:ext uri="{C183D7F6-B498-43B3-948B-1728B52AA6E4}">
+                <adec:decorative xmlns:adec="http://schemas.microsoft.com/office/drawing/2017/decorative" val="1"/>
+              </a:ext>
+            </a:extLst>
+          </p:cNvPr>
           <p:cNvSpPr/>
           <p:nvPr/>
         </p:nvSpPr>
@@ -10603,7 +11094,13 @@
       </p:sp>
       <p:pic>
         <p:nvPicPr>
-          <p:cNvPr id="25" name="Image 1" descr="C:\Users\whale\git\mwb-b08\presentations\_build\icons\FaSitemap.png">    </p:cNvPr>
+          <p:cNvPr id="25" name="Image 1" descr="">
+            <a:extLst>
+              <a:ext uri="{C183D7F6-B498-43B3-948B-1728B52AA6E4}">
+                <adec:decorative xmlns:adec="http://schemas.microsoft.com/office/drawing/2017/decorative" val="1"/>
+              </a:ext>
+            </a:extLst>
+          </p:cNvPr>
           <p:cNvPicPr>
             <a:picLocks noChangeAspect="1"/>
           </p:cNvPicPr>
@@ -10821,7 +11318,13 @@
       </p:sp>
       <p:sp>
         <p:nvSpPr>
-          <p:cNvPr id="3" name="Tag Why"/>
+          <p:cNvPr id="3" name="Tag Why" descr="">
+            <a:extLst>
+              <a:ext uri="{C183D7F6-B498-43B3-948B-1728B52AA6E4}">
+                <adec:decorative xmlns:adec="http://schemas.microsoft.com/office/drawing/2017/decorative" val="1"/>
+              </a:ext>
+            </a:extLst>
+          </p:cNvPr>
           <p:cNvSpPr/>
           <p:nvPr/>
         </p:nvSpPr>
@@ -10884,7 +11387,13 @@
       </p:sp>
       <p:sp>
         <p:nvSpPr>
-          <p:cNvPr id="5" name="Form 1"/>
+          <p:cNvPr id="5" name="Form 1" descr="">
+            <a:extLst>
+              <a:ext uri="{C183D7F6-B498-43B3-948B-1728B52AA6E4}">
+                <adec:decorative xmlns:adec="http://schemas.microsoft.com/office/drawing/2017/decorative" val="1"/>
+              </a:ext>
+            </a:extLst>
+          </p:cNvPr>
           <p:cNvSpPr/>
           <p:nvPr/>
         </p:nvSpPr>
@@ -10918,7 +11427,13 @@
       </p:sp>
       <p:sp>
         <p:nvSpPr>
-          <p:cNvPr id="6" name="Icon FaCloud"/>
+          <p:cNvPr id="6" name="Icon FaCloud" descr="">
+            <a:extLst>
+              <a:ext uri="{C183D7F6-B498-43B3-948B-1728B52AA6E4}">
+                <adec:decorative xmlns:adec="http://schemas.microsoft.com/office/drawing/2017/decorative" val="1"/>
+              </a:ext>
+            </a:extLst>
+          </p:cNvPr>
           <p:cNvSpPr/>
           <p:nvPr/>
         </p:nvSpPr>
@@ -10943,7 +11458,13 @@
       </p:sp>
       <p:pic>
         <p:nvPicPr>
-          <p:cNvPr id="7" name="Image 0" descr="C:\Users\whale\git\mwb-b08\presentations\_build\icons\FaCloud.png">    </p:cNvPr>
+          <p:cNvPr id="7" name="Image 0" descr="">
+            <a:extLst>
+              <a:ext uri="{C183D7F6-B498-43B3-948B-1728B52AA6E4}">
+                <adec:decorative xmlns:adec="http://schemas.microsoft.com/office/drawing/2017/decorative" val="1"/>
+              </a:ext>
+            </a:extLst>
+          </p:cNvPr>
           <p:cNvPicPr>
             <a:picLocks noChangeAspect="1"/>
           </p:cNvPicPr>
@@ -11042,7 +11563,13 @@
       </p:sp>
       <p:sp>
         <p:nvSpPr>
-          <p:cNvPr id="10" name="Form 2"/>
+          <p:cNvPr id="10" name="Form 2" descr="">
+            <a:extLst>
+              <a:ext uri="{C183D7F6-B498-43B3-948B-1728B52AA6E4}">
+                <adec:decorative xmlns:adec="http://schemas.microsoft.com/office/drawing/2017/decorative" val="1"/>
+              </a:ext>
+            </a:extLst>
+          </p:cNvPr>
           <p:cNvSpPr/>
           <p:nvPr/>
         </p:nvSpPr>
@@ -11076,7 +11603,13 @@
       </p:sp>
       <p:sp>
         <p:nvSpPr>
-          <p:cNvPr id="11" name="Icon FaGlobe"/>
+          <p:cNvPr id="11" name="Icon FaGlobe" descr="">
+            <a:extLst>
+              <a:ext uri="{C183D7F6-B498-43B3-948B-1728B52AA6E4}">
+                <adec:decorative xmlns:adec="http://schemas.microsoft.com/office/drawing/2017/decorative" val="1"/>
+              </a:ext>
+            </a:extLst>
+          </p:cNvPr>
           <p:cNvSpPr/>
           <p:nvPr/>
         </p:nvSpPr>
@@ -11101,7 +11634,13 @@
       </p:sp>
       <p:pic>
         <p:nvPicPr>
-          <p:cNvPr id="12" name="Image 1" descr="C:\Users\whale\git\mwb-b08\presentations\_build\icons\FaGlobe.png">    </p:cNvPr>
+          <p:cNvPr id="12" name="Image 1" descr="">
+            <a:extLst>
+              <a:ext uri="{C183D7F6-B498-43B3-948B-1728B52AA6E4}">
+                <adec:decorative xmlns:adec="http://schemas.microsoft.com/office/drawing/2017/decorative" val="1"/>
+              </a:ext>
+            </a:extLst>
+          </p:cNvPr>
           <p:cNvPicPr>
             <a:picLocks noChangeAspect="1"/>
           </p:cNvPicPr>
@@ -11200,7 +11739,13 @@
       </p:sp>
       <p:sp>
         <p:nvSpPr>
-          <p:cNvPr id="15" name="Form 3"/>
+          <p:cNvPr id="15" name="Form 3" descr="">
+            <a:extLst>
+              <a:ext uri="{C183D7F6-B498-43B3-948B-1728B52AA6E4}">
+                <adec:decorative xmlns:adec="http://schemas.microsoft.com/office/drawing/2017/decorative" val="1"/>
+              </a:ext>
+            </a:extLst>
+          </p:cNvPr>
           <p:cNvSpPr/>
           <p:nvPr/>
         </p:nvSpPr>
@@ -11234,7 +11779,13 @@
       </p:sp>
       <p:sp>
         <p:nvSpPr>
-          <p:cNvPr id="16" name="Icon FaShieldHalved"/>
+          <p:cNvPr id="16" name="Icon FaShieldHalved" descr="">
+            <a:extLst>
+              <a:ext uri="{C183D7F6-B498-43B3-948B-1728B52AA6E4}">
+                <adec:decorative xmlns:adec="http://schemas.microsoft.com/office/drawing/2017/decorative" val="1"/>
+              </a:ext>
+            </a:extLst>
+          </p:cNvPr>
           <p:cNvSpPr/>
           <p:nvPr/>
         </p:nvSpPr>
@@ -11259,7 +11810,13 @@
       </p:sp>
       <p:pic>
         <p:nvPicPr>
-          <p:cNvPr id="17" name="Image 2" descr="C:\Users\whale\git\mwb-b08\presentations\_build\icons\FaShieldHalved.png">    </p:cNvPr>
+          <p:cNvPr id="17" name="Image 2" descr="">
+            <a:extLst>
+              <a:ext uri="{C183D7F6-B498-43B3-948B-1728B52AA6E4}">
+                <adec:decorative xmlns:adec="http://schemas.microsoft.com/office/drawing/2017/decorative" val="1"/>
+              </a:ext>
+            </a:extLst>
+          </p:cNvPr>
           <p:cNvPicPr>
             <a:picLocks noChangeAspect="1"/>
           </p:cNvPicPr>
@@ -11358,7 +11915,13 @@
       </p:sp>
       <p:sp>
         <p:nvSpPr>
-          <p:cNvPr id="20" name="Structure"/>
+          <p:cNvPr id="20" name="Structure" descr="">
+            <a:extLst>
+              <a:ext uri="{C183D7F6-B498-43B3-948B-1728B52AA6E4}">
+                <adec:decorative xmlns:adec="http://schemas.microsoft.com/office/drawing/2017/decorative" val="1"/>
+              </a:ext>
+            </a:extLst>
+          </p:cNvPr>
           <p:cNvSpPr/>
           <p:nvPr/>
         </p:nvSpPr>
@@ -11392,7 +11955,13 @@
       </p:sp>
       <p:sp>
         <p:nvSpPr>
-          <p:cNvPr id="21" name="Icon FaTriangleExclamation"/>
+          <p:cNvPr id="21" name="Icon FaTriangleExclamation" descr="">
+            <a:extLst>
+              <a:ext uri="{C183D7F6-B498-43B3-948B-1728B52AA6E4}">
+                <adec:decorative xmlns:adec="http://schemas.microsoft.com/office/drawing/2017/decorative" val="1"/>
+              </a:ext>
+            </a:extLst>
+          </p:cNvPr>
           <p:cNvSpPr/>
           <p:nvPr/>
         </p:nvSpPr>
@@ -11417,7 +11986,13 @@
       </p:sp>
       <p:pic>
         <p:nvPicPr>
-          <p:cNvPr id="22" name="Image 3" descr="C:\Users\whale\git\mwb-b08\presentations\_build\icons\FaTriangleExclamation.png">    </p:cNvPr>
+          <p:cNvPr id="22" name="Image 3" descr="">
+            <a:extLst>
+              <a:ext uri="{C183D7F6-B498-43B3-948B-1728B52AA6E4}">
+                <adec:decorative xmlns:adec="http://schemas.microsoft.com/office/drawing/2017/decorative" val="1"/>
+              </a:ext>
+            </a:extLst>
+          </p:cNvPr>
           <p:cNvPicPr>
             <a:picLocks noChangeAspect="1"/>
           </p:cNvPicPr>
@@ -11635,7 +12210,13 @@
       </p:sp>
       <p:sp>
         <p:nvSpPr>
-          <p:cNvPr id="3" name="Tag Why"/>
+          <p:cNvPr id="3" name="Tag Why" descr="">
+            <a:extLst>
+              <a:ext uri="{C183D7F6-B498-43B3-948B-1728B52AA6E4}">
+                <adec:decorative xmlns:adec="http://schemas.microsoft.com/office/drawing/2017/decorative" val="1"/>
+              </a:ext>
+            </a:extLst>
+          </p:cNvPr>
           <p:cNvSpPr/>
           <p:nvPr/>
         </p:nvSpPr>
@@ -11717,7 +12298,7 @@
         <a:graphic>
           <a:graphicData uri="http://schemas.openxmlformats.org/drawingml/2006/table">
             <a:tbl>
-              <a:tblPr/>
+              <a:tblPr firstRow="1" bandRow="1"/>
               <a:tblGrid>
                 <a:gridCol w="2377440"/>
                 <a:gridCol w="4572000"/>
@@ -12556,7 +13137,13 @@
       </p:graphicFrame>
       <p:sp>
         <p:nvSpPr>
-          <p:cNvPr id="6" name="NIST box"/>
+          <p:cNvPr id="6" name="NIST box" descr="">
+            <a:extLst>
+              <a:ext uri="{C183D7F6-B498-43B3-948B-1728B52AA6E4}">
+                <adec:decorative xmlns:adec="http://schemas.microsoft.com/office/drawing/2017/decorative" val="1"/>
+              </a:ext>
+            </a:extLst>
+          </p:cNvPr>
           <p:cNvSpPr/>
           <p:nvPr/>
         </p:nvSpPr>
@@ -12590,7 +13177,13 @@
       </p:sp>
       <p:sp>
         <p:nvSpPr>
-          <p:cNvPr id="7" name="Icon FaBook"/>
+          <p:cNvPr id="7" name="Icon FaBook" descr="">
+            <a:extLst>
+              <a:ext uri="{C183D7F6-B498-43B3-948B-1728B52AA6E4}">
+                <adec:decorative xmlns:adec="http://schemas.microsoft.com/office/drawing/2017/decorative" val="1"/>
+              </a:ext>
+            </a:extLst>
+          </p:cNvPr>
           <p:cNvSpPr/>
           <p:nvPr/>
         </p:nvSpPr>
@@ -12615,7 +13208,13 @@
       </p:sp>
       <p:pic>
         <p:nvPicPr>
-          <p:cNvPr id="8" name="Image 0" descr="C:\Users\whale\git\mwb-b08\presentations\_build\icons\FaBook.png">    </p:cNvPr>
+          <p:cNvPr id="8" name="Image 0" descr="">
+            <a:extLst>
+              <a:ext uri="{C183D7F6-B498-43B3-948B-1728B52AA6E4}">
+                <adec:decorative xmlns:adec="http://schemas.microsoft.com/office/drawing/2017/decorative" val="1"/>
+              </a:ext>
+            </a:extLst>
+          </p:cNvPr>
           <p:cNvPicPr>
             <a:picLocks noChangeAspect="1"/>
           </p:cNvPicPr>
@@ -12772,7 +13371,13 @@
       </p:sp>
       <p:sp>
         <p:nvSpPr>
-          <p:cNvPr id="11" name="FedRAMP"/>
+          <p:cNvPr id="11" name="FedRAMP" descr="">
+            <a:extLst>
+              <a:ext uri="{C183D7F6-B498-43B3-948B-1728B52AA6E4}">
+                <adec:decorative xmlns:adec="http://schemas.microsoft.com/office/drawing/2017/decorative" val="1"/>
+              </a:ext>
+            </a:extLst>
+          </p:cNvPr>
           <p:cNvSpPr/>
           <p:nvPr/>
         </p:nvSpPr>
@@ -12806,7 +13411,13 @@
       </p:sp>
       <p:sp>
         <p:nvSpPr>
-          <p:cNvPr id="12" name="Icon FaLandmark"/>
+          <p:cNvPr id="12" name="Icon FaLandmark" descr="">
+            <a:extLst>
+              <a:ext uri="{C183D7F6-B498-43B3-948B-1728B52AA6E4}">
+                <adec:decorative xmlns:adec="http://schemas.microsoft.com/office/drawing/2017/decorative" val="1"/>
+              </a:ext>
+            </a:extLst>
+          </p:cNvPr>
           <p:cNvSpPr/>
           <p:nvPr/>
         </p:nvSpPr>
@@ -12831,7 +13442,13 @@
       </p:sp>
       <p:pic>
         <p:nvPicPr>
-          <p:cNvPr id="13" name="Image 1" descr="C:\Users\whale\git\mwb-b08\presentations\_build\icons\FaLandmark.png">    </p:cNvPr>
+          <p:cNvPr id="13" name="Image 1" descr="">
+            <a:extLst>
+              <a:ext uri="{C183D7F6-B498-43B3-948B-1728B52AA6E4}">
+                <adec:decorative xmlns:adec="http://schemas.microsoft.com/office/drawing/2017/decorative" val="1"/>
+              </a:ext>
+            </a:extLst>
+          </p:cNvPr>
           <p:cNvPicPr>
             <a:picLocks noChangeAspect="1"/>
           </p:cNvPicPr>
@@ -13049,7 +13666,13 @@
       </p:sp>
       <p:sp>
         <p:nvSpPr>
-          <p:cNvPr id="3" name="Tag What"/>
+          <p:cNvPr id="3" name="Tag What" descr="">
+            <a:extLst>
+              <a:ext uri="{C183D7F6-B498-43B3-948B-1728B52AA6E4}">
+                <adec:decorative xmlns:adec="http://schemas.microsoft.com/office/drawing/2017/decorative" val="1"/>
+              </a:ext>
+            </a:extLst>
+          </p:cNvPr>
           <p:cNvSpPr/>
           <p:nvPr/>
         </p:nvSpPr>
@@ -13148,7 +13771,13 @@
       </p:sp>
       <p:sp>
         <p:nvSpPr>
-          <p:cNvPr id="6" name="Part 0"/>
+          <p:cNvPr id="6" name="Part 0" descr="">
+            <a:extLst>
+              <a:ext uri="{C183D7F6-B498-43B3-948B-1728B52AA6E4}">
+                <adec:decorative xmlns:adec="http://schemas.microsoft.com/office/drawing/2017/decorative" val="1"/>
+              </a:ext>
+            </a:extLst>
+          </p:cNvPr>
           <p:cNvSpPr/>
           <p:nvPr/>
         </p:nvSpPr>
@@ -13229,7 +13858,13 @@
       </p:sp>
       <p:sp>
         <p:nvSpPr>
-          <p:cNvPr id="8" name="Part 1"/>
+          <p:cNvPr id="8" name="Part 1" descr="">
+            <a:extLst>
+              <a:ext uri="{C183D7F6-B498-43B3-948B-1728B52AA6E4}">
+                <adec:decorative xmlns:adec="http://schemas.microsoft.com/office/drawing/2017/decorative" val="1"/>
+              </a:ext>
+            </a:extLst>
+          </p:cNvPr>
           <p:cNvSpPr/>
           <p:nvPr/>
         </p:nvSpPr>
@@ -13310,7 +13945,13 @@
       </p:sp>
       <p:sp>
         <p:nvSpPr>
-          <p:cNvPr id="10" name="Part 2"/>
+          <p:cNvPr id="10" name="Part 2" descr="">
+            <a:extLst>
+              <a:ext uri="{C183D7F6-B498-43B3-948B-1728B52AA6E4}">
+                <adec:decorative xmlns:adec="http://schemas.microsoft.com/office/drawing/2017/decorative" val="1"/>
+              </a:ext>
+            </a:extLst>
+          </p:cNvPr>
           <p:cNvSpPr/>
           <p:nvPr/>
         </p:nvSpPr>
@@ -13391,7 +14032,13 @@
       </p:sp>
       <p:sp>
         <p:nvSpPr>
-          <p:cNvPr id="12" name="Part 3"/>
+          <p:cNvPr id="12" name="Part 3" descr="">
+            <a:extLst>
+              <a:ext uri="{C183D7F6-B498-43B3-948B-1728B52AA6E4}">
+                <adec:decorative xmlns:adec="http://schemas.microsoft.com/office/drawing/2017/decorative" val="1"/>
+              </a:ext>
+            </a:extLst>
+          </p:cNvPr>
           <p:cNvSpPr/>
           <p:nvPr/>
         </p:nvSpPr>
@@ -13472,7 +14119,13 @@
       </p:sp>
       <p:sp>
         <p:nvSpPr>
-          <p:cNvPr id="14" name="Part 4"/>
+          <p:cNvPr id="14" name="Part 4" descr="">
+            <a:extLst>
+              <a:ext uri="{C183D7F6-B498-43B3-948B-1728B52AA6E4}">
+                <adec:decorative xmlns:adec="http://schemas.microsoft.com/office/drawing/2017/decorative" val="1"/>
+              </a:ext>
+            </a:extLst>
+          </p:cNvPr>
           <p:cNvSpPr/>
           <p:nvPr/>
         </p:nvSpPr>
@@ -13553,7 +14206,13 @@
       </p:sp>
       <p:sp>
         <p:nvSpPr>
-          <p:cNvPr id="16" name="Entra box"/>
+          <p:cNvPr id="16" name="Entra box" descr="">
+            <a:extLst>
+              <a:ext uri="{C183D7F6-B498-43B3-948B-1728B52AA6E4}">
+                <adec:decorative xmlns:adec="http://schemas.microsoft.com/office/drawing/2017/decorative" val="1"/>
+              </a:ext>
+            </a:extLst>
+          </p:cNvPr>
           <p:cNvSpPr/>
           <p:nvPr/>
         </p:nvSpPr>
@@ -13587,7 +14246,13 @@
       </p:sp>
       <p:sp>
         <p:nvSpPr>
-          <p:cNvPr id="17" name="Icon FaPlugCircleXmark"/>
+          <p:cNvPr id="17" name="Icon FaPlugCircleXmark" descr="">
+            <a:extLst>
+              <a:ext uri="{C183D7F6-B498-43B3-948B-1728B52AA6E4}">
+                <adec:decorative xmlns:adec="http://schemas.microsoft.com/office/drawing/2017/decorative" val="1"/>
+              </a:ext>
+            </a:extLst>
+          </p:cNvPr>
           <p:cNvSpPr/>
           <p:nvPr/>
         </p:nvSpPr>
@@ -13612,7 +14277,13 @@
       </p:sp>
       <p:pic>
         <p:nvPicPr>
-          <p:cNvPr id="18" name="Image 0" descr="C:\Users\whale\git\mwb-b08\presentations\_build\icons\FaPlugCircleXmark.png">    </p:cNvPr>
+          <p:cNvPr id="18" name="Image 0" descr="">
+            <a:extLst>
+              <a:ext uri="{C183D7F6-B498-43B3-948B-1728B52AA6E4}">
+                <adec:decorative xmlns:adec="http://schemas.microsoft.com/office/drawing/2017/decorative" val="1"/>
+              </a:ext>
+            </a:extLst>
+          </p:cNvPr>
           <p:cNvPicPr>
             <a:picLocks noChangeAspect="1"/>
           </p:cNvPicPr>
@@ -13783,7 +14454,13 @@
       </p:sp>
       <p:sp>
         <p:nvSpPr>
-          <p:cNvPr id="21" name="Locators last"/>
+          <p:cNvPr id="21" name="Locators last" descr="">
+            <a:extLst>
+              <a:ext uri="{C183D7F6-B498-43B3-948B-1728B52AA6E4}">
+                <adec:decorative xmlns:adec="http://schemas.microsoft.com/office/drawing/2017/decorative" val="1"/>
+              </a:ext>
+            </a:extLst>
+          </p:cNvPr>
           <p:cNvSpPr/>
           <p:nvPr/>
         </p:nvSpPr>
@@ -13817,7 +14494,13 @@
       </p:sp>
       <p:sp>
         <p:nvSpPr>
-          <p:cNvPr id="22" name="Icon FaServer"/>
+          <p:cNvPr id="22" name="Icon FaServer" descr="">
+            <a:extLst>
+              <a:ext uri="{C183D7F6-B498-43B3-948B-1728B52AA6E4}">
+                <adec:decorative xmlns:adec="http://schemas.microsoft.com/office/drawing/2017/decorative" val="1"/>
+              </a:ext>
+            </a:extLst>
+          </p:cNvPr>
           <p:cNvSpPr/>
           <p:nvPr/>
         </p:nvSpPr>
@@ -13842,7 +14525,13 @@
       </p:sp>
       <p:pic>
         <p:nvPicPr>
-          <p:cNvPr id="23" name="Image 1" descr="C:\Users\whale\git\mwb-b08\presentations\_build\icons\FaServer.png">    </p:cNvPr>
+          <p:cNvPr id="23" name="Image 1" descr="">
+            <a:extLst>
+              <a:ext uri="{C183D7F6-B498-43B3-948B-1728B52AA6E4}">
+                <adec:decorative xmlns:adec="http://schemas.microsoft.com/office/drawing/2017/decorative" val="1"/>
+              </a:ext>
+            </a:extLst>
+          </p:cNvPr>
           <p:cNvPicPr>
             <a:picLocks noChangeAspect="1"/>
           </p:cNvPicPr>
@@ -14060,7 +14749,13 @@
       </p:sp>
       <p:sp>
         <p:nvSpPr>
-          <p:cNvPr id="3" name="Tag What"/>
+          <p:cNvPr id="3" name="Tag What" descr="">
+            <a:extLst>
+              <a:ext uri="{C183D7F6-B498-43B3-948B-1728B52AA6E4}">
+                <adec:decorative xmlns:adec="http://schemas.microsoft.com/office/drawing/2017/decorative" val="1"/>
+              </a:ext>
+            </a:extLst>
+          </p:cNvPr>
           <p:cNvSpPr/>
           <p:nvPr/>
         </p:nvSpPr>
@@ -14123,7 +14818,13 @@
       </p:sp>
       <p:sp>
         <p:nvSpPr>
-          <p:cNvPr id="5" name="Path col 1"/>
+          <p:cNvPr id="5" name="Path col 1" descr="">
+            <a:extLst>
+              <a:ext uri="{C183D7F6-B498-43B3-948B-1728B52AA6E4}">
+                <adec:decorative xmlns:adec="http://schemas.microsoft.com/office/drawing/2017/decorative" val="1"/>
+              </a:ext>
+            </a:extLst>
+          </p:cNvPr>
           <p:cNvSpPr/>
           <p:nvPr/>
         </p:nvSpPr>
@@ -14157,7 +14858,13 @@
       </p:sp>
       <p:sp>
         <p:nvSpPr>
-          <p:cNvPr id="6" name="Icon FaRoute"/>
+          <p:cNvPr id="6" name="Icon FaRoute" descr="">
+            <a:extLst>
+              <a:ext uri="{C183D7F6-B498-43B3-948B-1728B52AA6E4}">
+                <adec:decorative xmlns:adec="http://schemas.microsoft.com/office/drawing/2017/decorative" val="1"/>
+              </a:ext>
+            </a:extLst>
+          </p:cNvPr>
           <p:cNvSpPr/>
           <p:nvPr/>
         </p:nvSpPr>
@@ -14182,7 +14889,13 @@
       </p:sp>
       <p:pic>
         <p:nvPicPr>
-          <p:cNvPr id="7" name="Image 0" descr="C:\Users\whale\git\mwb-b08\presentations\_build\icons\FaRoute.png">    </p:cNvPr>
+          <p:cNvPr id="7" name="Image 0" descr="">
+            <a:extLst>
+              <a:ext uri="{C183D7F6-B498-43B3-948B-1728B52AA6E4}">
+                <adec:decorative xmlns:adec="http://schemas.microsoft.com/office/drawing/2017/decorative" val="1"/>
+              </a:ext>
+            </a:extLst>
+          </p:cNvPr>
           <p:cNvPicPr>
             <a:picLocks noChangeAspect="1"/>
           </p:cNvPicPr>
@@ -14339,7 +15052,13 @@
       </p:sp>
       <p:sp>
         <p:nvSpPr>
-          <p:cNvPr id="10" name="Path col 2"/>
+          <p:cNvPr id="10" name="Path col 2" descr="">
+            <a:extLst>
+              <a:ext uri="{C183D7F6-B498-43B3-948B-1728B52AA6E4}">
+                <adec:decorative xmlns:adec="http://schemas.microsoft.com/office/drawing/2017/decorative" val="1"/>
+              </a:ext>
+            </a:extLst>
+          </p:cNvPr>
           <p:cNvSpPr/>
           <p:nvPr/>
         </p:nvSpPr>
@@ -14373,7 +15092,13 @@
       </p:sp>
       <p:sp>
         <p:nvSpPr>
-          <p:cNvPr id="11" name="Icon FaLock"/>
+          <p:cNvPr id="11" name="Icon FaLock" descr="">
+            <a:extLst>
+              <a:ext uri="{C183D7F6-B498-43B3-948B-1728B52AA6E4}">
+                <adec:decorative xmlns:adec="http://schemas.microsoft.com/office/drawing/2017/decorative" val="1"/>
+              </a:ext>
+            </a:extLst>
+          </p:cNvPr>
           <p:cNvSpPr/>
           <p:nvPr/>
         </p:nvSpPr>
@@ -14398,7 +15123,13 @@
       </p:sp>
       <p:pic>
         <p:nvPicPr>
-          <p:cNvPr id="12" name="Image 1" descr="C:\Users\whale\git\mwb-b08\presentations\_build\icons\FaLock.png">    </p:cNvPr>
+          <p:cNvPr id="12" name="Image 1" descr="">
+            <a:extLst>
+              <a:ext uri="{C183D7F6-B498-43B3-948B-1728B52AA6E4}">
+                <adec:decorative xmlns:adec="http://schemas.microsoft.com/office/drawing/2017/decorative" val="1"/>
+              </a:ext>
+            </a:extLst>
+          </p:cNvPr>
           <p:cNvPicPr>
             <a:picLocks noChangeAspect="1"/>
           </p:cNvPicPr>
@@ -14555,7 +15286,13 @@
       </p:sp>
       <p:sp>
         <p:nvSpPr>
-          <p:cNvPr id="15" name="Path col 3"/>
+          <p:cNvPr id="15" name="Path col 3" descr="">
+            <a:extLst>
+              <a:ext uri="{C183D7F6-B498-43B3-948B-1728B52AA6E4}">
+                <adec:decorative xmlns:adec="http://schemas.microsoft.com/office/drawing/2017/decorative" val="1"/>
+              </a:ext>
+            </a:extLst>
+          </p:cNvPr>
           <p:cNvSpPr/>
           <p:nvPr/>
         </p:nvSpPr>
@@ -14589,7 +15326,13 @@
       </p:sp>
       <p:sp>
         <p:nvSpPr>
-          <p:cNvPr id="16" name="Icon FaUserXmark"/>
+          <p:cNvPr id="16" name="Icon FaUserXmark" descr="">
+            <a:extLst>
+              <a:ext uri="{C183D7F6-B498-43B3-948B-1728B52AA6E4}">
+                <adec:decorative xmlns:adec="http://schemas.microsoft.com/office/drawing/2017/decorative" val="1"/>
+              </a:ext>
+            </a:extLst>
+          </p:cNvPr>
           <p:cNvSpPr/>
           <p:nvPr/>
         </p:nvSpPr>
@@ -14614,7 +15357,13 @@
       </p:sp>
       <p:pic>
         <p:nvPicPr>
-          <p:cNvPr id="17" name="Image 2" descr="C:\Users\whale\git\mwb-b08\presentations\_build\icons\FaUserXmark.png">    </p:cNvPr>
+          <p:cNvPr id="17" name="Image 2" descr="">
+            <a:extLst>
+              <a:ext uri="{C183D7F6-B498-43B3-948B-1728B52AA6E4}">
+                <adec:decorative xmlns:adec="http://schemas.microsoft.com/office/drawing/2017/decorative" val="1"/>
+              </a:ext>
+            </a:extLst>
+          </p:cNvPr>
           <p:cNvPicPr>
             <a:picLocks noChangeAspect="1"/>
           </p:cNvPicPr>
@@ -14771,7 +15520,13 @@
       </p:sp>
       <p:sp>
         <p:nvSpPr>
-          <p:cNvPr id="20" name="Silent"/>
+          <p:cNvPr id="20" name="Silent" descr="">
+            <a:extLst>
+              <a:ext uri="{C183D7F6-B498-43B3-948B-1728B52AA6E4}">
+                <adec:decorative xmlns:adec="http://schemas.microsoft.com/office/drawing/2017/decorative" val="1"/>
+              </a:ext>
+            </a:extLst>
+          </p:cNvPr>
           <p:cNvSpPr/>
           <p:nvPr/>
         </p:nvSpPr>
@@ -14805,7 +15560,13 @@
       </p:sp>
       <p:sp>
         <p:nvSpPr>
-          <p:cNvPr id="21" name="Icon FaTriangleExclamation"/>
+          <p:cNvPr id="21" name="Icon FaTriangleExclamation" descr="">
+            <a:extLst>
+              <a:ext uri="{C183D7F6-B498-43B3-948B-1728B52AA6E4}">
+                <adec:decorative xmlns:adec="http://schemas.microsoft.com/office/drawing/2017/decorative" val="1"/>
+              </a:ext>
+            </a:extLst>
+          </p:cNvPr>
           <p:cNvSpPr/>
           <p:nvPr/>
         </p:nvSpPr>
@@ -14830,7 +15591,13 @@
       </p:sp>
       <p:pic>
         <p:nvPicPr>
-          <p:cNvPr id="22" name="Image 3" descr="C:\Users\whale\git\mwb-b08\presentations\_build\icons\FaTriangleExclamation.png">    </p:cNvPr>
+          <p:cNvPr id="22" name="Image 3" descr="">
+            <a:extLst>
+              <a:ext uri="{C183D7F6-B498-43B3-948B-1728B52AA6E4}">
+                <adec:decorative xmlns:adec="http://schemas.microsoft.com/office/drawing/2017/decorative" val="1"/>
+              </a:ext>
+            </a:extLst>
+          </p:cNvPr>
           <p:cNvPicPr>
             <a:picLocks noChangeAspect="1"/>
           </p:cNvPicPr>
@@ -15048,7 +15815,13 @@
       </p:sp>
       <p:sp>
         <p:nvSpPr>
-          <p:cNvPr id="3" name="Tag What"/>
+          <p:cNvPr id="3" name="Tag What" descr="">
+            <a:extLst>
+              <a:ext uri="{C183D7F6-B498-43B3-948B-1728B52AA6E4}">
+                <adec:decorative xmlns:adec="http://schemas.microsoft.com/office/drawing/2017/decorative" val="1"/>
+              </a:ext>
+            </a:extLst>
+          </p:cNvPr>
           <p:cNvSpPr/>
           <p:nvPr/>
         </p:nvSpPr>
@@ -15147,7 +15920,13 @@
       </p:sp>
       <p:sp>
         <p:nvSpPr>
-          <p:cNvPr id="6" name="Step 0"/>
+          <p:cNvPr id="6" name="Step 0" descr="">
+            <a:extLst>
+              <a:ext uri="{C183D7F6-B498-43B3-948B-1728B52AA6E4}">
+                <adec:decorative xmlns:adec="http://schemas.microsoft.com/office/drawing/2017/decorative" val="1"/>
+              </a:ext>
+            </a:extLst>
+          </p:cNvPr>
           <p:cNvSpPr/>
           <p:nvPr/>
         </p:nvSpPr>
@@ -15228,7 +16007,13 @@
       </p:sp>
       <p:sp>
         <p:nvSpPr>
-          <p:cNvPr id="8" name="Step 1"/>
+          <p:cNvPr id="8" name="Step 1" descr="">
+            <a:extLst>
+              <a:ext uri="{C183D7F6-B498-43B3-948B-1728B52AA6E4}">
+                <adec:decorative xmlns:adec="http://schemas.microsoft.com/office/drawing/2017/decorative" val="1"/>
+              </a:ext>
+            </a:extLst>
+          </p:cNvPr>
           <p:cNvSpPr/>
           <p:nvPr/>
         </p:nvSpPr>
@@ -15309,7 +16094,13 @@
       </p:sp>
       <p:sp>
         <p:nvSpPr>
-          <p:cNvPr id="10" name="Step 2"/>
+          <p:cNvPr id="10" name="Step 2" descr="">
+            <a:extLst>
+              <a:ext uri="{C183D7F6-B498-43B3-948B-1728B52AA6E4}">
+                <adec:decorative xmlns:adec="http://schemas.microsoft.com/office/drawing/2017/decorative" val="1"/>
+              </a:ext>
+            </a:extLst>
+          </p:cNvPr>
           <p:cNvSpPr/>
           <p:nvPr/>
         </p:nvSpPr>
@@ -15390,7 +16181,13 @@
       </p:sp>
       <p:sp>
         <p:nvSpPr>
-          <p:cNvPr id="12" name="Step 3"/>
+          <p:cNvPr id="12" name="Step 3" descr="">
+            <a:extLst>
+              <a:ext uri="{C183D7F6-B498-43B3-948B-1728B52AA6E4}">
+                <adec:decorative xmlns:adec="http://schemas.microsoft.com/office/drawing/2017/decorative" val="1"/>
+              </a:ext>
+            </a:extLst>
+          </p:cNvPr>
           <p:cNvSpPr/>
           <p:nvPr/>
         </p:nvSpPr>
@@ -15471,7 +16268,13 @@
       </p:sp>
       <p:sp>
         <p:nvSpPr>
-          <p:cNvPr id="14" name="DNSSEC box"/>
+          <p:cNvPr id="14" name="DNSSEC box" descr="">
+            <a:extLst>
+              <a:ext uri="{C183D7F6-B498-43B3-948B-1728B52AA6E4}">
+                <adec:decorative xmlns:adec="http://schemas.microsoft.com/office/drawing/2017/decorative" val="1"/>
+              </a:ext>
+            </a:extLst>
+          </p:cNvPr>
           <p:cNvSpPr/>
           <p:nvPr/>
         </p:nvSpPr>
@@ -15505,7 +16308,13 @@
       </p:sp>
       <p:sp>
         <p:nvSpPr>
-          <p:cNvPr id="15" name="Icon FaFileShield"/>
+          <p:cNvPr id="15" name="Icon FaFileShield" descr="">
+            <a:extLst>
+              <a:ext uri="{C183D7F6-B498-43B3-948B-1728B52AA6E4}">
+                <adec:decorative xmlns:adec="http://schemas.microsoft.com/office/drawing/2017/decorative" val="1"/>
+              </a:ext>
+            </a:extLst>
+          </p:cNvPr>
           <p:cNvSpPr/>
           <p:nvPr/>
         </p:nvSpPr>
@@ -15530,7 +16339,13 @@
       </p:sp>
       <p:pic>
         <p:nvPicPr>
-          <p:cNvPr id="16" name="Image 0" descr="C:\Users\whale\git\mwb-b08\presentations\_build\icons\FaFileShield.png">    </p:cNvPr>
+          <p:cNvPr id="16" name="Image 0" descr="">
+            <a:extLst>
+              <a:ext uri="{C183D7F6-B498-43B3-948B-1728B52AA6E4}">
+                <adec:decorative xmlns:adec="http://schemas.microsoft.com/office/drawing/2017/decorative" val="1"/>
+              </a:ext>
+            </a:extLst>
+          </p:cNvPr>
           <p:cNvPicPr>
             <a:picLocks noChangeAspect="1"/>
           </p:cNvPicPr>
@@ -15701,7 +16516,13 @@
       </p:sp>
       <p:sp>
         <p:nvSpPr>
-          <p:cNvPr id="19" name="Cert split-brain"/>
+          <p:cNvPr id="19" name="Cert split-brain" descr="">
+            <a:extLst>
+              <a:ext uri="{C183D7F6-B498-43B3-948B-1728B52AA6E4}">
+                <adec:decorative xmlns:adec="http://schemas.microsoft.com/office/drawing/2017/decorative" val="1"/>
+              </a:ext>
+            </a:extLst>
+          </p:cNvPr>
           <p:cNvSpPr/>
           <p:nvPr/>
         </p:nvSpPr>
@@ -15735,7 +16556,13 @@
       </p:sp>
       <p:sp>
         <p:nvSpPr>
-          <p:cNvPr id="20" name="Icon FaKey"/>
+          <p:cNvPr id="20" name="Icon FaKey" descr="">
+            <a:extLst>
+              <a:ext uri="{C183D7F6-B498-43B3-948B-1728B52AA6E4}">
+                <adec:decorative xmlns:adec="http://schemas.microsoft.com/office/drawing/2017/decorative" val="1"/>
+              </a:ext>
+            </a:extLst>
+          </p:cNvPr>
           <p:cNvSpPr/>
           <p:nvPr/>
         </p:nvSpPr>
@@ -15760,7 +16587,13 @@
       </p:sp>
       <p:pic>
         <p:nvPicPr>
-          <p:cNvPr id="21" name="Image 1" descr="C:\Users\whale\git\mwb-b08\presentations\_build\icons\FaKey.png">    </p:cNvPr>
+          <p:cNvPr id="21" name="Image 1" descr="">
+            <a:extLst>
+              <a:ext uri="{C183D7F6-B498-43B3-948B-1728B52AA6E4}">
+                <adec:decorative xmlns:adec="http://schemas.microsoft.com/office/drawing/2017/decorative" val="1"/>
+              </a:ext>
+            </a:extLst>
+          </p:cNvPr>
           <p:cNvPicPr>
             <a:picLocks noChangeAspect="1"/>
           </p:cNvPicPr>
@@ -15978,7 +16811,13 @@
       </p:sp>
       <p:sp>
         <p:nvSpPr>
-          <p:cNvPr id="3" name="Tag What"/>
+          <p:cNvPr id="3" name="Tag What" descr="">
+            <a:extLst>
+              <a:ext uri="{C183D7F6-B498-43B3-948B-1728B52AA6E4}">
+                <adec:decorative xmlns:adec="http://schemas.microsoft.com/office/drawing/2017/decorative" val="1"/>
+              </a:ext>
+            </a:extLst>
+          </p:cNvPr>
           <p:cNvSpPr/>
           <p:nvPr/>
         </p:nvSpPr>
@@ -16060,7 +16899,7 @@
         <a:graphic>
           <a:graphicData uri="http://schemas.openxmlformats.org/drawingml/2006/table">
             <a:tbl>
-              <a:tblPr/>
+              <a:tblPr firstRow="1" bandRow="1"/>
               <a:tblGrid>
                 <a:gridCol w="1783080"/>
                 <a:gridCol w="2423160"/>
@@ -17308,7 +18147,13 @@
       </p:graphicFrame>
       <p:sp>
         <p:nvSpPr>
-          <p:cNvPr id="6" name="Resolver box"/>
+          <p:cNvPr id="6" name="Resolver box" descr="">
+            <a:extLst>
+              <a:ext uri="{C183D7F6-B498-43B3-948B-1728B52AA6E4}">
+                <adec:decorative xmlns:adec="http://schemas.microsoft.com/office/drawing/2017/decorative" val="1"/>
+              </a:ext>
+            </a:extLst>
+          </p:cNvPr>
           <p:cNvSpPr/>
           <p:nvPr/>
         </p:nvSpPr>
@@ -17342,7 +18187,13 @@
       </p:sp>
       <p:sp>
         <p:nvSpPr>
-          <p:cNvPr id="7" name="Icon FaServer"/>
+          <p:cNvPr id="7" name="Icon FaServer" descr="">
+            <a:extLst>
+              <a:ext uri="{C183D7F6-B498-43B3-948B-1728B52AA6E4}">
+                <adec:decorative xmlns:adec="http://schemas.microsoft.com/office/drawing/2017/decorative" val="1"/>
+              </a:ext>
+            </a:extLst>
+          </p:cNvPr>
           <p:cNvSpPr/>
           <p:nvPr/>
         </p:nvSpPr>
@@ -17367,7 +18218,13 @@
       </p:sp>
       <p:pic>
         <p:nvPicPr>
-          <p:cNvPr id="8" name="Image 0" descr="C:\Users\whale\git\mwb-b08\presentations\_build\icons\FaServer.png">    </p:cNvPr>
+          <p:cNvPr id="8" name="Image 0" descr="">
+            <a:extLst>
+              <a:ext uri="{C183D7F6-B498-43B3-948B-1728B52AA6E4}">
+                <adec:decorative xmlns:adec="http://schemas.microsoft.com/office/drawing/2017/decorative" val="1"/>
+              </a:ext>
+            </a:extLst>
+          </p:cNvPr>
           <p:cNvPicPr>
             <a:picLocks noChangeAspect="1"/>
           </p:cNvPicPr>
@@ -17524,7 +18381,13 @@
       </p:sp>
       <p:sp>
         <p:nvSpPr>
-          <p:cNvPr id="11" name="IPAM"/>
+          <p:cNvPr id="11" name="IPAM" descr="">
+            <a:extLst>
+              <a:ext uri="{C183D7F6-B498-43B3-948B-1728B52AA6E4}">
+                <adec:decorative xmlns:adec="http://schemas.microsoft.com/office/drawing/2017/decorative" val="1"/>
+              </a:ext>
+            </a:extLst>
+          </p:cNvPr>
           <p:cNvSpPr/>
           <p:nvPr/>
         </p:nvSpPr>
@@ -17558,7 +18421,13 @@
       </p:sp>
       <p:sp>
         <p:nvSpPr>
-          <p:cNvPr id="12" name="Icon FaAddressBook"/>
+          <p:cNvPr id="12" name="Icon FaAddressBook" descr="">
+            <a:extLst>
+              <a:ext uri="{C183D7F6-B498-43B3-948B-1728B52AA6E4}">
+                <adec:decorative xmlns:adec="http://schemas.microsoft.com/office/drawing/2017/decorative" val="1"/>
+              </a:ext>
+            </a:extLst>
+          </p:cNvPr>
           <p:cNvSpPr/>
           <p:nvPr/>
         </p:nvSpPr>
@@ -17583,7 +18452,13 @@
       </p:sp>
       <p:pic>
         <p:nvPicPr>
-          <p:cNvPr id="13" name="Image 1" descr="C:\Users\whale\git\mwb-b08\presentations\_build\icons\FaAddressBook.png">    </p:cNvPr>
+          <p:cNvPr id="13" name="Image 1" descr="">
+            <a:extLst>
+              <a:ext uri="{C183D7F6-B498-43B3-948B-1728B52AA6E4}">
+                <adec:decorative xmlns:adec="http://schemas.microsoft.com/office/drawing/2017/decorative" val="1"/>
+              </a:ext>
+            </a:extLst>
+          </p:cNvPr>
           <p:cNvPicPr>
             <a:picLocks noChangeAspect="1"/>
           </p:cNvPicPr>
@@ -17801,7 +18676,13 @@
       </p:sp>
       <p:sp>
         <p:nvSpPr>
-          <p:cNvPr id="3" name="Tag What"/>
+          <p:cNvPr id="3" name="Tag What" descr="">
+            <a:extLst>
+              <a:ext uri="{C183D7F6-B498-43B3-948B-1728B52AA6E4}">
+                <adec:decorative xmlns:adec="http://schemas.microsoft.com/office/drawing/2017/decorative" val="1"/>
+              </a:ext>
+            </a:extLst>
+          </p:cNvPr>
           <p:cNvSpPr/>
           <p:nvPr/>
         </p:nvSpPr>
@@ -17864,7 +18745,13 @@
       </p:sp>
       <p:sp>
         <p:nvSpPr>
-          <p:cNvPr id="5" name="Flow 0"/>
+          <p:cNvPr id="5" name="Flow 0" descr="">
+            <a:extLst>
+              <a:ext uri="{C183D7F6-B498-43B3-948B-1728B52AA6E4}">
+                <adec:decorative xmlns:adec="http://schemas.microsoft.com/office/drawing/2017/decorative" val="1"/>
+              </a:ext>
+            </a:extLst>
+          </p:cNvPr>
           <p:cNvSpPr/>
           <p:nvPr/>
         </p:nvSpPr>
@@ -17970,7 +18857,13 @@
       </p:sp>
       <p:sp>
         <p:nvSpPr>
-          <p:cNvPr id="8" name="Flow 1"/>
+          <p:cNvPr id="8" name="Flow 1" descr="">
+            <a:extLst>
+              <a:ext uri="{C183D7F6-B498-43B3-948B-1728B52AA6E4}">
+                <adec:decorative xmlns:adec="http://schemas.microsoft.com/office/drawing/2017/decorative" val="1"/>
+              </a:ext>
+            </a:extLst>
+          </p:cNvPr>
           <p:cNvSpPr/>
           <p:nvPr/>
         </p:nvSpPr>
@@ -18076,7 +18969,13 @@
       </p:sp>
       <p:sp>
         <p:nvSpPr>
-          <p:cNvPr id="11" name="Flow 2"/>
+          <p:cNvPr id="11" name="Flow 2" descr="">
+            <a:extLst>
+              <a:ext uri="{C183D7F6-B498-43B3-948B-1728B52AA6E4}">
+                <adec:decorative xmlns:adec="http://schemas.microsoft.com/office/drawing/2017/decorative" val="1"/>
+              </a:ext>
+            </a:extLst>
+          </p:cNvPr>
           <p:cNvSpPr/>
           <p:nvPr/>
         </p:nvSpPr>
@@ -18182,7 +19081,13 @@
       </p:sp>
       <p:sp>
         <p:nvSpPr>
-          <p:cNvPr id="14" name="Flow 3"/>
+          <p:cNvPr id="14" name="Flow 3" descr="">
+            <a:extLst>
+              <a:ext uri="{C183D7F6-B498-43B3-948B-1728B52AA6E4}">
+                <adec:decorative xmlns:adec="http://schemas.microsoft.com/office/drawing/2017/decorative" val="1"/>
+              </a:ext>
+            </a:extLst>
+          </p:cNvPr>
           <p:cNvSpPr/>
           <p:nvPr/>
         </p:nvSpPr>
@@ -18288,7 +19193,13 @@
       </p:sp>
       <p:sp>
         <p:nvSpPr>
-          <p:cNvPr id="17" name="Flow 4"/>
+          <p:cNvPr id="17" name="Flow 4" descr="">
+            <a:extLst>
+              <a:ext uri="{C183D7F6-B498-43B3-948B-1728B52AA6E4}">
+                <adec:decorative xmlns:adec="http://schemas.microsoft.com/office/drawing/2017/decorative" val="1"/>
+              </a:ext>
+            </a:extLst>
+          </p:cNvPr>
           <p:cNvSpPr/>
           <p:nvPr/>
         </p:nvSpPr>
@@ -18358,7 +19269,13 @@
       </p:sp>
       <p:sp>
         <p:nvSpPr>
-          <p:cNvPr id="19" name="Decision 1"/>
+          <p:cNvPr id="19" name="Decision 1" descr="">
+            <a:extLst>
+              <a:ext uri="{C183D7F6-B498-43B3-948B-1728B52AA6E4}">
+                <adec:decorative xmlns:adec="http://schemas.microsoft.com/office/drawing/2017/decorative" val="1"/>
+              </a:ext>
+            </a:extLst>
+          </p:cNvPr>
           <p:cNvSpPr/>
           <p:nvPr/>
         </p:nvSpPr>
@@ -18468,7 +19385,13 @@
       </p:sp>
       <p:sp>
         <p:nvSpPr>
-          <p:cNvPr id="21" name="Decision 2"/>
+          <p:cNvPr id="21" name="Decision 2" descr="">
+            <a:extLst>
+              <a:ext uri="{C183D7F6-B498-43B3-948B-1728B52AA6E4}">
+                <adec:decorative xmlns:adec="http://schemas.microsoft.com/office/drawing/2017/decorative" val="1"/>
+              </a:ext>
+            </a:extLst>
+          </p:cNvPr>
           <p:cNvSpPr/>
           <p:nvPr/>
         </p:nvSpPr>
@@ -18578,7 +19501,13 @@
       </p:sp>
       <p:sp>
         <p:nvSpPr>
-          <p:cNvPr id="23" name="Decision 3"/>
+          <p:cNvPr id="23" name="Decision 3" descr="">
+            <a:extLst>
+              <a:ext uri="{C183D7F6-B498-43B3-948B-1728B52AA6E4}">
+                <adec:decorative xmlns:adec="http://schemas.microsoft.com/office/drawing/2017/decorative" val="1"/>
+              </a:ext>
+            </a:extLst>
+          </p:cNvPr>
           <p:cNvSpPr/>
           <p:nvPr/>
         </p:nvSpPr>
@@ -18688,7 +19617,13 @@
       </p:sp>
       <p:sp>
         <p:nvSpPr>
-          <p:cNvPr id="25" name="Decision 4"/>
+          <p:cNvPr id="25" name="Decision 4" descr="">
+            <a:extLst>
+              <a:ext uri="{C183D7F6-B498-43B3-948B-1728B52AA6E4}">
+                <adec:decorative xmlns:adec="http://schemas.microsoft.com/office/drawing/2017/decorative" val="1"/>
+              </a:ext>
+            </a:extLst>
+          </p:cNvPr>
           <p:cNvSpPr/>
           <p:nvPr/>
         </p:nvSpPr>
@@ -18798,7 +19733,13 @@
       </p:sp>
       <p:sp>
         <p:nvSpPr>
-          <p:cNvPr id="27" name="Decision 5"/>
+          <p:cNvPr id="27" name="Decision 5" descr="">
+            <a:extLst>
+              <a:ext uri="{C183D7F6-B498-43B3-948B-1728B52AA6E4}">
+                <adec:decorative xmlns:adec="http://schemas.microsoft.com/office/drawing/2017/decorative" val="1"/>
+              </a:ext>
+            </a:extLst>
+          </p:cNvPr>
           <p:cNvSpPr/>
           <p:nvPr/>
         </p:nvSpPr>
@@ -18908,7 +19849,13 @@
       </p:sp>
       <p:sp>
         <p:nvSpPr>
-          <p:cNvPr id="29" name="Check"/>
+          <p:cNvPr id="29" name="Check" descr="">
+            <a:extLst>
+              <a:ext uri="{C183D7F6-B498-43B3-948B-1728B52AA6E4}">
+                <adec:decorative xmlns:adec="http://schemas.microsoft.com/office/drawing/2017/decorative" val="1"/>
+              </a:ext>
+            </a:extLst>
+          </p:cNvPr>
           <p:cNvSpPr/>
           <p:nvPr/>
         </p:nvSpPr>
@@ -18942,7 +19889,13 @@
       </p:sp>
       <p:sp>
         <p:nvSpPr>
-          <p:cNvPr id="30" name="Icon FaClipboardCheck"/>
+          <p:cNvPr id="30" name="Icon FaClipboardCheck" descr="">
+            <a:extLst>
+              <a:ext uri="{C183D7F6-B498-43B3-948B-1728B52AA6E4}">
+                <adec:decorative xmlns:adec="http://schemas.microsoft.com/office/drawing/2017/decorative" val="1"/>
+              </a:ext>
+            </a:extLst>
+          </p:cNvPr>
           <p:cNvSpPr/>
           <p:nvPr/>
         </p:nvSpPr>
@@ -18967,7 +19920,13 @@
       </p:sp>
       <p:pic>
         <p:nvPicPr>
-          <p:cNvPr id="31" name="Image 0" descr="C:\Users\whale\git\mwb-b08\presentations\_build\icons\FaClipboardCheck.png">    </p:cNvPr>
+          <p:cNvPr id="31" name="Image 0" descr="">
+            <a:extLst>
+              <a:ext uri="{C183D7F6-B498-43B3-948B-1728B52AA6E4}">
+                <adec:decorative xmlns:adec="http://schemas.microsoft.com/office/drawing/2017/decorative" val="1"/>
+              </a:ext>
+            </a:extLst>
+          </p:cNvPr>
           <p:cNvPicPr>
             <a:picLocks noChangeAspect="1"/>
           </p:cNvPicPr>
@@ -19126,9 +20085,9 @@
 </file>
 
 <file path=ppt/theme/theme1.xml><?xml version="1.0" encoding="utf-8"?>
-<a:theme xmlns:a="http://schemas.openxmlformats.org/drawingml/2006/main" name="Modernization Workbook">
+<a:theme xmlns:a="http://schemas.openxmlformats.org/drawingml/2006/main" name="Federal Modernization Workbook">
   <a:themeElements>
-    <a:clrScheme name="Modernization Workbook">
+    <a:clrScheme name="Federal Modernization Workbook">
       <a:dk1>
         <a:srgbClr val="1F2A44"/>
       </a:dk1>
@@ -19166,7 +20125,7 @@
         <a:srgbClr val="334155"/>
       </a:folHlink>
     </a:clrScheme>
-    <a:fontScheme name="Modernization Workbook">
+    <a:fontScheme name="Federal Modernization Workbook">
       <a:majorFont>
         <a:latin typeface="Cambria"/>
         <a:ea typeface=""/>

--- a/presentations/b08-ddi/B08_DDI.pptx
+++ b/presentations/b08-ddi/B08_DDI.pptx
@@ -122,7 +122,7 @@
   <p:extLst>
     <p:ext uri="{521415D9-36F7-43E2-AB2F-B90AF26B5E84}">
       <p14:sectionLst xmlns:p14="http://schemas.microsoft.com/office/powerpoint/2010/main">
-        <p14:section name="Why DNS" id="{dc514537-ab03-2c63-2e2f-f65f8700fe08}">
+        <p14:section name="Why DNS" id="{62a3adae-79a4-58c1-6296-103739fbe93b}">
           <p14:sldIdLst>
             <p14:sldId id="256"/>
             <p14:sldId id="257"/>
@@ -130,7 +130,7 @@
             <p14:sldId id="259"/>
           </p14:sldIdLst>
         </p14:section>
-        <p14:section name="What changes" id="{07d377ac-5dbb-5e63-fd84-a83efb6f905d}">
+        <p14:section name="What changes" id="{7dc38332-3a38-f2f8-3acc-e7237e0456e1}">
           <p14:sldIdLst>
             <p14:sldId id="260"/>
             <p14:sldId id="261"/>
@@ -139,12 +139,12 @@
             <p14:sldId id="264"/>
           </p14:sldIdLst>
         </p14:section>
-        <p14:section name="Who owns it" id="{f698a0a1-d73a-5471-81ce-1cadc99bd487}">
+        <p14:section name="Who owns it" id="{8e1c0807-e971-bf99-7c17-11191fb26f83}">
           <p14:sldIdLst>
             <p14:sldId id="265"/>
           </p14:sldIdLst>
         </p14:section>
-        <p14:section name="How to do it" id="{1549212d-805c-2864-c13c-bc3764f038d3}">
+        <p14:section name="How to do it" id="{830377c8-9ae9-05cd-1275-6c5c62ea3570}">
           <p14:sldIdLst>
             <p14:sldId id="266"/>
             <p14:sldId id="267"/>
@@ -152,7 +152,7 @@
             <p14:sldId id="269"/>
           </p14:sldIdLst>
         </p14:section>
-        <p14:section name="Backup" id="{ddfe8ffc-ba2c-b1cd-495d-2a7e6dfe4fd9}">
+        <p14:section name="Backup" id="{513dc6ad-4991-8e23-dcc0-e81f52f841a6}">
           <p14:sldIdLst>
             <p14:sldId id="270"/>
             <p14:sldId id="271"/>
@@ -653,7 +653,7 @@
           <a:p>
             <a:r>
               <a:rPr lang="en-US" dirty="0"/>
-              <a:t>[9:28–10:38]  Who owns it? In an AD estate, DNS belonged to whoever ran the domain controllers; DnsAdmins has full control of every zone by default. A single policy plane concentrates that authority, so its owners have to be named on purpose, one decider per decision.
+              <a:t>[9:35–10:46]  Who owns it? In an AD estate, DNS belonged to whoever ran the domain controllers; DnsAdmins has full control of every zone by default. A single policy plane concentrates that authority, so its owners have to be named on purpose, one decider per decision.
 The sponsor and CIO decide the platform model and when AD DNS and Windows DHCP retire. The CISO and ISSO set the requirements: designated resolvers, allowed transports, DNSSEC and logging. The authorizing official accepts residual risk, including every standing exception.
 The DNS/DDI team runs the policy plane and decides what the edge points at; network engineering configures it. AD administrators own the inventory until AD DNS retires, and cloud teams run their DNS as consumers of the plane.
 Record changes come in three classes. Standard changes inside a delegated namespace are pre-approved. Policy-driven records, like private endpoint entries, need no per-change approval, but the policy itself is change-controlled. High-impact changes, zones, delegations, forwarding, SRV, wildcards and response policy, go to the change board.
@@ -745,7 +745,7 @@
           <a:p>
             <a:r>
               <a:rPr lang="en-US" dirty="0"/>
-              <a:t>[10:38–11:49]  How do you get there? In six phases: inventory, coexist, migrate authority, federate the clouds, decommission AD DNS and DHCP, then harden and evidence. Each phase ends with a rollback point and a resolution test from every origin, not a calendar date.
+              <a:t>[10:46–11:57]  How do you get there? In six phases: inventory, coexist, migrate authority, federate the clouds, decommission AD DNS and DHCP, then harden and evidence. Each phase ends with a rollback point and a resolution test from every origin, not a calendar date.
 Every move of authority, whether a zone, a forwarder, a DHCP scope or a wave of clients, runs the same loop. Lower the TTL to 300 seconds at least 48 hours ahead. Import with a dry run, never moving the SOA, apex NS or AD locator records. Validate from every origin. Switch, then hold and observe, while the old authority keeps answering.
 In Azure Private DNS, removing a virtual network link deletes the records autoregistered through it, and Microsoft says they can't be restored. So unlinking is safe only for zones without autoregistration.
 Decommissioning is gated, never scheduled: the inventory reconciles, every critical SRV record resolves for 30 consecutive days, 90 days of parallel operation pass cleanly, failover is tested, and the old servers are idle.
@@ -837,9 +837,9 @@
           <a:p>
             <a:r>
               <a:rPr lang="en-US" dirty="0"/>
-              <a:t>[11:49–12:54]  Once it's running, one policy plane is only an improvement if divisions can still run their own networks through it. So each division gets a scope covering its own zones, IP spaces and DHCP scopes, with manager, operator and auditor roles, and automation accounts are held to the same scopes. Infrastructure as code, ITSM workflows and ACME DNS-01 certificate automation all go through one API and one audit trail.
+              <a:t>[11:57–13:13]  Once it's running, one policy plane is only an improvement if divisions can still run their own networks through it. So each division gets a scope covering its own zones, IP spaces and DHCP scopes, with manager, operator and auditor roles, and automation accounts are held to the same scopes. Infrastructure as code, ITSM workflows and ACME DNS-01 certificate automation all go through one API and one audit trail.
 Locator records are resolved every 15 minutes from every site and virtual network until the last domain controller retires. Drift reports compare the source of truth with every copy, and hygiene jobs catch stale records and dangling CNAMEs.
-The evidence floor is M-21-31: DNS queries, responses and errors, encrypted ones included, zone transfers, and DHCP lease history with MAC and IP addresses, kept twelve months in active storage and eighteen months cold. The lease history is what turns an address into a device.
+The evidence floor is M-26-14. It doesn't name DNS, but it requires logs that show source and destination addresses, ports and sessions, searchable for six months and retrievable for a year, and readily available to the agency's top-level security operations center. Query logs, encrypted queries included, and DHCP lease history with MAC and IP addresses are how the name layer meets it. The lease history is what turns an address into a device.
 Workbook: Book 08, Chapter 11 — Operating the Control Plane: Delegation, Automation and Evidence.</a:t>
             </a:r>
             <a:endParaRPr lang="en-US" dirty="0"/>
@@ -928,7 +928,7 @@
           <a:p>
             <a:r>
               <a:rPr lang="en-US" dirty="0"/>
-              <a:t>[12:54–14:03]  Choose the platform on the evidence it produces for your own boundary.
+              <a:t>[13:13–14:22]  Choose the platform on the evidence it produces for your own boundary.
 Commercial DDI licensing is quoted per agency, so get every quote on the same assumptions. The cloud-native pieces have public meters, and appear in every model. Azure DNS Private Resolver charges per endpoint: 180 dollars a month for each inbound endpoint and each outbound endpoint, plus 2 dollars 50 per ruleset. A hub with one of each is about 362 dollars 50 a month per region, and a second region doubles it.
 Authorization belongs to an offering, not a vendor. As one example, Infoblox Government Cloud has been FedRAMP Certified at Moderate since December 15, 2022. BlueCat and EfficientIP have no Marketplace listing, so they run inside the agency's boundary. And a Moderate authorization doesn't cover GCC High or DoD.
 Some risk remains. Sync lag becomes the new source of divergence. A management-plane outage blocks changes, though resolution continues from local state. And encrypted DNS bypass stays possible wherever endpoint controls are incomplete.
@@ -1020,7 +1020,7 @@
           <a:p>
             <a:r>
               <a:rPr lang="en-US" dirty="0"/>
-              <a:t>[14:03–15:08]  So, four decisions.
+              <a:t>[14:22–15:27]  So, four decisions.
 Authorize a single authoritative DDI policy plane, and assign an owner, typically the enterprise architecture or network operations lead.
 Have that owner settle the five configuration decisions within 90 days, and report the residual risk to the authorizing official.
 Choose the platform model on evidence: authorization at the right impact level, and quotes on the same assumptions.
@@ -1473,8 +1473,8 @@
           <a:p>
             <a:r>
               <a:rPr lang="en-US" dirty="0"/>
-              <a:t>[2:51–3:56]  The federal mandates never name a product, but together they describe a governed name layer. It's worth being precise about who requires what.
-OMB M-22-09 requires encrypted DNS wherever it's technically supported, with endpoints explicitly configured to use agency-designated resolvers. It also notes that DNS must already be routed through CISA-operated infrastructure. The requirement that all egress resolution go through Protective DNS comes from CISA's own guidance, which cites the statute. OMB M-21-31 makes DNS logging a basic, EL1 requirement, encrypted queries included, with the source host identifiable. M-08-23 and SP 800-53 carry DNSSEC. And version 3.3 of the TIC 3.0 catalog, published in September 2026, lists five DNS capabilities, from sinkholing to Protective DNS.
+              <a:t>[2:51–4:03]  The federal mandates never name a product, but together they describe a governed name layer. It's worth being precise about who requires what.
+OMB M-22-09 requires encrypted DNS wherever it's technically supported, with endpoints explicitly configured to use agency-designated resolvers. It also notes that DNS must already be routed through CISA-operated infrastructure. The requirement that all egress resolution go through Protective DNS comes from CISA's own guidance, which cites the statute. OMB M-26-14, which rescinded M-21-31 in May 2026, doesn't name DNS, but it requires logs that show source and destination addresses, protocols, ports and sessions, searchable for six months and retrievable for a year. M-08-23 and SP 800-53 carry DNSSEC. And version 3.3 of the TIC 3.0 catalog, published in September 2026, lists five DNS capabilities, from sinkholing to Protective DNS.
 NIST SP 800-81 Revision 3, final on March 19, 2026, is the practical guide to all of this: guidance, not a mandate. And FedRAMP certifies a cloud service, not an architecture; the agency still authorizes its own DDI system.
 Workbook: Book 08, Chapter 03 — Federal Requirements: NIST SP 800-81, FedRAMP and Zero Trust.</a:t>
             </a:r>
@@ -1564,7 +1564,7 @@
           <a:p>
             <a:r>
               <a:rPr lang="en-US" dirty="0"/>
-              <a:t>[3:56–5:01]  What has to change starts with Active Directory. For twenty years AD has been the hidden DNS service of the on-premises network: a domain's name becomes a zone, and every domain-joined machine points at the domain controllers for all of its resolution.
+              <a:t>[4:03–5:08]  What has to change starts with Active Directory. For twenty years AD has been the hidden DNS service of the on-premises network: a domain's name becomes a zone, and every domain-joined machine points at the domain controllers for all of its resolution.
 Netlogon on each domain controller registers the SRV locator records that clients use to find LDAP, Kerberos and the global catalog. Secure dynamic update keeps those records current. Forwarders, GlobalNames, reverse and signed zones each need a decision.
 Microsoft Entra ID inherits none of it. It hosts no zones and publishes no locator records, yet hybrid-joined devices still look for a domain controller, and Entra Domain Services adds a DNS authority of its own.
 So the locator records stay where domain controllers can register them securely, on AD DNS or a DDI platform that accepts GSS-TSIG updates, until the last domain controller goes. Everything else moves zone by zone, once it's inventoried.
@@ -1656,7 +1656,7 @@
           <a:p>
             <a:r>
               <a:rPr lang="en-US" dirty="0"/>
-              <a:t>[5:01–6:10]  Every control in the policy plane assumes the query reaches it. Three ordinary mechanisms decide whether it does, and none of them reports when it doesn't.
+              <a:t>[5:08–6:17]  Every control in the policy plane assumes the query reaches it. Three ordinary mechanisms decide whether it does, and none of them reports when it doesn't.
 First, the edge. Cisco Catalyst SD-WAN's redirect-dns action, as one example, sends branch DNS to a policy-designated resolver, IPv4 and UDP only. It must be a network-addressable agency resolver, not a loopback agent on the device, and any SASE resolver belongs behind it.
 Second, encrypted DNS. DNS over TLS and DNS over QUIC use port 853, so block them except to approved resolvers. DNS over HTTPS shares port 443 with all web traffic, so it's governed at the endpoint: Windows DoH policy, the Edge and Chrome DoH mode, and an NXDOMAIN answer for Firefox's canary domain.
 Third, rogue DHCP. One rogue server handing out its own resolver in option 6 moves a whole subnet at once, and rogue IPv6 router advertisements do the same. AD authorization doesn't stop them; DHCP snooping and RA Guard on the switches do.
@@ -1748,7 +1748,7 @@
           <a:p>
             <a:r>
               <a:rPr lang="en-US" dirty="0"/>
-              <a:t>[6:10–7:17]  A certificate can be valid, unrevoked and issued for the right name, and still fail, because every check that makes it trustworthy starts with a DNS lookup: the endpoint, the revocation endpoints, the FQDN that policy names, and the sign-in endpoint for the token's cloud.
+              <a:t>[6:17–7:25]  A certificate can be valid, unrevoked and issued for the right name, and still fail, because every check that makes it trustworthy starts with a DNS lookup: the endpoint, the revocation endpoints, the FQDN that policy names, and the sign-in endpoint for the token's cloud.
 If an agency CRL name exists only in AD DNS, a workload in AWS can't resolve it without a forwarding rule. The revocation check fails, the ticket is opened against PKI, and the root cause can take days to find.
 DNSSEC adds origin authentication and integrity, not encryption. The program's position follows NIST: sign external zones and the dot-gov delegations, always. Validate on every agency resolver, with the root trust anchor. And sign internal zones only where the system's authorization requires it; NIST calls internal signing of limited value for most organizations. Validation stays on agency resolvers because Azure DNS and Route 53 sign public zones only, and the default Azure resolver doesn't validate.
 Workbook: Book 08, Chapter 06 — DNS Identity, Certificates and DNSSEC.</a:t>
@@ -1839,7 +1839,7 @@
           <a:p>
             <a:r>
               <a:rPr lang="en-US" dirty="0"/>
-              <a:t>[7:17–8:28]  Azure private endpoints are the commonest source of private-IP split-brain.
+              <a:t>[7:25–8:35]  Azure private endpoints are the commonest source of private-IP split-brain.
 When a private endpoint is created, Azure writes its A record into a privatelink zone, and public DNS carries a CNAME into that name. The private answer comes back only when the query reaches a resolver linked to the zone. So every origin, on-premises, the other clouds and the branch path, forwards the service's public zone, such as database.windows.net, to the DNS Private Resolver's inbound endpoint. Not the privatelink zone. Azure Government uses different zone names, so commercial rules don't carry over.
 The Private Resolver is a recursive bridge, not an authority: reach it by forwarding, never by delegation. Give each endpoint a dedicated subnet and a static address, avoid ruleset loops, and deploy one per region.
 Addresses need the same discipline, with the enterprise IPAM as the authority for address blocks. AWS VPC IPAM can allocate from an external IPAM in commercial Regions, but not in GovCloud; on Azure and Google Cloud, mirror the reservations and reconcile.
@@ -1931,7 +1931,7 @@
           <a:p>
             <a:r>
               <a:rPr lang="en-US" dirty="0"/>
-              <a:t>[8:28–9:28]  A branch client's query passes the SD-WAN edge to an agency-controlled resolver, then the DDI policy plane, with its response policy zones, DNSSEC, IPAM and forwarding rules, then the per-cloud private zones. Internet-bound recursion leaves through CISA's Protective DNS.
+              <a:t>[8:35–9:35]  A branch client's query passes the SD-WAN edge to an agency-controlled resolver, then the DDI policy plane, with its response policy zones, DNSSEC, IPAM and forwarding rules, then the per-cloud private zones. Internet-bound recursion leaves through CISA's Protective DNS.
 Five decisions carry almost all of the operational risk. One: the redirect-dns target is a network-addressable agency resolver. Two: the agency resolver is the first hop, and any other resolver is its forwarder. Three: the policy plane holds every per-cloud conditional forwarding rule. Four: AD DNS is inventoried and reprovisioned before any domain controller goes. Five: OCSP and CRL endpoints resolve from every origin.
 Each fails silently: the query still resolves, just outside policy or to the wrong address. So each comes with a check, run in the live configuration rather than the design document, before the next SD-WAN or DDI change.
 Workbook: Book 08, Chapter 08 — Reference Architecture and the Five Critical Decisions.</a:t>
@@ -6975,7 +6975,7 @@
                 <a:ea typeface="Cambria" pitchFamily="34" charset="-122"/>
                 <a:cs typeface="Cambria" pitchFamily="34" charset="-120"/>
               </a:rPr>
-              <a:t>The M-21-31 logging floor</a:t>
+              <a:t>The M-26-14 logging floor</a:t>
             </a:r>
             <a:endParaRPr lang="en-US" sz="1800" dirty="0"/>
           </a:p>
@@ -7015,7 +7015,7 @@
                   <a:schemeClr val="tx2"/>
                 </a:solidFill>
               </a:rPr>
-              <a:t>DNS queries, responses and errors, encrypted ones included</a:t>
+              <a:t>Source and destination address, port and session in the logs</a:t>
             </a:r>
             <a:endParaRPr lang="en-US" sz="1400" dirty="0"/>
           </a:p>
@@ -7033,7 +7033,7 @@
                   <a:schemeClr val="tx2"/>
                 </a:solidFill>
               </a:rPr>
-              <a:t>Zone transfers, and DHCP leases with MAC and IP address</a:t>
+              <a:t>Searchable 6 months, retrievable for a year</a:t>
             </a:r>
             <a:endParaRPr lang="en-US" sz="1400" dirty="0"/>
           </a:p>
@@ -7051,7 +7051,7 @@
                   <a:schemeClr val="tx2"/>
                 </a:solidFill>
               </a:rPr>
-              <a:t>12 months in active storage, 18 months cold</a:t>
+              <a:t>Readily available to the top-level SOC</a:t>
             </a:r>
             <a:endParaRPr lang="en-US" sz="1400" dirty="0"/>
           </a:p>
@@ -7253,7 +7253,7 @@
                   <a:srgbClr val="64748B"/>
                 </a:solidFill>
               </a:rPr>
-              <a:t>Sources: OMB M-21-31; NIST SP 800-53 Rev. 5; Microsoft Learn — DNS logging and diagnostics, Azure DNS monitoring, DNS resolver policy. Book 08, Chapter 11.</a:t>
+              <a:t>Sources: OMB M-26-14; NIST SP 800-53 Rev. 5; Microsoft Learn — DNS logging and diagnostics, Azure DNS monitoring, DNS resolver policy. Book 08, Chapter 11.</a:t>
             </a:r>
             <a:endParaRPr lang="en-US" sz="1000" dirty="0"/>
           </a:p>
@@ -9903,7 +9903,7 @@
                   <a:schemeClr val="tx2"/>
                 </a:solidFill>
               </a:rPr>
-              <a:t>OMB M-22-09 (encrypted DNS); M-21-31 (EL1 passive DNS, retention); M-08-23 (DNSSEC); M-21-07 (IPv6).</a:t>
+              <a:t>OMB M-22-09 (encrypted DNS); M-26-14 (logging baseline and retention; rescinded M-21-31); M-08-23 (DNSSEC); M-21-07 (IPv6).</a:t>
             </a:r>
             <a:endParaRPr lang="en-US" sz="1400" dirty="0"/>
           </a:p>
@@ -12735,7 +12735,7 @@
                           <a:ea typeface="Calibri" pitchFamily="34" charset="-122"/>
                           <a:cs typeface="Calibri" pitchFamily="34" charset="-120"/>
                         </a:rPr>
-                        <a:t>OMB M-21-31 (August 2021)</a:t>
+                        <a:t>OMB M-26-14 (May 2026)</a:t>
                       </a:r>
                       <a:endParaRPr lang="en-US" sz="1250" dirty="0">
                         <a:latin typeface="Calibri" charset="0"/>
@@ -12803,7 +12803,7 @@
                           <a:ea typeface="Calibri" pitchFamily="34" charset="-122"/>
                           <a:cs typeface="Calibri" pitchFamily="34" charset="-120"/>
                         </a:rPr>
-                        <a:t>EL1: log DNS queries, encrypted ones included, with the source host identifiable</a:t>
+                        <a:t>Logs of source and destination address, port and session; searchable 6 months, retrievable 1 year</a:t>
                       </a:r>
                       <a:endParaRPr lang="en-US" sz="1250" dirty="0">
                         <a:latin typeface="Calibri" charset="0"/>
@@ -13547,7 +13547,7 @@
                   <a:srgbClr val="64748B"/>
                 </a:solidFill>
               </a:rPr>
-              <a:t>Sources: NIST SP 800-81 Rev. 3; OMB M-22-09, M-21-31, M-08-23; CISA Encrypted DNS Implementation Guidance; TIC 3.0 Catalog v3.3; FedRAMP. Book 08, Chapter 03.</a:t>
+              <a:t>Sources: NIST SP 800-81 Rev. 3; OMB M-22-09, M-26-14, M-08-23; CISA Encrypted DNS Implementation Guidance; TIC 3.0 Catalog v3.3; FedRAMP. Book 08, Chapter 03.</a:t>
             </a:r>
             <a:endParaRPr lang="en-US" sz="1000" dirty="0"/>
           </a:p>

--- a/presentations/b08-ddi/B08_DDI.pptx
+++ b/presentations/b08-ddi/B08_DDI.pptx
@@ -122,7 +122,7 @@
   <p:extLst>
     <p:ext uri="{521415D9-36F7-43E2-AB2F-B90AF26B5E84}">
       <p14:sectionLst xmlns:p14="http://schemas.microsoft.com/office/powerpoint/2010/main">
-        <p14:section name="Why DNS" id="{40ca38df-484e-30dd-007b-01343e3adfc9}">
+        <p14:section name="Why DNS" id="{62a3adae-79a4-58c1-6296-103739fbe93b}">
           <p14:sldIdLst>
             <p14:sldId id="256"/>
             <p14:sldId id="257"/>
@@ -130,7 +130,7 @@
             <p14:sldId id="259"/>
           </p14:sldIdLst>
         </p14:section>
-        <p14:section name="What changes" id="{866df3d5-d0c7-f7c2-f4fc-4f678584fa4b}">
+        <p14:section name="What changes" id="{7dc38332-3a38-f2f8-3acc-e7237e0456e1}">
           <p14:sldIdLst>
             <p14:sldId id="260"/>
             <p14:sldId id="261"/>
@@ -139,12 +139,12 @@
             <p14:sldId id="264"/>
           </p14:sldIdLst>
         </p14:section>
-        <p14:section name="Who owns it" id="{cf48f7e3-29e2-238b-d78a-dd230a0e47ee}">
+        <p14:section name="Who owns it" id="{8e1c0807-e971-bf99-7c17-11191fb26f83}">
           <p14:sldIdLst>
             <p14:sldId id="265"/>
           </p14:sldIdLst>
         </p14:section>
-        <p14:section name="How to do it" id="{32626ac1-de5e-30ad-eb90-f328c51f3dfb}">
+        <p14:section name="How to do it" id="{830377c8-9ae9-05cd-1275-6c5c62ea3570}">
           <p14:sldIdLst>
             <p14:sldId id="266"/>
             <p14:sldId id="267"/>
@@ -152,7 +152,7 @@
             <p14:sldId id="269"/>
           </p14:sldIdLst>
         </p14:section>
-        <p14:section name="Backup" id="{2df8152a-aaaa-45f9-225c-f455dfec6f0a}">
+        <p14:section name="Backup" id="{513dc6ad-4991-8e23-dcc0-e81f52f841a6}">
           <p14:sldIdLst>
             <p14:sldId id="270"/>
             <p14:sldId id="271"/>
@@ -562,7 +562,7 @@
           <a:p>
             <a:r>
               <a:rPr lang="en-US" dirty="0"/>
-              <a:t>[0:00–0:33]  This briefing comes from Book 08 of the Modernization Workbook, DNS, DHCP and IPAM: governing the name and address layer as one control plane across the data center, every cloud and the branch edge.
+              <a:t>[0:00–0:33]  This briefing comes from Book 08 of the Federal Modernization Workbook, DNS, DHCP and IPAM: governing the name and address layer as one control plane across the data center, every cloud and the branch edge.
 I'll take four questions: why DNS is now the control plane, what has to change, who owns it, and how to migrate and run it.
 The short version: every connection starts with a name, so whoever governs the name layer governs the enterprise.
 Workbook: Book 08, index; Chapter 01 — DNS Is Now the Control Plane.</a:t>
@@ -653,7 +653,7 @@
           <a:p>
             <a:r>
               <a:rPr lang="en-US" dirty="0"/>
-              <a:t>[9:27–10:38]  Who owns it? In an AD estate, DNS belonged to whoever ran the domain controllers; DnsAdmins has full control of every zone by default. A single policy plane concentrates that authority, so its owners have to be named on purpose, one decider per decision.
+              <a:t>[9:35–10:46]  Who owns it? In an AD estate, DNS belonged to whoever ran the domain controllers; DnsAdmins has full control of every zone by default. A single policy plane concentrates that authority, so its owners have to be named on purpose, one decider per decision.
 The sponsor and CIO decide the platform model and when AD DNS and Windows DHCP retire. The CISO and ISSO set the requirements: designated resolvers, allowed transports, DNSSEC and logging. The authorizing official accepts residual risk, including every standing exception.
 The DNS/DDI team runs the policy plane and decides what the edge points at; network engineering configures it. AD administrators own the inventory until AD DNS retires, and cloud teams run their DNS as consumers of the plane.
 Record changes come in three classes. Standard changes inside a delegated namespace are pre-approved. Policy-driven records, like private endpoint entries, need no per-change approval, but the policy itself is change-controlled. High-impact changes, zones, delegations, forwarding, SRV, wildcards and response policy, go to the change board.
@@ -745,7 +745,7 @@
           <a:p>
             <a:r>
               <a:rPr lang="en-US" dirty="0"/>
-              <a:t>[10:38–11:49]  How do you get there? In six phases: inventory, coexist, migrate authority, federate the clouds, decommission AD DNS and DHCP, then harden and evidence. Each phase ends with a rollback point and a resolution test from every origin, not a calendar date.
+              <a:t>[10:46–11:57]  How do you get there? In six phases: inventory, coexist, migrate authority, federate the clouds, decommission AD DNS and DHCP, then harden and evidence. Each phase ends with a rollback point and a resolution test from every origin, not a calendar date.
 Every move of authority, whether a zone, a forwarder, a DHCP scope or a wave of clients, runs the same loop. Lower the TTL to 300 seconds at least 48 hours ahead. Import with a dry run, never moving the SOA, apex NS or AD locator records. Validate from every origin. Switch, then hold and observe, while the old authority keeps answering.
 In Azure Private DNS, removing a virtual network link deletes the records autoregistered through it, and Microsoft says they can't be restored. So unlinking is safe only for zones without autoregistration.
 Decommissioning is gated, never scheduled: the inventory reconciles, every critical SRV record resolves for 30 consecutive days, 90 days of parallel operation pass cleanly, failover is tested, and the old servers are idle.
@@ -837,9 +837,9 @@
           <a:p>
             <a:r>
               <a:rPr lang="en-US" dirty="0"/>
-              <a:t>[11:49–12:53]  Once it's running, one policy plane is only an improvement if divisions can still run their own networks through it. So each division gets a scope covering its own zones, IP spaces and DHCP scopes, with manager, operator and auditor roles, and automation accounts are held to the same scopes. Infrastructure as code, ITSM workflows and ACME DNS-01 certificate automation all go through one API and one audit trail.
+              <a:t>[11:57–13:13]  Once it's running, one policy plane is only an improvement if divisions can still run their own networks through it. So each division gets a scope covering its own zones, IP spaces and DHCP scopes, with manager, operator and auditor roles, and automation accounts are held to the same scopes. Infrastructure as code, ITSM workflows and ACME DNS-01 certificate automation all go through one API and one audit trail.
 Locator records are resolved every 15 minutes from every site and virtual network until the last domain controller retires. Drift reports compare the source of truth with every copy, and hygiene jobs catch stale records and dangling CNAMEs.
-The evidence floor is M-21-31: DNS queries, responses and errors, encrypted ones included, zone transfers, and DHCP lease history with MAC and IP addresses, kept twelve months in active storage and eighteen months cold. The lease history is what turns an address into a device.
+The evidence floor is M-26-14. It doesn't name DNS, but it requires logs that show source and destination addresses, ports and sessions, searchable for six months and retrievable for a year, and readily available to the agency's top-level security operations center. Query logs, encrypted queries included, and DHCP lease history with MAC and IP addresses are how the name layer meets it. The lease history is what turns an address into a device.
 Workbook: Book 08, Chapter 11 — Operating the Control Plane: Delegation, Automation and Evidence.</a:t>
             </a:r>
             <a:endParaRPr lang="en-US" dirty="0"/>
@@ -928,7 +928,7 @@
           <a:p>
             <a:r>
               <a:rPr lang="en-US" dirty="0"/>
-              <a:t>[12:53–14:03]  Choose the platform on the evidence it produces for your own boundary.
+              <a:t>[13:13–14:22]  Choose the platform on the evidence it produces for your own boundary.
 Commercial DDI licensing is quoted per agency, so get every quote on the same assumptions. The cloud-native pieces have public meters, and appear in every model. Azure DNS Private Resolver charges per endpoint: 180 dollars a month for each inbound endpoint and each outbound endpoint, plus 2 dollars 50 per ruleset. A hub with one of each is about 362 dollars 50 a month per region, and a second region doubles it.
 Authorization belongs to an offering, not a vendor. As one example, Infoblox Government Cloud has been FedRAMP Certified at Moderate since December 15, 2022. BlueCat and EfficientIP have no Marketplace listing, so they run inside the agency's boundary. And a Moderate authorization doesn't cover GCC High or DoD.
 Some risk remains. Sync lag becomes the new source of divergence. A management-plane outage blocks changes, though resolution continues from local state. And encrypted DNS bypass stays possible wherever endpoint controls are incomplete.
@@ -1020,7 +1020,7 @@
           <a:p>
             <a:r>
               <a:rPr lang="en-US" dirty="0"/>
-              <a:t>[14:03–15:07]  So, four decisions.
+              <a:t>[14:22–15:27]  So, four decisions.
 Authorize a single authoritative DDI policy plane, and assign an owner, typically the enterprise architecture or network operations lead.
 Have that owner settle the five configuration decisions within 90 days, and report the residual risk to the authorizing official.
 Choose the platform model on evidence: authorization at the right impact level, and quotes on the same assumptions.
@@ -1382,7 +1382,7 @@
           <a:p>
             <a:r>
               <a:rPr lang="en-US" dirty="0"/>
-              <a:t>[1:41–2:50]  Run those platforms independently and you get split-brain DNS: the same name returning different answers depending on where the query starts. Designed split-horizon is fine. The problem is unintentional drift between systems with no shared state.
+              <a:t>[1:41–2:51]  Run those platforms independently and you get split-brain DNS: the same name returning different answers depending on where the query starts. Designed split-horizon is fine. The problem is unintentional drift between systems with no shared state.
 It takes three forms. Private-IP split-brain: an EC2 instance gets an Azure private endpoint's private address only through a Route 53 forwarding rule. If the rule is missing or stale, the name still resolves, to the public address. Microsoft attributes roughly 70 percent of private-endpoint access-denied cases to exactly that. SaaS split-brain: GCC uses the Worldwide endpoint list, so the risk is path consistency, a stale forwarder or browser DoH to a public resolver. And security-policy split-brain: a block applies only on the resolver that answers, so the posture is the weakest resolver a client can reach.
 The failure is silent, the change rate outruns any manual process, and every system has its own timing. Only a control plane that holds the policy objects keeps them in step.
 Workbook: Book 08, Chapter 02 — Split-Brain DNS: The Structural Problem.</a:t>
@@ -1473,8 +1473,8 @@
           <a:p>
             <a:r>
               <a:rPr lang="en-US" dirty="0"/>
-              <a:t>[2:50–3:55]  The federal mandates never name a product, but together they describe a governed name layer. It's worth being precise about who requires what.
-OMB M-22-09 requires encrypted DNS wherever it's technically supported, with endpoints explicitly configured to use agency-designated resolvers. It also notes that DNS must already be routed through CISA-operated infrastructure. The requirement that all egress resolution go through Protective DNS comes from CISA's own guidance, which cites the statute. OMB M-21-31 makes DNS logging a basic, EL1 requirement, encrypted queries included, with the source host identifiable. M-08-23 and SP 800-53 carry DNSSEC. And version 3.3 of the TIC 3.0 catalog, published in September 2026, lists five DNS capabilities, from sinkholing to Protective DNS.
+              <a:t>[2:51–4:03]  The federal mandates never name a product, but together they describe a governed name layer. It's worth being precise about who requires what.
+OMB M-22-09 requires encrypted DNS wherever it's technically supported, with endpoints explicitly configured to use agency-designated resolvers. It also notes that DNS must already be routed through CISA-operated infrastructure. The requirement that all egress resolution go through Protective DNS comes from CISA's own guidance, which cites the statute. OMB M-26-14, which rescinded M-21-31 in May 2026, doesn't name DNS, but it requires logs that show source and destination addresses, protocols, ports and sessions, searchable for six months and retrievable for a year. M-08-23 and SP 800-53 carry DNSSEC. And version 3.3 of the TIC 3.0 catalog, published in September 2026, lists five DNS capabilities, from sinkholing to Protective DNS.
 NIST SP 800-81 Revision 3, final on March 19, 2026, is the practical guide to all of this: guidance, not a mandate. And FedRAMP certifies a cloud service, not an architecture; the agency still authorizes its own DDI system.
 Workbook: Book 08, Chapter 03 — Federal Requirements: NIST SP 800-81, FedRAMP and Zero Trust.</a:t>
             </a:r>
@@ -1564,7 +1564,7 @@
           <a:p>
             <a:r>
               <a:rPr lang="en-US" dirty="0"/>
-              <a:t>[3:55–5:00]  What has to change starts with Active Directory. For twenty years AD has been the hidden DNS service of the on-premises network: a domain's name becomes a zone, and every domain-joined machine points at the domain controllers for all of its resolution.
+              <a:t>[4:03–5:08]  What has to change starts with Active Directory. For twenty years AD has been the hidden DNS service of the on-premises network: a domain's name becomes a zone, and every domain-joined machine points at the domain controllers for all of its resolution.
 Netlogon on each domain controller registers the SRV locator records that clients use to find LDAP, Kerberos and the global catalog. Secure dynamic update keeps those records current. Forwarders, GlobalNames, reverse and signed zones each need a decision.
 Microsoft Entra ID inherits none of it. It hosts no zones and publishes no locator records, yet hybrid-joined devices still look for a domain controller, and Entra Domain Services adds a DNS authority of its own.
 So the locator records stay where domain controllers can register them securely, on AD DNS or a DDI platform that accepts GSS-TSIG updates, until the last domain controller goes. Everything else moves zone by zone, once it's inventoried.
@@ -1656,7 +1656,7 @@
           <a:p>
             <a:r>
               <a:rPr lang="en-US" dirty="0"/>
-              <a:t>[5:00–6:10]  Every control in the policy plane assumes the query reaches it. Three ordinary mechanisms decide whether it does, and none of them reports when it doesn't.
+              <a:t>[5:08–6:17]  Every control in the policy plane assumes the query reaches it. Three ordinary mechanisms decide whether it does, and none of them reports when it doesn't.
 First, the edge. Cisco Catalyst SD-WAN's redirect-dns action, as one example, sends branch DNS to a policy-designated resolver, IPv4 and UDP only. It must be a network-addressable agency resolver, not a loopback agent on the device, and any SASE resolver belongs behind it.
 Second, encrypted DNS. DNS over TLS and DNS over QUIC use port 853, so block them except to approved resolvers. DNS over HTTPS shares port 443 with all web traffic, so it's governed at the endpoint: Windows DoH policy, the Edge and Chrome DoH mode, and an NXDOMAIN answer for Firefox's canary domain.
 Third, rogue DHCP. One rogue server handing out its own resolver in option 6 moves a whole subnet at once, and rogue IPv6 router advertisements do the same. AD authorization doesn't stop them; DHCP snooping and RA Guard on the switches do.
@@ -1748,7 +1748,7 @@
           <a:p>
             <a:r>
               <a:rPr lang="en-US" dirty="0"/>
-              <a:t>[6:10–7:17]  A certificate can be valid, unrevoked and issued for the right name, and still fail, because every check that makes it trustworthy starts with a DNS lookup: the endpoint, the revocation endpoints, the FQDN that policy names, and the sign-in endpoint for the token's cloud.
+              <a:t>[6:17–7:25]  A certificate can be valid, unrevoked and issued for the right name, and still fail, because every check that makes it trustworthy starts with a DNS lookup: the endpoint, the revocation endpoints, the FQDN that policy names, and the sign-in endpoint for the token's cloud.
 If an agency CRL name exists only in AD DNS, a workload in AWS can't resolve it without a forwarding rule. The revocation check fails, the ticket is opened against PKI, and the root cause can take days to find.
 DNSSEC adds origin authentication and integrity, not encryption. The program's position follows NIST: sign external zones and the dot-gov delegations, always. Validate on every agency resolver, with the root trust anchor. And sign internal zones only where the system's authorization requires it; NIST calls internal signing of limited value for most organizations. Validation stays on agency resolvers because Azure DNS and Route 53 sign public zones only, and the default Azure resolver doesn't validate.
 Workbook: Book 08, Chapter 06 — DNS Identity, Certificates and DNSSEC.</a:t>
@@ -1839,7 +1839,7 @@
           <a:p>
             <a:r>
               <a:rPr lang="en-US" dirty="0"/>
-              <a:t>[7:17–8:28]  Azure private endpoints are the commonest source of private-IP split-brain.
+              <a:t>[7:25–8:35]  Azure private endpoints are the commonest source of private-IP split-brain.
 When a private endpoint is created, Azure writes its A record into a privatelink zone, and public DNS carries a CNAME into that name. The private answer comes back only when the query reaches a resolver linked to the zone. So every origin, on-premises, the other clouds and the branch path, forwards the service's public zone, such as database.windows.net, to the DNS Private Resolver's inbound endpoint. Not the privatelink zone. Azure Government uses different zone names, so commercial rules don't carry over.
 The Private Resolver is a recursive bridge, not an authority: reach it by forwarding, never by delegation. Give each endpoint a dedicated subnet and a static address, avoid ruleset loops, and deploy one per region.
 Addresses need the same discipline, with the enterprise IPAM as the authority for address blocks. AWS VPC IPAM can allocate from an external IPAM in commercial Regions, but not in GovCloud; on Azure and Google Cloud, mirror the reservations and reconcile.
@@ -1931,7 +1931,7 @@
           <a:p>
             <a:r>
               <a:rPr lang="en-US" dirty="0"/>
-              <a:t>[8:28–9:27]  A branch client's query passes the SD-WAN edge to an agency-controlled resolver, then the DDI policy plane, with its response policy zones, DNSSEC, IPAM and forwarding rules, then the per-cloud private zones. Internet-bound recursion leaves through CISA's Protective DNS.
+              <a:t>[8:35–9:35]  A branch client's query passes the SD-WAN edge to an agency-controlled resolver, then the DDI policy plane, with its response policy zones, DNSSEC, IPAM and forwarding rules, then the per-cloud private zones. Internet-bound recursion leaves through CISA's Protective DNS.
 Five decisions carry almost all of the operational risk. One: the redirect-dns target is a network-addressable agency resolver. Two: the agency resolver is the first hop, and any other resolver is its forwarder. Three: the policy plane holds every per-cloud conditional forwarding rule. Four: AD DNS is inventoried and reprovisioned before any domain controller goes. Five: OCSP and CRL endpoints resolve from every origin.
 Each fails silently: the query still resolves, just outside policy or to the wrong address. So each comes with a check, run in the live configuration rather than the design document, before the next SD-WAN or DDI change.
 Workbook: Book 08, Chapter 08 — Reference Architecture and the Five Critical Decisions.</a:t>
@@ -2229,7 +2229,7 @@
                   <a:schemeClr val="accent5"/>
                 </a:solidFill>
               </a:rPr>
-              <a:t>Modernization Workbook  ·  Book 08 DNS, DHCP &amp; IPAM</a:t>
+              <a:t>Federal Modernization Workbook  ·  Book 08 DNS, DHCP &amp; IPAM</a:t>
             </a:r>
             <a:endParaRPr lang="en-US" sz="1000" dirty="0"/>
           </a:p>
@@ -2710,7 +2710,90 @@
       </p:sp>
       <p:sp>
         <p:nvSpPr>
-          <p:cNvPr id="4" name="Agenda line"/>
+          <p:cNvPr id="4" name="Presenter"/>
+          <p:cNvSpPr txBox="1"/>
+          <p:nvPr/>
+        </p:nvSpPr>
+        <p:spPr>
+          <a:xfrm>
+            <a:off x="731520" y="5897880"/>
+            <a:ext cx="6858000" cy="365760"/>
+          </a:xfrm>
+          <a:prstGeom prst="rect">
+            <a:avLst/>
+          </a:prstGeom>
+          <a:noFill/>
+          <a:ln/>
+        </p:spPr>
+        <p:txBody>
+          <a:bodyPr wrap="square" lIns="0" tIns="0" rIns="0" bIns="0" rtlCol="0" anchor="ctr"/>
+          <a:lstStyle/>
+          <a:p>
+            <a:pPr indent="0" marL="0">
+              <a:buNone/>
+            </a:pPr>
+            <a:r>
+              <a:rPr lang="en-US" sz="1600" dirty="0">
+                <a:solidFill>
+                  <a:srgbClr val="64748B"/>
+                </a:solidFill>
+              </a:rPr>
+              <a:t>Presented by  </a:t>
+            </a:r>
+            <a:pPr indent="0" marL="0">
+              <a:buNone/>
+            </a:pPr>
+            <a:r>
+              <a:rPr lang="en-US" sz="1600" b="1" dirty="0">
+                <a:solidFill>
+                  <a:srgbClr val="1F2A44"/>
+                </a:solidFill>
+              </a:rPr>
+              <a:t>Michael F. Stratton</a:t>
+            </a:r>
+            <a:endParaRPr lang="en-US" sz="1600" dirty="0"/>
+          </a:p>
+        </p:txBody>
+      </p:sp>
+      <p:sp>
+        <p:nvSpPr>
+          <p:cNvPr id="5" name="Disclaimer"/>
+          <p:cNvSpPr txBox="1"/>
+          <p:nvPr/>
+        </p:nvSpPr>
+        <p:spPr>
+          <a:xfrm>
+            <a:off x="731520" y="6309360"/>
+            <a:ext cx="8686800" cy="274320"/>
+          </a:xfrm>
+          <a:prstGeom prst="rect">
+            <a:avLst/>
+          </a:prstGeom>
+          <a:noFill/>
+          <a:ln/>
+        </p:spPr>
+        <p:txBody>
+          <a:bodyPr wrap="square" lIns="0" tIns="0" rIns="0" bIns="0" rtlCol="0" anchor="ctr"/>
+          <a:lstStyle/>
+          <a:p>
+            <a:pPr indent="0" marL="0">
+              <a:buNone/>
+            </a:pPr>
+            <a:r>
+              <a:rPr lang="en-US" sz="1050" dirty="0">
+                <a:solidFill>
+                  <a:srgbClr val="64748B"/>
+                </a:solidFill>
+              </a:rPr>
+              <a:t>Not an official U.S. government publication. Independent technical analysis; not reviewed or endorsed by any federal agency.</a:t>
+            </a:r>
+            <a:endParaRPr lang="en-US" sz="1050" dirty="0"/>
+          </a:p>
+        </p:txBody>
+      </p:sp>
+      <p:sp>
+        <p:nvSpPr>
+          <p:cNvPr id="6" name="Agenda line"/>
           <p:cNvSpPr txBox="1"/>
           <p:nvPr/>
         </p:nvSpPr>
@@ -2812,7 +2895,7 @@
       </p:sp>
       <p:sp>
         <p:nvSpPr>
-          <p:cNvPr id="5" name="Series line"/>
+          <p:cNvPr id="7" name="Series line"/>
           <p:cNvSpPr txBox="1"/>
           <p:nvPr/>
         </p:nvSpPr>
@@ -2840,7 +2923,7 @@
                   <a:srgbClr val="1F2A44"/>
                 </a:solidFill>
               </a:rPr>
-              <a:t>Modernization Workbook</a:t>
+              <a:t>Federal Modernization Workbook</a:t>
             </a:r>
             <a:endParaRPr lang="en-US" sz="1600" dirty="0"/>
           </a:p>
@@ -2928,7 +3011,13 @@
       </p:sp>
       <p:sp>
         <p:nvSpPr>
-          <p:cNvPr id="3" name="Tag Who"/>
+          <p:cNvPr id="3" name="Tag Who" descr="">
+            <a:extLst>
+              <a:ext uri="{C183D7F6-B498-43B3-948B-1728B52AA6E4}">
+                <adec:decorative xmlns:adec="http://schemas.microsoft.com/office/drawing/2017/decorative" val="1"/>
+              </a:ext>
+            </a:extLst>
+          </p:cNvPr>
           <p:cNvSpPr/>
           <p:nvPr/>
         </p:nvSpPr>
@@ -2991,7 +3080,13 @@
       </p:sp>
       <p:sp>
         <p:nvSpPr>
-          <p:cNvPr id="5" name="Who col 1"/>
+          <p:cNvPr id="5" name="Who col 1" descr="">
+            <a:extLst>
+              <a:ext uri="{C183D7F6-B498-43B3-948B-1728B52AA6E4}">
+                <adec:decorative xmlns:adec="http://schemas.microsoft.com/office/drawing/2017/decorative" val="1"/>
+              </a:ext>
+            </a:extLst>
+          </p:cNvPr>
           <p:cNvSpPr/>
           <p:nvPr/>
         </p:nvSpPr>
@@ -3025,7 +3120,13 @@
       </p:sp>
       <p:sp>
         <p:nvSpPr>
-          <p:cNvPr id="6" name="Icon FaBuildingColumns"/>
+          <p:cNvPr id="6" name="Icon FaBuildingColumns" descr="">
+            <a:extLst>
+              <a:ext uri="{C183D7F6-B498-43B3-948B-1728B52AA6E4}">
+                <adec:decorative xmlns:adec="http://schemas.microsoft.com/office/drawing/2017/decorative" val="1"/>
+              </a:ext>
+            </a:extLst>
+          </p:cNvPr>
           <p:cNvSpPr/>
           <p:nvPr/>
         </p:nvSpPr>
@@ -3050,7 +3151,13 @@
       </p:sp>
       <p:pic>
         <p:nvPicPr>
-          <p:cNvPr id="7" name="Image 0" descr="C:\Users\whale\git\mwb-b08\presentations\_build\icons\FaBuildingColumns.png">    </p:cNvPr>
+          <p:cNvPr id="7" name="Image 0" descr="">
+            <a:extLst>
+              <a:ext uri="{C183D7F6-B498-43B3-948B-1728B52AA6E4}">
+                <adec:decorative xmlns:adec="http://schemas.microsoft.com/office/drawing/2017/decorative" val="1"/>
+              </a:ext>
+            </a:extLst>
+          </p:cNvPr>
           <p:cNvPicPr>
             <a:picLocks noChangeAspect="1"/>
           </p:cNvPicPr>
@@ -3237,7 +3344,13 @@
       </p:sp>
       <p:sp>
         <p:nvSpPr>
-          <p:cNvPr id="10" name="Who col 2"/>
+          <p:cNvPr id="10" name="Who col 2" descr="">
+            <a:extLst>
+              <a:ext uri="{C183D7F6-B498-43B3-948B-1728B52AA6E4}">
+                <adec:decorative xmlns:adec="http://schemas.microsoft.com/office/drawing/2017/decorative" val="1"/>
+              </a:ext>
+            </a:extLst>
+          </p:cNvPr>
           <p:cNvSpPr/>
           <p:nvPr/>
         </p:nvSpPr>
@@ -3271,7 +3384,13 @@
       </p:sp>
       <p:sp>
         <p:nvSpPr>
-          <p:cNvPr id="11" name="Icon FaUsersGear"/>
+          <p:cNvPr id="11" name="Icon FaUsersGear" descr="">
+            <a:extLst>
+              <a:ext uri="{C183D7F6-B498-43B3-948B-1728B52AA6E4}">
+                <adec:decorative xmlns:adec="http://schemas.microsoft.com/office/drawing/2017/decorative" val="1"/>
+              </a:ext>
+            </a:extLst>
+          </p:cNvPr>
           <p:cNvSpPr/>
           <p:nvPr/>
         </p:nvSpPr>
@@ -3296,7 +3415,13 @@
       </p:sp>
       <p:pic>
         <p:nvPicPr>
-          <p:cNvPr id="12" name="Image 1" descr="C:\Users\whale\git\mwb-b08\presentations\_build\icons\FaUsersGear.png">    </p:cNvPr>
+          <p:cNvPr id="12" name="Image 1" descr="">
+            <a:extLst>
+              <a:ext uri="{C183D7F6-B498-43B3-948B-1728B52AA6E4}">
+                <adec:decorative xmlns:adec="http://schemas.microsoft.com/office/drawing/2017/decorative" val="1"/>
+              </a:ext>
+            </a:extLst>
+          </p:cNvPr>
           <p:cNvPicPr>
             <a:picLocks noChangeAspect="1"/>
           </p:cNvPicPr>
@@ -3483,7 +3608,13 @@
       </p:sp>
       <p:sp>
         <p:nvSpPr>
-          <p:cNvPr id="15" name="Who col 3"/>
+          <p:cNvPr id="15" name="Who col 3" descr="">
+            <a:extLst>
+              <a:ext uri="{C183D7F6-B498-43B3-948B-1728B52AA6E4}">
+                <adec:decorative xmlns:adec="http://schemas.microsoft.com/office/drawing/2017/decorative" val="1"/>
+              </a:ext>
+            </a:extLst>
+          </p:cNvPr>
           <p:cNvSpPr/>
           <p:nvPr/>
         </p:nvSpPr>
@@ -3517,7 +3648,13 @@
       </p:sp>
       <p:sp>
         <p:nvSpPr>
-          <p:cNvPr id="16" name="Icon FaPeopleArrows"/>
+          <p:cNvPr id="16" name="Icon FaPeopleArrows" descr="">
+            <a:extLst>
+              <a:ext uri="{C183D7F6-B498-43B3-948B-1728B52AA6E4}">
+                <adec:decorative xmlns:adec="http://schemas.microsoft.com/office/drawing/2017/decorative" val="1"/>
+              </a:ext>
+            </a:extLst>
+          </p:cNvPr>
           <p:cNvSpPr/>
           <p:nvPr/>
         </p:nvSpPr>
@@ -3542,7 +3679,13 @@
       </p:sp>
       <p:pic>
         <p:nvPicPr>
-          <p:cNvPr id="17" name="Image 2" descr="C:\Users\whale\git\mwb-b08\presentations\_build\icons\FaPeopleArrows.png">    </p:cNvPr>
+          <p:cNvPr id="17" name="Image 2" descr="">
+            <a:extLst>
+              <a:ext uri="{C183D7F6-B498-43B3-948B-1728B52AA6E4}">
+                <adec:decorative xmlns:adec="http://schemas.microsoft.com/office/drawing/2017/decorative" val="1"/>
+              </a:ext>
+            </a:extLst>
+          </p:cNvPr>
           <p:cNvPicPr>
             <a:picLocks noChangeAspect="1"/>
           </p:cNvPicPr>
@@ -3765,7 +3908,13 @@
       </p:sp>
       <p:sp>
         <p:nvSpPr>
-          <p:cNvPr id="21" name="Class 1"/>
+          <p:cNvPr id="21" name="Class 1" descr="">
+            <a:extLst>
+              <a:ext uri="{C183D7F6-B498-43B3-948B-1728B52AA6E4}">
+                <adec:decorative xmlns:adec="http://schemas.microsoft.com/office/drawing/2017/decorative" val="1"/>
+              </a:ext>
+            </a:extLst>
+          </p:cNvPr>
           <p:cNvSpPr/>
           <p:nvPr/>
         </p:nvSpPr>
@@ -3846,7 +3995,13 @@
       </p:sp>
       <p:sp>
         <p:nvSpPr>
-          <p:cNvPr id="23" name="Class 2"/>
+          <p:cNvPr id="23" name="Class 2" descr="">
+            <a:extLst>
+              <a:ext uri="{C183D7F6-B498-43B3-948B-1728B52AA6E4}">
+                <adec:decorative xmlns:adec="http://schemas.microsoft.com/office/drawing/2017/decorative" val="1"/>
+              </a:ext>
+            </a:extLst>
+          </p:cNvPr>
           <p:cNvSpPr/>
           <p:nvPr/>
         </p:nvSpPr>
@@ -3927,7 +4082,13 @@
       </p:sp>
       <p:sp>
         <p:nvSpPr>
-          <p:cNvPr id="25" name="Class 3"/>
+          <p:cNvPr id="25" name="Class 3" descr="">
+            <a:extLst>
+              <a:ext uri="{C183D7F6-B498-43B3-948B-1728B52AA6E4}">
+                <adec:decorative xmlns:adec="http://schemas.microsoft.com/office/drawing/2017/decorative" val="1"/>
+              </a:ext>
+            </a:extLst>
+          </p:cNvPr>
           <p:cNvSpPr/>
           <p:nvPr/>
         </p:nvSpPr>
@@ -4155,7 +4316,13 @@
       </p:sp>
       <p:sp>
         <p:nvSpPr>
-          <p:cNvPr id="3" name="Tag How"/>
+          <p:cNvPr id="3" name="Tag How" descr="">
+            <a:extLst>
+              <a:ext uri="{C183D7F6-B498-43B3-948B-1728B52AA6E4}">
+                <adec:decorative xmlns:adec="http://schemas.microsoft.com/office/drawing/2017/decorative" val="1"/>
+              </a:ext>
+            </a:extLst>
+          </p:cNvPr>
           <p:cNvSpPr/>
           <p:nvPr/>
         </p:nvSpPr>
@@ -4237,7 +4404,7 @@
         <a:graphic>
           <a:graphicData uri="http://schemas.openxmlformats.org/drawingml/2006/table">
             <a:tbl>
-              <a:tblPr/>
+              <a:tblPr firstRow="1" bandRow="1"/>
               <a:tblGrid>
                 <a:gridCol w="1874520"/>
                 <a:gridCol w="3246120"/>
@@ -5691,7 +5858,13 @@
       </p:graphicFrame>
       <p:sp>
         <p:nvSpPr>
-          <p:cNvPr id="6" name="Loop box"/>
+          <p:cNvPr id="6" name="Loop box" descr="">
+            <a:extLst>
+              <a:ext uri="{C183D7F6-B498-43B3-948B-1728B52AA6E4}">
+                <adec:decorative xmlns:adec="http://schemas.microsoft.com/office/drawing/2017/decorative" val="1"/>
+              </a:ext>
+            </a:extLst>
+          </p:cNvPr>
           <p:cNvSpPr/>
           <p:nvPr/>
         </p:nvSpPr>
@@ -5725,7 +5898,13 @@
       </p:sp>
       <p:sp>
         <p:nvSpPr>
-          <p:cNvPr id="7" name="Icon FaArrowsRotate"/>
+          <p:cNvPr id="7" name="Icon FaArrowsRotate" descr="">
+            <a:extLst>
+              <a:ext uri="{C183D7F6-B498-43B3-948B-1728B52AA6E4}">
+                <adec:decorative xmlns:adec="http://schemas.microsoft.com/office/drawing/2017/decorative" val="1"/>
+              </a:ext>
+            </a:extLst>
+          </p:cNvPr>
           <p:cNvSpPr/>
           <p:nvPr/>
         </p:nvSpPr>
@@ -5750,7 +5929,13 @@
       </p:sp>
       <p:pic>
         <p:nvPicPr>
-          <p:cNvPr id="8" name="Image 0" descr="C:\Users\whale\git\mwb-b08\presentations\_build\icons\FaArrowsRotate.png">    </p:cNvPr>
+          <p:cNvPr id="8" name="Image 0" descr="">
+            <a:extLst>
+              <a:ext uri="{C183D7F6-B498-43B3-948B-1728B52AA6E4}">
+                <adec:decorative xmlns:adec="http://schemas.microsoft.com/office/drawing/2017/decorative" val="1"/>
+              </a:ext>
+            </a:extLst>
+          </p:cNvPr>
           <p:cNvPicPr>
             <a:picLocks noChangeAspect="1"/>
           </p:cNvPicPr>
@@ -5925,7 +6110,13 @@
       </p:sp>
       <p:sp>
         <p:nvSpPr>
-          <p:cNvPr id="11" name="Rollback"/>
+          <p:cNvPr id="11" name="Rollback" descr="">
+            <a:extLst>
+              <a:ext uri="{C183D7F6-B498-43B3-948B-1728B52AA6E4}">
+                <adec:decorative xmlns:adec="http://schemas.microsoft.com/office/drawing/2017/decorative" val="1"/>
+              </a:ext>
+            </a:extLst>
+          </p:cNvPr>
           <p:cNvSpPr/>
           <p:nvPr/>
         </p:nvSpPr>
@@ -5959,7 +6150,13 @@
       </p:sp>
       <p:sp>
         <p:nvSpPr>
-          <p:cNvPr id="12" name="Icon FaTriangleExclamation"/>
+          <p:cNvPr id="12" name="Icon FaTriangleExclamation" descr="">
+            <a:extLst>
+              <a:ext uri="{C183D7F6-B498-43B3-948B-1728B52AA6E4}">
+                <adec:decorative xmlns:adec="http://schemas.microsoft.com/office/drawing/2017/decorative" val="1"/>
+              </a:ext>
+            </a:extLst>
+          </p:cNvPr>
           <p:cNvSpPr/>
           <p:nvPr/>
         </p:nvSpPr>
@@ -5984,7 +6181,13 @@
       </p:sp>
       <p:pic>
         <p:nvPicPr>
-          <p:cNvPr id="13" name="Image 1" descr="C:\Users\whale\git\mwb-b08\presentations\_build\icons\FaTriangleExclamation.png">    </p:cNvPr>
+          <p:cNvPr id="13" name="Image 1" descr="">
+            <a:extLst>
+              <a:ext uri="{C183D7F6-B498-43B3-948B-1728B52AA6E4}">
+                <adec:decorative xmlns:adec="http://schemas.microsoft.com/office/drawing/2017/decorative" val="1"/>
+              </a:ext>
+            </a:extLst>
+          </p:cNvPr>
           <p:cNvPicPr>
             <a:picLocks noChangeAspect="1"/>
           </p:cNvPicPr>
@@ -6202,7 +6405,13 @@
       </p:sp>
       <p:sp>
         <p:nvSpPr>
-          <p:cNvPr id="3" name="Tag How"/>
+          <p:cNvPr id="3" name="Tag How" descr="">
+            <a:extLst>
+              <a:ext uri="{C183D7F6-B498-43B3-948B-1728B52AA6E4}">
+                <adec:decorative xmlns:adec="http://schemas.microsoft.com/office/drawing/2017/decorative" val="1"/>
+              </a:ext>
+            </a:extLst>
+          </p:cNvPr>
           <p:cNvSpPr/>
           <p:nvPr/>
         </p:nvSpPr>
@@ -6301,7 +6510,13 @@
       </p:sp>
       <p:sp>
         <p:nvSpPr>
-          <p:cNvPr id="6" name="Icon FaSitemap"/>
+          <p:cNvPr id="6" name="Icon FaSitemap" descr="">
+            <a:extLst>
+              <a:ext uri="{C183D7F6-B498-43B3-948B-1728B52AA6E4}">
+                <adec:decorative xmlns:adec="http://schemas.microsoft.com/office/drawing/2017/decorative" val="1"/>
+              </a:ext>
+            </a:extLst>
+          </p:cNvPr>
           <p:cNvSpPr/>
           <p:nvPr/>
         </p:nvSpPr>
@@ -6326,7 +6541,13 @@
       </p:sp>
       <p:pic>
         <p:nvPicPr>
-          <p:cNvPr id="7" name="Image 0" descr="C:\Users\whale\git\mwb-b08\presentations\_build\icons\FaSitemap.png">    </p:cNvPr>
+          <p:cNvPr id="7" name="Image 0" descr="">
+            <a:extLst>
+              <a:ext uri="{C183D7F6-B498-43B3-948B-1728B52AA6E4}">
+                <adec:decorative xmlns:adec="http://schemas.microsoft.com/office/drawing/2017/decorative" val="1"/>
+              </a:ext>
+            </a:extLst>
+          </p:cNvPr>
           <p:cNvPicPr>
             <a:picLocks noChangeAspect="1"/>
           </p:cNvPicPr>
@@ -6400,7 +6621,13 @@
       </p:sp>
       <p:sp>
         <p:nvSpPr>
-          <p:cNvPr id="9" name="Icon FaCodeBranch"/>
+          <p:cNvPr id="9" name="Icon FaCodeBranch" descr="">
+            <a:extLst>
+              <a:ext uri="{C183D7F6-B498-43B3-948B-1728B52AA6E4}">
+                <adec:decorative xmlns:adec="http://schemas.microsoft.com/office/drawing/2017/decorative" val="1"/>
+              </a:ext>
+            </a:extLst>
+          </p:cNvPr>
           <p:cNvSpPr/>
           <p:nvPr/>
         </p:nvSpPr>
@@ -6425,7 +6652,13 @@
       </p:sp>
       <p:pic>
         <p:nvPicPr>
-          <p:cNvPr id="10" name="Image 1" descr="C:\Users\whale\git\mwb-b08\presentations\_build\icons\FaCodeBranch.png">    </p:cNvPr>
+          <p:cNvPr id="10" name="Image 1" descr="">
+            <a:extLst>
+              <a:ext uri="{C183D7F6-B498-43B3-948B-1728B52AA6E4}">
+                <adec:decorative xmlns:adec="http://schemas.microsoft.com/office/drawing/2017/decorative" val="1"/>
+              </a:ext>
+            </a:extLst>
+          </p:cNvPr>
           <p:cNvPicPr>
             <a:picLocks noChangeAspect="1"/>
           </p:cNvPicPr>
@@ -6499,7 +6732,13 @@
       </p:sp>
       <p:sp>
         <p:nvSpPr>
-          <p:cNvPr id="12" name="Icon FaChartLine"/>
+          <p:cNvPr id="12" name="Icon FaChartLine" descr="">
+            <a:extLst>
+              <a:ext uri="{C183D7F6-B498-43B3-948B-1728B52AA6E4}">
+                <adec:decorative xmlns:adec="http://schemas.microsoft.com/office/drawing/2017/decorative" val="1"/>
+              </a:ext>
+            </a:extLst>
+          </p:cNvPr>
           <p:cNvSpPr/>
           <p:nvPr/>
         </p:nvSpPr>
@@ -6524,7 +6763,13 @@
       </p:sp>
       <p:pic>
         <p:nvPicPr>
-          <p:cNvPr id="13" name="Image 2" descr="C:\Users\whale\git\mwb-b08\presentations\_build\icons\FaChartLine.png">    </p:cNvPr>
+          <p:cNvPr id="13" name="Image 2" descr="">
+            <a:extLst>
+              <a:ext uri="{C183D7F6-B498-43B3-948B-1728B52AA6E4}">
+                <adec:decorative xmlns:adec="http://schemas.microsoft.com/office/drawing/2017/decorative" val="1"/>
+              </a:ext>
+            </a:extLst>
+          </p:cNvPr>
           <p:cNvPicPr>
             <a:picLocks noChangeAspect="1"/>
           </p:cNvPicPr>
@@ -6598,7 +6843,13 @@
       </p:sp>
       <p:sp>
         <p:nvSpPr>
-          <p:cNvPr id="15" name="Logging box"/>
+          <p:cNvPr id="15" name="Logging box" descr="">
+            <a:extLst>
+              <a:ext uri="{C183D7F6-B498-43B3-948B-1728B52AA6E4}">
+                <adec:decorative xmlns:adec="http://schemas.microsoft.com/office/drawing/2017/decorative" val="1"/>
+              </a:ext>
+            </a:extLst>
+          </p:cNvPr>
           <p:cNvSpPr/>
           <p:nvPr/>
         </p:nvSpPr>
@@ -6632,7 +6883,13 @@
       </p:sp>
       <p:sp>
         <p:nvSpPr>
-          <p:cNvPr id="16" name="Icon FaFileShield"/>
+          <p:cNvPr id="16" name="Icon FaFileShield" descr="">
+            <a:extLst>
+              <a:ext uri="{C183D7F6-B498-43B3-948B-1728B52AA6E4}">
+                <adec:decorative xmlns:adec="http://schemas.microsoft.com/office/drawing/2017/decorative" val="1"/>
+              </a:ext>
+            </a:extLst>
+          </p:cNvPr>
           <p:cNvSpPr/>
           <p:nvPr/>
         </p:nvSpPr>
@@ -6657,7 +6914,13 @@
       </p:sp>
       <p:pic>
         <p:nvPicPr>
-          <p:cNvPr id="17" name="Image 3" descr="C:\Users\whale\git\mwb-b08\presentations\_build\icons\FaFileShield.png">    </p:cNvPr>
+          <p:cNvPr id="17" name="Image 3" descr="">
+            <a:extLst>
+              <a:ext uri="{C183D7F6-B498-43B3-948B-1728B52AA6E4}">
+                <adec:decorative xmlns:adec="http://schemas.microsoft.com/office/drawing/2017/decorative" val="1"/>
+              </a:ext>
+            </a:extLst>
+          </p:cNvPr>
           <p:cNvPicPr>
             <a:picLocks noChangeAspect="1"/>
           </p:cNvPicPr>
@@ -6712,7 +6975,7 @@
                 <a:ea typeface="Cambria" pitchFamily="34" charset="-122"/>
                 <a:cs typeface="Cambria" pitchFamily="34" charset="-120"/>
               </a:rPr>
-              <a:t>The M-21-31 logging floor</a:t>
+              <a:t>The M-26-14 logging floor</a:t>
             </a:r>
             <a:endParaRPr lang="en-US" sz="1800" dirty="0"/>
           </a:p>
@@ -6752,7 +7015,7 @@
                   <a:schemeClr val="tx2"/>
                 </a:solidFill>
               </a:rPr>
-              <a:t>DNS queries, responses and errors, encrypted ones included</a:t>
+              <a:t>Source and destination address, port and session in the logs</a:t>
             </a:r>
             <a:endParaRPr lang="en-US" sz="1400" dirty="0"/>
           </a:p>
@@ -6770,7 +7033,7 @@
                   <a:schemeClr val="tx2"/>
                 </a:solidFill>
               </a:rPr>
-              <a:t>Zone transfers, and DHCP leases with MAC and IP address</a:t>
+              <a:t>Searchable 6 months, retrievable for a year</a:t>
             </a:r>
             <a:endParaRPr lang="en-US" sz="1400" dirty="0"/>
           </a:p>
@@ -6788,7 +7051,7 @@
                   <a:schemeClr val="tx2"/>
                 </a:solidFill>
               </a:rPr>
-              <a:t>12 months in active storage, 18 months cold</a:t>
+              <a:t>Readily available to the top-level SOC</a:t>
             </a:r>
             <a:endParaRPr lang="en-US" sz="1400" dirty="0"/>
           </a:p>
@@ -6814,7 +7077,13 @@
       </p:sp>
       <p:sp>
         <p:nvSpPr>
-          <p:cNvPr id="20" name="Checklist"/>
+          <p:cNvPr id="20" name="Checklist" descr="">
+            <a:extLst>
+              <a:ext uri="{C183D7F6-B498-43B3-948B-1728B52AA6E4}">
+                <adec:decorative xmlns:adec="http://schemas.microsoft.com/office/drawing/2017/decorative" val="1"/>
+              </a:ext>
+            </a:extLst>
+          </p:cNvPr>
           <p:cNvSpPr/>
           <p:nvPr/>
         </p:nvSpPr>
@@ -6848,7 +7117,13 @@
       </p:sp>
       <p:sp>
         <p:nvSpPr>
-          <p:cNvPr id="21" name="Icon FaListCheck"/>
+          <p:cNvPr id="21" name="Icon FaListCheck" descr="">
+            <a:extLst>
+              <a:ext uri="{C183D7F6-B498-43B3-948B-1728B52AA6E4}">
+                <adec:decorative xmlns:adec="http://schemas.microsoft.com/office/drawing/2017/decorative" val="1"/>
+              </a:ext>
+            </a:extLst>
+          </p:cNvPr>
           <p:cNvSpPr/>
           <p:nvPr/>
         </p:nvSpPr>
@@ -6873,7 +7148,13 @@
       </p:sp>
       <p:pic>
         <p:nvPicPr>
-          <p:cNvPr id="22" name="Image 4" descr="C:\Users\whale\git\mwb-b08\presentations\_build\icons\FaListCheck.png">    </p:cNvPr>
+          <p:cNvPr id="22" name="Image 4" descr="">
+            <a:extLst>
+              <a:ext uri="{C183D7F6-B498-43B3-948B-1728B52AA6E4}">
+                <adec:decorative xmlns:adec="http://schemas.microsoft.com/office/drawing/2017/decorative" val="1"/>
+              </a:ext>
+            </a:extLst>
+          </p:cNvPr>
           <p:cNvPicPr>
             <a:picLocks noChangeAspect="1"/>
           </p:cNvPicPr>
@@ -6972,7 +7253,7 @@
                   <a:srgbClr val="64748B"/>
                 </a:solidFill>
               </a:rPr>
-              <a:t>Sources: OMB M-21-31; NIST SP 800-53 Rev. 5; Microsoft Learn — DNS logging and diagnostics, Azure DNS monitoring, DNS resolver policy. Book 08, Chapter 11.</a:t>
+              <a:t>Sources: OMB M-26-14; NIST SP 800-53 Rev. 5; Microsoft Learn — DNS logging and diagnostics, Azure DNS monitoring, DNS resolver policy. Book 08, Chapter 11.</a:t>
             </a:r>
             <a:endParaRPr lang="en-US" sz="1000" dirty="0"/>
           </a:p>
@@ -7091,7 +7372,13 @@
       </p:sp>
       <p:sp>
         <p:nvSpPr>
-          <p:cNvPr id="3" name="Tag How"/>
+          <p:cNvPr id="3" name="Tag How" descr="">
+            <a:extLst>
+              <a:ext uri="{C183D7F6-B498-43B3-948B-1728B52AA6E4}">
+                <adec:decorative xmlns:adec="http://schemas.microsoft.com/office/drawing/2017/decorative" val="1"/>
+              </a:ext>
+            </a:extLst>
+          </p:cNvPr>
           <p:cNvSpPr/>
           <p:nvPr/>
         </p:nvSpPr>
@@ -7173,7 +7460,7 @@
         <a:graphic>
           <a:graphicData uri="http://schemas.openxmlformats.org/drawingml/2006/table">
             <a:tbl>
-              <a:tblPr/>
+              <a:tblPr firstRow="1" bandRow="1"/>
               <a:tblGrid>
                 <a:gridCol w="3429000"/>
                 <a:gridCol w="2148840"/>
@@ -7910,7 +8197,13 @@
       </p:sp>
       <p:sp>
         <p:nvSpPr>
-          <p:cNvPr id="7" name="Auth box"/>
+          <p:cNvPr id="7" name="Auth box" descr="">
+            <a:extLst>
+              <a:ext uri="{C183D7F6-B498-43B3-948B-1728B52AA6E4}">
+                <adec:decorative xmlns:adec="http://schemas.microsoft.com/office/drawing/2017/decorative" val="1"/>
+              </a:ext>
+            </a:extLst>
+          </p:cNvPr>
           <p:cNvSpPr/>
           <p:nvPr/>
         </p:nvSpPr>
@@ -7944,7 +8237,13 @@
       </p:sp>
       <p:sp>
         <p:nvSpPr>
-          <p:cNvPr id="8" name="Icon FaLandmark"/>
+          <p:cNvPr id="8" name="Icon FaLandmark" descr="">
+            <a:extLst>
+              <a:ext uri="{C183D7F6-B498-43B3-948B-1728B52AA6E4}">
+                <adec:decorative xmlns:adec="http://schemas.microsoft.com/office/drawing/2017/decorative" val="1"/>
+              </a:ext>
+            </a:extLst>
+          </p:cNvPr>
           <p:cNvSpPr/>
           <p:nvPr/>
         </p:nvSpPr>
@@ -7969,7 +8268,13 @@
       </p:sp>
       <p:pic>
         <p:nvPicPr>
-          <p:cNvPr id="9" name="Image 0" descr="C:\Users\whale\git\mwb-b08\presentations\_build\icons\FaLandmark.png">    </p:cNvPr>
+          <p:cNvPr id="9" name="Image 0" descr="">
+            <a:extLst>
+              <a:ext uri="{C183D7F6-B498-43B3-948B-1728B52AA6E4}">
+                <adec:decorative xmlns:adec="http://schemas.microsoft.com/office/drawing/2017/decorative" val="1"/>
+              </a:ext>
+            </a:extLst>
+          </p:cNvPr>
           <p:cNvPicPr>
             <a:picLocks noChangeAspect="1"/>
           </p:cNvPicPr>
@@ -8126,7 +8431,13 @@
       </p:sp>
       <p:sp>
         <p:nvSpPr>
-          <p:cNvPr id="12" name="Residual"/>
+          <p:cNvPr id="12" name="Residual" descr="">
+            <a:extLst>
+              <a:ext uri="{C183D7F6-B498-43B3-948B-1728B52AA6E4}">
+                <adec:decorative xmlns:adec="http://schemas.microsoft.com/office/drawing/2017/decorative" val="1"/>
+              </a:ext>
+            </a:extLst>
+          </p:cNvPr>
           <p:cNvSpPr/>
           <p:nvPr/>
         </p:nvSpPr>
@@ -8160,7 +8471,13 @@
       </p:sp>
       <p:sp>
         <p:nvSpPr>
-          <p:cNvPr id="13" name="Icon FaScaleBalanced"/>
+          <p:cNvPr id="13" name="Icon FaScaleBalanced" descr="">
+            <a:extLst>
+              <a:ext uri="{C183D7F6-B498-43B3-948B-1728B52AA6E4}">
+                <adec:decorative xmlns:adec="http://schemas.microsoft.com/office/drawing/2017/decorative" val="1"/>
+              </a:ext>
+            </a:extLst>
+          </p:cNvPr>
           <p:cNvSpPr/>
           <p:nvPr/>
         </p:nvSpPr>
@@ -8185,7 +8502,13 @@
       </p:sp>
       <p:pic>
         <p:nvPicPr>
-          <p:cNvPr id="14" name="Image 1" descr="C:\Users\whale\git\mwb-b08\presentations\_build\icons\FaScaleBalanced.png">    </p:cNvPr>
+          <p:cNvPr id="14" name="Image 1" descr="">
+            <a:extLst>
+              <a:ext uri="{C183D7F6-B498-43B3-948B-1728B52AA6E4}">
+                <adec:decorative xmlns:adec="http://schemas.microsoft.com/office/drawing/2017/decorative" val="1"/>
+              </a:ext>
+            </a:extLst>
+          </p:cNvPr>
           <p:cNvPicPr>
             <a:picLocks noChangeAspect="1"/>
           </p:cNvPicPr>
@@ -8403,7 +8726,13 @@
       </p:sp>
       <p:sp>
         <p:nvSpPr>
-          <p:cNvPr id="3" name="Tag How"/>
+          <p:cNvPr id="3" name="Tag How" descr="">
+            <a:extLst>
+              <a:ext uri="{C183D7F6-B498-43B3-948B-1728B52AA6E4}">
+                <adec:decorative xmlns:adec="http://schemas.microsoft.com/office/drawing/2017/decorative" val="1"/>
+              </a:ext>
+            </a:extLst>
+          </p:cNvPr>
           <p:cNvSpPr/>
           <p:nvPr/>
         </p:nvSpPr>
@@ -8466,7 +8795,13 @@
       </p:sp>
       <p:sp>
         <p:nvSpPr>
-          <p:cNvPr id="5" name="Ask 1"/>
+          <p:cNvPr id="5" name="Ask 1" descr="">
+            <a:extLst>
+              <a:ext uri="{C183D7F6-B498-43B3-948B-1728B52AA6E4}">
+                <adec:decorative xmlns:adec="http://schemas.microsoft.com/office/drawing/2017/decorative" val="1"/>
+              </a:ext>
+            </a:extLst>
+          </p:cNvPr>
           <p:cNvSpPr/>
           <p:nvPr/>
         </p:nvSpPr>
@@ -8500,7 +8835,13 @@
       </p:sp>
       <p:sp>
         <p:nvSpPr>
-          <p:cNvPr id="6" name="Icon FaSitemap"/>
+          <p:cNvPr id="6" name="Icon FaSitemap" descr="">
+            <a:extLst>
+              <a:ext uri="{C183D7F6-B498-43B3-948B-1728B52AA6E4}">
+                <adec:decorative xmlns:adec="http://schemas.microsoft.com/office/drawing/2017/decorative" val="1"/>
+              </a:ext>
+            </a:extLst>
+          </p:cNvPr>
           <p:cNvSpPr/>
           <p:nvPr/>
         </p:nvSpPr>
@@ -8525,7 +8866,13 @@
       </p:sp>
       <p:pic>
         <p:nvPicPr>
-          <p:cNvPr id="7" name="Image 0" descr="C:\Users\whale\git\mwb-b08\presentations\_build\icons\FaSitemap.png">    </p:cNvPr>
+          <p:cNvPr id="7" name="Image 0" descr="">
+            <a:extLst>
+              <a:ext uri="{C183D7F6-B498-43B3-948B-1728B52AA6E4}">
+                <adec:decorative xmlns:adec="http://schemas.microsoft.com/office/drawing/2017/decorative" val="1"/>
+              </a:ext>
+            </a:extLst>
+          </p:cNvPr>
           <p:cNvPicPr>
             <a:picLocks noChangeAspect="1"/>
           </p:cNvPicPr>
@@ -8602,7 +8949,13 @@
       </p:sp>
       <p:sp>
         <p:nvSpPr>
-          <p:cNvPr id="9" name="Ask 2"/>
+          <p:cNvPr id="9" name="Ask 2" descr="">
+            <a:extLst>
+              <a:ext uri="{C183D7F6-B498-43B3-948B-1728B52AA6E4}">
+                <adec:decorative xmlns:adec="http://schemas.microsoft.com/office/drawing/2017/decorative" val="1"/>
+              </a:ext>
+            </a:extLst>
+          </p:cNvPr>
           <p:cNvSpPr/>
           <p:nvPr/>
         </p:nvSpPr>
@@ -8636,7 +8989,13 @@
       </p:sp>
       <p:sp>
         <p:nvSpPr>
-          <p:cNvPr id="10" name="Icon FaListCheck"/>
+          <p:cNvPr id="10" name="Icon FaListCheck" descr="">
+            <a:extLst>
+              <a:ext uri="{C183D7F6-B498-43B3-948B-1728B52AA6E4}">
+                <adec:decorative xmlns:adec="http://schemas.microsoft.com/office/drawing/2017/decorative" val="1"/>
+              </a:ext>
+            </a:extLst>
+          </p:cNvPr>
           <p:cNvSpPr/>
           <p:nvPr/>
         </p:nvSpPr>
@@ -8661,7 +9020,13 @@
       </p:sp>
       <p:pic>
         <p:nvPicPr>
-          <p:cNvPr id="11" name="Image 1" descr="C:\Users\whale\git\mwb-b08\presentations\_build\icons\FaListCheck.png">    </p:cNvPr>
+          <p:cNvPr id="11" name="Image 1" descr="">
+            <a:extLst>
+              <a:ext uri="{C183D7F6-B498-43B3-948B-1728B52AA6E4}">
+                <adec:decorative xmlns:adec="http://schemas.microsoft.com/office/drawing/2017/decorative" val="1"/>
+              </a:ext>
+            </a:extLst>
+          </p:cNvPr>
           <p:cNvPicPr>
             <a:picLocks noChangeAspect="1"/>
           </p:cNvPicPr>
@@ -8738,7 +9103,13 @@
       </p:sp>
       <p:sp>
         <p:nvSpPr>
-          <p:cNvPr id="13" name="Ask 3"/>
+          <p:cNvPr id="13" name="Ask 3" descr="">
+            <a:extLst>
+              <a:ext uri="{C183D7F6-B498-43B3-948B-1728B52AA6E4}">
+                <adec:decorative xmlns:adec="http://schemas.microsoft.com/office/drawing/2017/decorative" val="1"/>
+              </a:ext>
+            </a:extLst>
+          </p:cNvPr>
           <p:cNvSpPr/>
           <p:nvPr/>
         </p:nvSpPr>
@@ -8772,7 +9143,13 @@
       </p:sp>
       <p:sp>
         <p:nvSpPr>
-          <p:cNvPr id="14" name="Icon FaScaleBalanced"/>
+          <p:cNvPr id="14" name="Icon FaScaleBalanced" descr="">
+            <a:extLst>
+              <a:ext uri="{C183D7F6-B498-43B3-948B-1728B52AA6E4}">
+                <adec:decorative xmlns:adec="http://schemas.microsoft.com/office/drawing/2017/decorative" val="1"/>
+              </a:ext>
+            </a:extLst>
+          </p:cNvPr>
           <p:cNvSpPr/>
           <p:nvPr/>
         </p:nvSpPr>
@@ -8797,7 +9174,13 @@
       </p:sp>
       <p:pic>
         <p:nvPicPr>
-          <p:cNvPr id="15" name="Image 2" descr="C:\Users\whale\git\mwb-b08\presentations\_build\icons\FaScaleBalanced.png">    </p:cNvPr>
+          <p:cNvPr id="15" name="Image 2" descr="">
+            <a:extLst>
+              <a:ext uri="{C183D7F6-B498-43B3-948B-1728B52AA6E4}">
+                <adec:decorative xmlns:adec="http://schemas.microsoft.com/office/drawing/2017/decorative" val="1"/>
+              </a:ext>
+            </a:extLst>
+          </p:cNvPr>
           <p:cNvPicPr>
             <a:picLocks noChangeAspect="1"/>
           </p:cNvPicPr>
@@ -8874,7 +9257,13 @@
       </p:sp>
       <p:sp>
         <p:nvSpPr>
-          <p:cNvPr id="17" name="Ask 4"/>
+          <p:cNvPr id="17" name="Ask 4" descr="">
+            <a:extLst>
+              <a:ext uri="{C183D7F6-B498-43B3-948B-1728B52AA6E4}">
+                <adec:decorative xmlns:adec="http://schemas.microsoft.com/office/drawing/2017/decorative" val="1"/>
+              </a:ext>
+            </a:extLst>
+          </p:cNvPr>
           <p:cNvSpPr/>
           <p:nvPr/>
         </p:nvSpPr>
@@ -8908,7 +9297,13 @@
       </p:sp>
       <p:sp>
         <p:nvSpPr>
-          <p:cNvPr id="18" name="Icon FaUserCheck"/>
+          <p:cNvPr id="18" name="Icon FaUserCheck" descr="">
+            <a:extLst>
+              <a:ext uri="{C183D7F6-B498-43B3-948B-1728B52AA6E4}">
+                <adec:decorative xmlns:adec="http://schemas.microsoft.com/office/drawing/2017/decorative" val="1"/>
+              </a:ext>
+            </a:extLst>
+          </p:cNvPr>
           <p:cNvSpPr/>
           <p:nvPr/>
         </p:nvSpPr>
@@ -8933,7 +9328,13 @@
       </p:sp>
       <p:pic>
         <p:nvPicPr>
-          <p:cNvPr id="19" name="Image 3" descr="C:\Users\whale\git\mwb-b08\presentations\_build\icons\FaUserCheck.png">    </p:cNvPr>
+          <p:cNvPr id="19" name="Image 3" descr="">
+            <a:extLst>
+              <a:ext uri="{C183D7F6-B498-43B3-948B-1728B52AA6E4}">
+                <adec:decorative xmlns:adec="http://schemas.microsoft.com/office/drawing/2017/decorative" val="1"/>
+              </a:ext>
+            </a:extLst>
+          </p:cNvPr>
           <p:cNvPicPr>
             <a:picLocks noChangeAspect="1"/>
           </p:cNvPicPr>
@@ -9010,7 +9411,13 @@
       </p:sp>
       <p:sp>
         <p:nvSpPr>
-          <p:cNvPr id="21" name="Next"/>
+          <p:cNvPr id="21" name="Next" descr="">
+            <a:extLst>
+              <a:ext uri="{C183D7F6-B498-43B3-948B-1728B52AA6E4}">
+                <adec:decorative xmlns:adec="http://schemas.microsoft.com/office/drawing/2017/decorative" val="1"/>
+              </a:ext>
+            </a:extLst>
+          </p:cNvPr>
           <p:cNvSpPr/>
           <p:nvPr/>
         </p:nvSpPr>
@@ -9044,7 +9451,13 @@
       </p:sp>
       <p:sp>
         <p:nvSpPr>
-          <p:cNvPr id="22" name="Icon FaRoute"/>
+          <p:cNvPr id="22" name="Icon FaRoute" descr="">
+            <a:extLst>
+              <a:ext uri="{C183D7F6-B498-43B3-948B-1728B52AA6E4}">
+                <adec:decorative xmlns:adec="http://schemas.microsoft.com/office/drawing/2017/decorative" val="1"/>
+              </a:ext>
+            </a:extLst>
+          </p:cNvPr>
           <p:cNvSpPr/>
           <p:nvPr/>
         </p:nvSpPr>
@@ -9069,7 +9482,13 @@
       </p:sp>
       <p:pic>
         <p:nvPicPr>
-          <p:cNvPr id="23" name="Image 4" descr="C:\Users\whale\git\mwb-b08\presentations\_build\icons\FaRoute.png">    </p:cNvPr>
+          <p:cNvPr id="23" name="Image 4" descr="">
+            <a:extLst>
+              <a:ext uri="{C183D7F6-B498-43B3-948B-1728B52AA6E4}">
+                <adec:decorative xmlns:adec="http://schemas.microsoft.com/office/drawing/2017/decorative" val="1"/>
+              </a:ext>
+            </a:extLst>
+          </p:cNvPr>
           <p:cNvPicPr>
             <a:picLocks noChangeAspect="1"/>
           </p:cNvPicPr>
@@ -9484,7 +9903,7 @@
                   <a:schemeClr val="tx2"/>
                 </a:solidFill>
               </a:rPr>
-              <a:t>OMB M-22-09 (encrypted DNS); M-21-31 (EL1 passive DNS, retention); M-08-23 (DNSSEC); M-21-07 (IPv6).</a:t>
+              <a:t>OMB M-22-09 (encrypted DNS); M-26-14 (logging baseline and retention; rescinded M-21-31); M-08-23 (DNSSEC); M-21-07 (IPv6).</a:t>
             </a:r>
             <a:endParaRPr lang="en-US" sz="1400" dirty="0"/>
           </a:p>
@@ -9711,7 +10130,13 @@
       </p:sp>
       <p:sp>
         <p:nvSpPr>
-          <p:cNvPr id="3" name="Tag Why"/>
+          <p:cNvPr id="3" name="Tag Why" descr="">
+            <a:extLst>
+              <a:ext uri="{C183D7F6-B498-43B3-948B-1728B52AA6E4}">
+                <adec:decorative xmlns:adec="http://schemas.microsoft.com/office/drawing/2017/decorative" val="1"/>
+              </a:ext>
+            </a:extLst>
+          </p:cNvPr>
           <p:cNvSpPr/>
           <p:nvPr/>
         </p:nvSpPr>
@@ -9810,7 +10235,13 @@
       </p:sp>
       <p:sp>
         <p:nvSpPr>
-          <p:cNvPr id="6" name="Job 0"/>
+          <p:cNvPr id="6" name="Job 0" descr="">
+            <a:extLst>
+              <a:ext uri="{C183D7F6-B498-43B3-948B-1728B52AA6E4}">
+                <adec:decorative xmlns:adec="http://schemas.microsoft.com/office/drawing/2017/decorative" val="1"/>
+              </a:ext>
+            </a:extLst>
+          </p:cNvPr>
           <p:cNvSpPr/>
           <p:nvPr/>
         </p:nvSpPr>
@@ -9891,7 +10322,13 @@
       </p:sp>
       <p:sp>
         <p:nvSpPr>
-          <p:cNvPr id="8" name="Job 1"/>
+          <p:cNvPr id="8" name="Job 1" descr="">
+            <a:extLst>
+              <a:ext uri="{C183D7F6-B498-43B3-948B-1728B52AA6E4}">
+                <adec:decorative xmlns:adec="http://schemas.microsoft.com/office/drawing/2017/decorative" val="1"/>
+              </a:ext>
+            </a:extLst>
+          </p:cNvPr>
           <p:cNvSpPr/>
           <p:nvPr/>
         </p:nvSpPr>
@@ -9972,7 +10409,13 @@
       </p:sp>
       <p:sp>
         <p:nvSpPr>
-          <p:cNvPr id="10" name="Job 2"/>
+          <p:cNvPr id="10" name="Job 2" descr="">
+            <a:extLst>
+              <a:ext uri="{C183D7F6-B498-43B3-948B-1728B52AA6E4}">
+                <adec:decorative xmlns:adec="http://schemas.microsoft.com/office/drawing/2017/decorative" val="1"/>
+              </a:ext>
+            </a:extLst>
+          </p:cNvPr>
           <p:cNvSpPr/>
           <p:nvPr/>
         </p:nvSpPr>
@@ -10053,7 +10496,13 @@
       </p:sp>
       <p:sp>
         <p:nvSpPr>
-          <p:cNvPr id="12" name="Job 3"/>
+          <p:cNvPr id="12" name="Job 3" descr="">
+            <a:extLst>
+              <a:ext uri="{C183D7F6-B498-43B3-948B-1728B52AA6E4}">
+                <adec:decorative xmlns:adec="http://schemas.microsoft.com/office/drawing/2017/decorative" val="1"/>
+              </a:ext>
+            </a:extLst>
+          </p:cNvPr>
           <p:cNvSpPr/>
           <p:nvPr/>
         </p:nvSpPr>
@@ -10134,7 +10583,13 @@
       </p:sp>
       <p:sp>
         <p:nvSpPr>
-          <p:cNvPr id="14" name="Job 4"/>
+          <p:cNvPr id="14" name="Job 4" descr="">
+            <a:extLst>
+              <a:ext uri="{C183D7F6-B498-43B3-948B-1728B52AA6E4}">
+                <adec:decorative xmlns:adec="http://schemas.microsoft.com/office/drawing/2017/decorative" val="1"/>
+              </a:ext>
+            </a:extLst>
+          </p:cNvPr>
           <p:cNvSpPr/>
           <p:nvPr/>
         </p:nvSpPr>
@@ -10215,7 +10670,13 @@
       </p:sp>
       <p:sp>
         <p:nvSpPr>
-          <p:cNvPr id="16" name="Job 5"/>
+          <p:cNvPr id="16" name="Job 5" descr="">
+            <a:extLst>
+              <a:ext uri="{C183D7F6-B498-43B3-948B-1728B52AA6E4}">
+                <adec:decorative xmlns:adec="http://schemas.microsoft.com/office/drawing/2017/decorative" val="1"/>
+              </a:ext>
+            </a:extLst>
+          </p:cNvPr>
           <p:cNvSpPr/>
           <p:nvPr/>
         </p:nvSpPr>
@@ -10296,7 +10757,13 @@
       </p:sp>
       <p:sp>
         <p:nvSpPr>
-          <p:cNvPr id="18" name="Platforms box"/>
+          <p:cNvPr id="18" name="Platforms box" descr="">
+            <a:extLst>
+              <a:ext uri="{C183D7F6-B498-43B3-948B-1728B52AA6E4}">
+                <adec:decorative xmlns:adec="http://schemas.microsoft.com/office/drawing/2017/decorative" val="1"/>
+              </a:ext>
+            </a:extLst>
+          </p:cNvPr>
           <p:cNvSpPr/>
           <p:nvPr/>
         </p:nvSpPr>
@@ -10330,7 +10797,13 @@
       </p:sp>
       <p:sp>
         <p:nvSpPr>
-          <p:cNvPr id="19" name="Icon FaCubes"/>
+          <p:cNvPr id="19" name="Icon FaCubes" descr="">
+            <a:extLst>
+              <a:ext uri="{C183D7F6-B498-43B3-948B-1728B52AA6E4}">
+                <adec:decorative xmlns:adec="http://schemas.microsoft.com/office/drawing/2017/decorative" val="1"/>
+              </a:ext>
+            </a:extLst>
+          </p:cNvPr>
           <p:cNvSpPr/>
           <p:nvPr/>
         </p:nvSpPr>
@@ -10355,7 +10828,13 @@
       </p:sp>
       <p:pic>
         <p:nvPicPr>
-          <p:cNvPr id="20" name="Image 0" descr="C:\Users\whale\git\mwb-b08\presentations\_build\icons\FaCubes.png">    </p:cNvPr>
+          <p:cNvPr id="20" name="Image 0" descr="">
+            <a:extLst>
+              <a:ext uri="{C183D7F6-B498-43B3-948B-1728B52AA6E4}">
+                <adec:decorative xmlns:adec="http://schemas.microsoft.com/office/drawing/2017/decorative" val="1"/>
+              </a:ext>
+            </a:extLst>
+          </p:cNvPr>
           <p:cNvPicPr>
             <a:picLocks noChangeAspect="1"/>
           </p:cNvPicPr>
@@ -10544,7 +11023,13 @@
       </p:sp>
       <p:sp>
         <p:nvSpPr>
-          <p:cNvPr id="23" name="One plane"/>
+          <p:cNvPr id="23" name="One plane" descr="">
+            <a:extLst>
+              <a:ext uri="{C183D7F6-B498-43B3-948B-1728B52AA6E4}">
+                <adec:decorative xmlns:adec="http://schemas.microsoft.com/office/drawing/2017/decorative" val="1"/>
+              </a:ext>
+            </a:extLst>
+          </p:cNvPr>
           <p:cNvSpPr/>
           <p:nvPr/>
         </p:nvSpPr>
@@ -10578,7 +11063,13 @@
       </p:sp>
       <p:sp>
         <p:nvSpPr>
-          <p:cNvPr id="24" name="Icon FaSitemap"/>
+          <p:cNvPr id="24" name="Icon FaSitemap" descr="">
+            <a:extLst>
+              <a:ext uri="{C183D7F6-B498-43B3-948B-1728B52AA6E4}">
+                <adec:decorative xmlns:adec="http://schemas.microsoft.com/office/drawing/2017/decorative" val="1"/>
+              </a:ext>
+            </a:extLst>
+          </p:cNvPr>
           <p:cNvSpPr/>
           <p:nvPr/>
         </p:nvSpPr>
@@ -10603,7 +11094,13 @@
       </p:sp>
       <p:pic>
         <p:nvPicPr>
-          <p:cNvPr id="25" name="Image 1" descr="C:\Users\whale\git\mwb-b08\presentations\_build\icons\FaSitemap.png">    </p:cNvPr>
+          <p:cNvPr id="25" name="Image 1" descr="">
+            <a:extLst>
+              <a:ext uri="{C183D7F6-B498-43B3-948B-1728B52AA6E4}">
+                <adec:decorative xmlns:adec="http://schemas.microsoft.com/office/drawing/2017/decorative" val="1"/>
+              </a:ext>
+            </a:extLst>
+          </p:cNvPr>
           <p:cNvPicPr>
             <a:picLocks noChangeAspect="1"/>
           </p:cNvPicPr>
@@ -10821,7 +11318,13 @@
       </p:sp>
       <p:sp>
         <p:nvSpPr>
-          <p:cNvPr id="3" name="Tag Why"/>
+          <p:cNvPr id="3" name="Tag Why" descr="">
+            <a:extLst>
+              <a:ext uri="{C183D7F6-B498-43B3-948B-1728B52AA6E4}">
+                <adec:decorative xmlns:adec="http://schemas.microsoft.com/office/drawing/2017/decorative" val="1"/>
+              </a:ext>
+            </a:extLst>
+          </p:cNvPr>
           <p:cNvSpPr/>
           <p:nvPr/>
         </p:nvSpPr>
@@ -10884,7 +11387,13 @@
       </p:sp>
       <p:sp>
         <p:nvSpPr>
-          <p:cNvPr id="5" name="Form 1"/>
+          <p:cNvPr id="5" name="Form 1" descr="">
+            <a:extLst>
+              <a:ext uri="{C183D7F6-B498-43B3-948B-1728B52AA6E4}">
+                <adec:decorative xmlns:adec="http://schemas.microsoft.com/office/drawing/2017/decorative" val="1"/>
+              </a:ext>
+            </a:extLst>
+          </p:cNvPr>
           <p:cNvSpPr/>
           <p:nvPr/>
         </p:nvSpPr>
@@ -10918,7 +11427,13 @@
       </p:sp>
       <p:sp>
         <p:nvSpPr>
-          <p:cNvPr id="6" name="Icon FaCloud"/>
+          <p:cNvPr id="6" name="Icon FaCloud" descr="">
+            <a:extLst>
+              <a:ext uri="{C183D7F6-B498-43B3-948B-1728B52AA6E4}">
+                <adec:decorative xmlns:adec="http://schemas.microsoft.com/office/drawing/2017/decorative" val="1"/>
+              </a:ext>
+            </a:extLst>
+          </p:cNvPr>
           <p:cNvSpPr/>
           <p:nvPr/>
         </p:nvSpPr>
@@ -10943,7 +11458,13 @@
       </p:sp>
       <p:pic>
         <p:nvPicPr>
-          <p:cNvPr id="7" name="Image 0" descr="C:\Users\whale\git\mwb-b08\presentations\_build\icons\FaCloud.png">    </p:cNvPr>
+          <p:cNvPr id="7" name="Image 0" descr="">
+            <a:extLst>
+              <a:ext uri="{C183D7F6-B498-43B3-948B-1728B52AA6E4}">
+                <adec:decorative xmlns:adec="http://schemas.microsoft.com/office/drawing/2017/decorative" val="1"/>
+              </a:ext>
+            </a:extLst>
+          </p:cNvPr>
           <p:cNvPicPr>
             <a:picLocks noChangeAspect="1"/>
           </p:cNvPicPr>
@@ -11042,7 +11563,13 @@
       </p:sp>
       <p:sp>
         <p:nvSpPr>
-          <p:cNvPr id="10" name="Form 2"/>
+          <p:cNvPr id="10" name="Form 2" descr="">
+            <a:extLst>
+              <a:ext uri="{C183D7F6-B498-43B3-948B-1728B52AA6E4}">
+                <adec:decorative xmlns:adec="http://schemas.microsoft.com/office/drawing/2017/decorative" val="1"/>
+              </a:ext>
+            </a:extLst>
+          </p:cNvPr>
           <p:cNvSpPr/>
           <p:nvPr/>
         </p:nvSpPr>
@@ -11076,7 +11603,13 @@
       </p:sp>
       <p:sp>
         <p:nvSpPr>
-          <p:cNvPr id="11" name="Icon FaGlobe"/>
+          <p:cNvPr id="11" name="Icon FaGlobe" descr="">
+            <a:extLst>
+              <a:ext uri="{C183D7F6-B498-43B3-948B-1728B52AA6E4}">
+                <adec:decorative xmlns:adec="http://schemas.microsoft.com/office/drawing/2017/decorative" val="1"/>
+              </a:ext>
+            </a:extLst>
+          </p:cNvPr>
           <p:cNvSpPr/>
           <p:nvPr/>
         </p:nvSpPr>
@@ -11101,7 +11634,13 @@
       </p:sp>
       <p:pic>
         <p:nvPicPr>
-          <p:cNvPr id="12" name="Image 1" descr="C:\Users\whale\git\mwb-b08\presentations\_build\icons\FaGlobe.png">    </p:cNvPr>
+          <p:cNvPr id="12" name="Image 1" descr="">
+            <a:extLst>
+              <a:ext uri="{C183D7F6-B498-43B3-948B-1728B52AA6E4}">
+                <adec:decorative xmlns:adec="http://schemas.microsoft.com/office/drawing/2017/decorative" val="1"/>
+              </a:ext>
+            </a:extLst>
+          </p:cNvPr>
           <p:cNvPicPr>
             <a:picLocks noChangeAspect="1"/>
           </p:cNvPicPr>
@@ -11200,7 +11739,13 @@
       </p:sp>
       <p:sp>
         <p:nvSpPr>
-          <p:cNvPr id="15" name="Form 3"/>
+          <p:cNvPr id="15" name="Form 3" descr="">
+            <a:extLst>
+              <a:ext uri="{C183D7F6-B498-43B3-948B-1728B52AA6E4}">
+                <adec:decorative xmlns:adec="http://schemas.microsoft.com/office/drawing/2017/decorative" val="1"/>
+              </a:ext>
+            </a:extLst>
+          </p:cNvPr>
           <p:cNvSpPr/>
           <p:nvPr/>
         </p:nvSpPr>
@@ -11234,7 +11779,13 @@
       </p:sp>
       <p:sp>
         <p:nvSpPr>
-          <p:cNvPr id="16" name="Icon FaShieldHalved"/>
+          <p:cNvPr id="16" name="Icon FaShieldHalved" descr="">
+            <a:extLst>
+              <a:ext uri="{C183D7F6-B498-43B3-948B-1728B52AA6E4}">
+                <adec:decorative xmlns:adec="http://schemas.microsoft.com/office/drawing/2017/decorative" val="1"/>
+              </a:ext>
+            </a:extLst>
+          </p:cNvPr>
           <p:cNvSpPr/>
           <p:nvPr/>
         </p:nvSpPr>
@@ -11259,7 +11810,13 @@
       </p:sp>
       <p:pic>
         <p:nvPicPr>
-          <p:cNvPr id="17" name="Image 2" descr="C:\Users\whale\git\mwb-b08\presentations\_build\icons\FaShieldHalved.png">    </p:cNvPr>
+          <p:cNvPr id="17" name="Image 2" descr="">
+            <a:extLst>
+              <a:ext uri="{C183D7F6-B498-43B3-948B-1728B52AA6E4}">
+                <adec:decorative xmlns:adec="http://schemas.microsoft.com/office/drawing/2017/decorative" val="1"/>
+              </a:ext>
+            </a:extLst>
+          </p:cNvPr>
           <p:cNvPicPr>
             <a:picLocks noChangeAspect="1"/>
           </p:cNvPicPr>
@@ -11358,7 +11915,13 @@
       </p:sp>
       <p:sp>
         <p:nvSpPr>
-          <p:cNvPr id="20" name="Structure"/>
+          <p:cNvPr id="20" name="Structure" descr="">
+            <a:extLst>
+              <a:ext uri="{C183D7F6-B498-43B3-948B-1728B52AA6E4}">
+                <adec:decorative xmlns:adec="http://schemas.microsoft.com/office/drawing/2017/decorative" val="1"/>
+              </a:ext>
+            </a:extLst>
+          </p:cNvPr>
           <p:cNvSpPr/>
           <p:nvPr/>
         </p:nvSpPr>
@@ -11392,7 +11955,13 @@
       </p:sp>
       <p:sp>
         <p:nvSpPr>
-          <p:cNvPr id="21" name="Icon FaTriangleExclamation"/>
+          <p:cNvPr id="21" name="Icon FaTriangleExclamation" descr="">
+            <a:extLst>
+              <a:ext uri="{C183D7F6-B498-43B3-948B-1728B52AA6E4}">
+                <adec:decorative xmlns:adec="http://schemas.microsoft.com/office/drawing/2017/decorative" val="1"/>
+              </a:ext>
+            </a:extLst>
+          </p:cNvPr>
           <p:cNvSpPr/>
           <p:nvPr/>
         </p:nvSpPr>
@@ -11417,7 +11986,13 @@
       </p:sp>
       <p:pic>
         <p:nvPicPr>
-          <p:cNvPr id="22" name="Image 3" descr="C:\Users\whale\git\mwb-b08\presentations\_build\icons\FaTriangleExclamation.png">    </p:cNvPr>
+          <p:cNvPr id="22" name="Image 3" descr="">
+            <a:extLst>
+              <a:ext uri="{C183D7F6-B498-43B3-948B-1728B52AA6E4}">
+                <adec:decorative xmlns:adec="http://schemas.microsoft.com/office/drawing/2017/decorative" val="1"/>
+              </a:ext>
+            </a:extLst>
+          </p:cNvPr>
           <p:cNvPicPr>
             <a:picLocks noChangeAspect="1"/>
           </p:cNvPicPr>
@@ -11635,7 +12210,13 @@
       </p:sp>
       <p:sp>
         <p:nvSpPr>
-          <p:cNvPr id="3" name="Tag Why"/>
+          <p:cNvPr id="3" name="Tag Why" descr="">
+            <a:extLst>
+              <a:ext uri="{C183D7F6-B498-43B3-948B-1728B52AA6E4}">
+                <adec:decorative xmlns:adec="http://schemas.microsoft.com/office/drawing/2017/decorative" val="1"/>
+              </a:ext>
+            </a:extLst>
+          </p:cNvPr>
           <p:cNvSpPr/>
           <p:nvPr/>
         </p:nvSpPr>
@@ -11717,7 +12298,7 @@
         <a:graphic>
           <a:graphicData uri="http://schemas.openxmlformats.org/drawingml/2006/table">
             <a:tbl>
-              <a:tblPr/>
+              <a:tblPr firstRow="1" bandRow="1"/>
               <a:tblGrid>
                 <a:gridCol w="2377440"/>
                 <a:gridCol w="4572000"/>
@@ -12154,7 +12735,7 @@
                           <a:ea typeface="Calibri" pitchFamily="34" charset="-122"/>
                           <a:cs typeface="Calibri" pitchFamily="34" charset="-120"/>
                         </a:rPr>
-                        <a:t>OMB M-21-31 (August 2021)</a:t>
+                        <a:t>OMB M-26-14 (May 2026)</a:t>
                       </a:r>
                       <a:endParaRPr lang="en-US" sz="1250" dirty="0">
                         <a:latin typeface="Calibri" charset="0"/>
@@ -12222,7 +12803,7 @@
                           <a:ea typeface="Calibri" pitchFamily="34" charset="-122"/>
                           <a:cs typeface="Calibri" pitchFamily="34" charset="-120"/>
                         </a:rPr>
-                        <a:t>EL1: log DNS queries, encrypted ones included, with the source host identifiable</a:t>
+                        <a:t>Logs of source and destination address, port and session; searchable 6 months, retrievable 1 year</a:t>
                       </a:r>
                       <a:endParaRPr lang="en-US" sz="1250" dirty="0">
                         <a:latin typeface="Calibri" charset="0"/>
@@ -12556,7 +13137,13 @@
       </p:graphicFrame>
       <p:sp>
         <p:nvSpPr>
-          <p:cNvPr id="6" name="NIST box"/>
+          <p:cNvPr id="6" name="NIST box" descr="">
+            <a:extLst>
+              <a:ext uri="{C183D7F6-B498-43B3-948B-1728B52AA6E4}">
+                <adec:decorative xmlns:adec="http://schemas.microsoft.com/office/drawing/2017/decorative" val="1"/>
+              </a:ext>
+            </a:extLst>
+          </p:cNvPr>
           <p:cNvSpPr/>
           <p:nvPr/>
         </p:nvSpPr>
@@ -12590,7 +13177,13 @@
       </p:sp>
       <p:sp>
         <p:nvSpPr>
-          <p:cNvPr id="7" name="Icon FaBook"/>
+          <p:cNvPr id="7" name="Icon FaBook" descr="">
+            <a:extLst>
+              <a:ext uri="{C183D7F6-B498-43B3-948B-1728B52AA6E4}">
+                <adec:decorative xmlns:adec="http://schemas.microsoft.com/office/drawing/2017/decorative" val="1"/>
+              </a:ext>
+            </a:extLst>
+          </p:cNvPr>
           <p:cNvSpPr/>
           <p:nvPr/>
         </p:nvSpPr>
@@ -12615,7 +13208,13 @@
       </p:sp>
       <p:pic>
         <p:nvPicPr>
-          <p:cNvPr id="8" name="Image 0" descr="C:\Users\whale\git\mwb-b08\presentations\_build\icons\FaBook.png">    </p:cNvPr>
+          <p:cNvPr id="8" name="Image 0" descr="">
+            <a:extLst>
+              <a:ext uri="{C183D7F6-B498-43B3-948B-1728B52AA6E4}">
+                <adec:decorative xmlns:adec="http://schemas.microsoft.com/office/drawing/2017/decorative" val="1"/>
+              </a:ext>
+            </a:extLst>
+          </p:cNvPr>
           <p:cNvPicPr>
             <a:picLocks noChangeAspect="1"/>
           </p:cNvPicPr>
@@ -12772,7 +13371,13 @@
       </p:sp>
       <p:sp>
         <p:nvSpPr>
-          <p:cNvPr id="11" name="FedRAMP"/>
+          <p:cNvPr id="11" name="FedRAMP" descr="">
+            <a:extLst>
+              <a:ext uri="{C183D7F6-B498-43B3-948B-1728B52AA6E4}">
+                <adec:decorative xmlns:adec="http://schemas.microsoft.com/office/drawing/2017/decorative" val="1"/>
+              </a:ext>
+            </a:extLst>
+          </p:cNvPr>
           <p:cNvSpPr/>
           <p:nvPr/>
         </p:nvSpPr>
@@ -12806,7 +13411,13 @@
       </p:sp>
       <p:sp>
         <p:nvSpPr>
-          <p:cNvPr id="12" name="Icon FaLandmark"/>
+          <p:cNvPr id="12" name="Icon FaLandmark" descr="">
+            <a:extLst>
+              <a:ext uri="{C183D7F6-B498-43B3-948B-1728B52AA6E4}">
+                <adec:decorative xmlns:adec="http://schemas.microsoft.com/office/drawing/2017/decorative" val="1"/>
+              </a:ext>
+            </a:extLst>
+          </p:cNvPr>
           <p:cNvSpPr/>
           <p:nvPr/>
         </p:nvSpPr>
@@ -12831,7 +13442,13 @@
       </p:sp>
       <p:pic>
         <p:nvPicPr>
-          <p:cNvPr id="13" name="Image 1" descr="C:\Users\whale\git\mwb-b08\presentations\_build\icons\FaLandmark.png">    </p:cNvPr>
+          <p:cNvPr id="13" name="Image 1" descr="">
+            <a:extLst>
+              <a:ext uri="{C183D7F6-B498-43B3-948B-1728B52AA6E4}">
+                <adec:decorative xmlns:adec="http://schemas.microsoft.com/office/drawing/2017/decorative" val="1"/>
+              </a:ext>
+            </a:extLst>
+          </p:cNvPr>
           <p:cNvPicPr>
             <a:picLocks noChangeAspect="1"/>
           </p:cNvPicPr>
@@ -12930,7 +13547,7 @@
                   <a:srgbClr val="64748B"/>
                 </a:solidFill>
               </a:rPr>
-              <a:t>Sources: NIST SP 800-81 Rev. 3; OMB M-22-09, M-21-31, M-08-23; CISA Encrypted DNS Implementation Guidance; TIC 3.0 Catalog v3.3; FedRAMP. Book 08, Chapter 03.</a:t>
+              <a:t>Sources: NIST SP 800-81 Rev. 3; OMB M-22-09, M-26-14, M-08-23; CISA Encrypted DNS Implementation Guidance; TIC 3.0 Catalog v3.3; FedRAMP. Book 08, Chapter 03.</a:t>
             </a:r>
             <a:endParaRPr lang="en-US" sz="1000" dirty="0"/>
           </a:p>
@@ -13049,7 +13666,13 @@
       </p:sp>
       <p:sp>
         <p:nvSpPr>
-          <p:cNvPr id="3" name="Tag What"/>
+          <p:cNvPr id="3" name="Tag What" descr="">
+            <a:extLst>
+              <a:ext uri="{C183D7F6-B498-43B3-948B-1728B52AA6E4}">
+                <adec:decorative xmlns:adec="http://schemas.microsoft.com/office/drawing/2017/decorative" val="1"/>
+              </a:ext>
+            </a:extLst>
+          </p:cNvPr>
           <p:cNvSpPr/>
           <p:nvPr/>
         </p:nvSpPr>
@@ -13148,7 +13771,13 @@
       </p:sp>
       <p:sp>
         <p:nvSpPr>
-          <p:cNvPr id="6" name="Part 0"/>
+          <p:cNvPr id="6" name="Part 0" descr="">
+            <a:extLst>
+              <a:ext uri="{C183D7F6-B498-43B3-948B-1728B52AA6E4}">
+                <adec:decorative xmlns:adec="http://schemas.microsoft.com/office/drawing/2017/decorative" val="1"/>
+              </a:ext>
+            </a:extLst>
+          </p:cNvPr>
           <p:cNvSpPr/>
           <p:nvPr/>
         </p:nvSpPr>
@@ -13229,7 +13858,13 @@
       </p:sp>
       <p:sp>
         <p:nvSpPr>
-          <p:cNvPr id="8" name="Part 1"/>
+          <p:cNvPr id="8" name="Part 1" descr="">
+            <a:extLst>
+              <a:ext uri="{C183D7F6-B498-43B3-948B-1728B52AA6E4}">
+                <adec:decorative xmlns:adec="http://schemas.microsoft.com/office/drawing/2017/decorative" val="1"/>
+              </a:ext>
+            </a:extLst>
+          </p:cNvPr>
           <p:cNvSpPr/>
           <p:nvPr/>
         </p:nvSpPr>
@@ -13310,7 +13945,13 @@
       </p:sp>
       <p:sp>
         <p:nvSpPr>
-          <p:cNvPr id="10" name="Part 2"/>
+          <p:cNvPr id="10" name="Part 2" descr="">
+            <a:extLst>
+              <a:ext uri="{C183D7F6-B498-43B3-948B-1728B52AA6E4}">
+                <adec:decorative xmlns:adec="http://schemas.microsoft.com/office/drawing/2017/decorative" val="1"/>
+              </a:ext>
+            </a:extLst>
+          </p:cNvPr>
           <p:cNvSpPr/>
           <p:nvPr/>
         </p:nvSpPr>
@@ -13391,7 +14032,13 @@
       </p:sp>
       <p:sp>
         <p:nvSpPr>
-          <p:cNvPr id="12" name="Part 3"/>
+          <p:cNvPr id="12" name="Part 3" descr="">
+            <a:extLst>
+              <a:ext uri="{C183D7F6-B498-43B3-948B-1728B52AA6E4}">
+                <adec:decorative xmlns:adec="http://schemas.microsoft.com/office/drawing/2017/decorative" val="1"/>
+              </a:ext>
+            </a:extLst>
+          </p:cNvPr>
           <p:cNvSpPr/>
           <p:nvPr/>
         </p:nvSpPr>
@@ -13472,7 +14119,13 @@
       </p:sp>
       <p:sp>
         <p:nvSpPr>
-          <p:cNvPr id="14" name="Part 4"/>
+          <p:cNvPr id="14" name="Part 4" descr="">
+            <a:extLst>
+              <a:ext uri="{C183D7F6-B498-43B3-948B-1728B52AA6E4}">
+                <adec:decorative xmlns:adec="http://schemas.microsoft.com/office/drawing/2017/decorative" val="1"/>
+              </a:ext>
+            </a:extLst>
+          </p:cNvPr>
           <p:cNvSpPr/>
           <p:nvPr/>
         </p:nvSpPr>
@@ -13553,7 +14206,13 @@
       </p:sp>
       <p:sp>
         <p:nvSpPr>
-          <p:cNvPr id="16" name="Entra box"/>
+          <p:cNvPr id="16" name="Entra box" descr="">
+            <a:extLst>
+              <a:ext uri="{C183D7F6-B498-43B3-948B-1728B52AA6E4}">
+                <adec:decorative xmlns:adec="http://schemas.microsoft.com/office/drawing/2017/decorative" val="1"/>
+              </a:ext>
+            </a:extLst>
+          </p:cNvPr>
           <p:cNvSpPr/>
           <p:nvPr/>
         </p:nvSpPr>
@@ -13587,7 +14246,13 @@
       </p:sp>
       <p:sp>
         <p:nvSpPr>
-          <p:cNvPr id="17" name="Icon FaPlugCircleXmark"/>
+          <p:cNvPr id="17" name="Icon FaPlugCircleXmark" descr="">
+            <a:extLst>
+              <a:ext uri="{C183D7F6-B498-43B3-948B-1728B52AA6E4}">
+                <adec:decorative xmlns:adec="http://schemas.microsoft.com/office/drawing/2017/decorative" val="1"/>
+              </a:ext>
+            </a:extLst>
+          </p:cNvPr>
           <p:cNvSpPr/>
           <p:nvPr/>
         </p:nvSpPr>
@@ -13612,7 +14277,13 @@
       </p:sp>
       <p:pic>
         <p:nvPicPr>
-          <p:cNvPr id="18" name="Image 0" descr="C:\Users\whale\git\mwb-b08\presentations\_build\icons\FaPlugCircleXmark.png">    </p:cNvPr>
+          <p:cNvPr id="18" name="Image 0" descr="">
+            <a:extLst>
+              <a:ext uri="{C183D7F6-B498-43B3-948B-1728B52AA6E4}">
+                <adec:decorative xmlns:adec="http://schemas.microsoft.com/office/drawing/2017/decorative" val="1"/>
+              </a:ext>
+            </a:extLst>
+          </p:cNvPr>
           <p:cNvPicPr>
             <a:picLocks noChangeAspect="1"/>
           </p:cNvPicPr>
@@ -13783,7 +14454,13 @@
       </p:sp>
       <p:sp>
         <p:nvSpPr>
-          <p:cNvPr id="21" name="Locators last"/>
+          <p:cNvPr id="21" name="Locators last" descr="">
+            <a:extLst>
+              <a:ext uri="{C183D7F6-B498-43B3-948B-1728B52AA6E4}">
+                <adec:decorative xmlns:adec="http://schemas.microsoft.com/office/drawing/2017/decorative" val="1"/>
+              </a:ext>
+            </a:extLst>
+          </p:cNvPr>
           <p:cNvSpPr/>
           <p:nvPr/>
         </p:nvSpPr>
@@ -13817,7 +14494,13 @@
       </p:sp>
       <p:sp>
         <p:nvSpPr>
-          <p:cNvPr id="22" name="Icon FaServer"/>
+          <p:cNvPr id="22" name="Icon FaServer" descr="">
+            <a:extLst>
+              <a:ext uri="{C183D7F6-B498-43B3-948B-1728B52AA6E4}">
+                <adec:decorative xmlns:adec="http://schemas.microsoft.com/office/drawing/2017/decorative" val="1"/>
+              </a:ext>
+            </a:extLst>
+          </p:cNvPr>
           <p:cNvSpPr/>
           <p:nvPr/>
         </p:nvSpPr>
@@ -13842,7 +14525,13 @@
       </p:sp>
       <p:pic>
         <p:nvPicPr>
-          <p:cNvPr id="23" name="Image 1" descr="C:\Users\whale\git\mwb-b08\presentations\_build\icons\FaServer.png">    </p:cNvPr>
+          <p:cNvPr id="23" name="Image 1" descr="">
+            <a:extLst>
+              <a:ext uri="{C183D7F6-B498-43B3-948B-1728B52AA6E4}">
+                <adec:decorative xmlns:adec="http://schemas.microsoft.com/office/drawing/2017/decorative" val="1"/>
+              </a:ext>
+            </a:extLst>
+          </p:cNvPr>
           <p:cNvPicPr>
             <a:picLocks noChangeAspect="1"/>
           </p:cNvPicPr>
@@ -14060,7 +14749,13 @@
       </p:sp>
       <p:sp>
         <p:nvSpPr>
-          <p:cNvPr id="3" name="Tag What"/>
+          <p:cNvPr id="3" name="Tag What" descr="">
+            <a:extLst>
+              <a:ext uri="{C183D7F6-B498-43B3-948B-1728B52AA6E4}">
+                <adec:decorative xmlns:adec="http://schemas.microsoft.com/office/drawing/2017/decorative" val="1"/>
+              </a:ext>
+            </a:extLst>
+          </p:cNvPr>
           <p:cNvSpPr/>
           <p:nvPr/>
         </p:nvSpPr>
@@ -14123,7 +14818,13 @@
       </p:sp>
       <p:sp>
         <p:nvSpPr>
-          <p:cNvPr id="5" name="Path col 1"/>
+          <p:cNvPr id="5" name="Path col 1" descr="">
+            <a:extLst>
+              <a:ext uri="{C183D7F6-B498-43B3-948B-1728B52AA6E4}">
+                <adec:decorative xmlns:adec="http://schemas.microsoft.com/office/drawing/2017/decorative" val="1"/>
+              </a:ext>
+            </a:extLst>
+          </p:cNvPr>
           <p:cNvSpPr/>
           <p:nvPr/>
         </p:nvSpPr>
@@ -14157,7 +14858,13 @@
       </p:sp>
       <p:sp>
         <p:nvSpPr>
-          <p:cNvPr id="6" name="Icon FaRoute"/>
+          <p:cNvPr id="6" name="Icon FaRoute" descr="">
+            <a:extLst>
+              <a:ext uri="{C183D7F6-B498-43B3-948B-1728B52AA6E4}">
+                <adec:decorative xmlns:adec="http://schemas.microsoft.com/office/drawing/2017/decorative" val="1"/>
+              </a:ext>
+            </a:extLst>
+          </p:cNvPr>
           <p:cNvSpPr/>
           <p:nvPr/>
         </p:nvSpPr>
@@ -14182,7 +14889,13 @@
       </p:sp>
       <p:pic>
         <p:nvPicPr>
-          <p:cNvPr id="7" name="Image 0" descr="C:\Users\whale\git\mwb-b08\presentations\_build\icons\FaRoute.png">    </p:cNvPr>
+          <p:cNvPr id="7" name="Image 0" descr="">
+            <a:extLst>
+              <a:ext uri="{C183D7F6-B498-43B3-948B-1728B52AA6E4}">
+                <adec:decorative xmlns:adec="http://schemas.microsoft.com/office/drawing/2017/decorative" val="1"/>
+              </a:ext>
+            </a:extLst>
+          </p:cNvPr>
           <p:cNvPicPr>
             <a:picLocks noChangeAspect="1"/>
           </p:cNvPicPr>
@@ -14339,7 +15052,13 @@
       </p:sp>
       <p:sp>
         <p:nvSpPr>
-          <p:cNvPr id="10" name="Path col 2"/>
+          <p:cNvPr id="10" name="Path col 2" descr="">
+            <a:extLst>
+              <a:ext uri="{C183D7F6-B498-43B3-948B-1728B52AA6E4}">
+                <adec:decorative xmlns:adec="http://schemas.microsoft.com/office/drawing/2017/decorative" val="1"/>
+              </a:ext>
+            </a:extLst>
+          </p:cNvPr>
           <p:cNvSpPr/>
           <p:nvPr/>
         </p:nvSpPr>
@@ -14373,7 +15092,13 @@
       </p:sp>
       <p:sp>
         <p:nvSpPr>
-          <p:cNvPr id="11" name="Icon FaLock"/>
+          <p:cNvPr id="11" name="Icon FaLock" descr="">
+            <a:extLst>
+              <a:ext uri="{C183D7F6-B498-43B3-948B-1728B52AA6E4}">
+                <adec:decorative xmlns:adec="http://schemas.microsoft.com/office/drawing/2017/decorative" val="1"/>
+              </a:ext>
+            </a:extLst>
+          </p:cNvPr>
           <p:cNvSpPr/>
           <p:nvPr/>
         </p:nvSpPr>
@@ -14398,7 +15123,13 @@
       </p:sp>
       <p:pic>
         <p:nvPicPr>
-          <p:cNvPr id="12" name="Image 1" descr="C:\Users\whale\git\mwb-b08\presentations\_build\icons\FaLock.png">    </p:cNvPr>
+          <p:cNvPr id="12" name="Image 1" descr="">
+            <a:extLst>
+              <a:ext uri="{C183D7F6-B498-43B3-948B-1728B52AA6E4}">
+                <adec:decorative xmlns:adec="http://schemas.microsoft.com/office/drawing/2017/decorative" val="1"/>
+              </a:ext>
+            </a:extLst>
+          </p:cNvPr>
           <p:cNvPicPr>
             <a:picLocks noChangeAspect="1"/>
           </p:cNvPicPr>
@@ -14555,7 +15286,13 @@
       </p:sp>
       <p:sp>
         <p:nvSpPr>
-          <p:cNvPr id="15" name="Path col 3"/>
+          <p:cNvPr id="15" name="Path col 3" descr="">
+            <a:extLst>
+              <a:ext uri="{C183D7F6-B498-43B3-948B-1728B52AA6E4}">
+                <adec:decorative xmlns:adec="http://schemas.microsoft.com/office/drawing/2017/decorative" val="1"/>
+              </a:ext>
+            </a:extLst>
+          </p:cNvPr>
           <p:cNvSpPr/>
           <p:nvPr/>
         </p:nvSpPr>
@@ -14589,7 +15326,13 @@
       </p:sp>
       <p:sp>
         <p:nvSpPr>
-          <p:cNvPr id="16" name="Icon FaUserXmark"/>
+          <p:cNvPr id="16" name="Icon FaUserXmark" descr="">
+            <a:extLst>
+              <a:ext uri="{C183D7F6-B498-43B3-948B-1728B52AA6E4}">
+                <adec:decorative xmlns:adec="http://schemas.microsoft.com/office/drawing/2017/decorative" val="1"/>
+              </a:ext>
+            </a:extLst>
+          </p:cNvPr>
           <p:cNvSpPr/>
           <p:nvPr/>
         </p:nvSpPr>
@@ -14614,7 +15357,13 @@
       </p:sp>
       <p:pic>
         <p:nvPicPr>
-          <p:cNvPr id="17" name="Image 2" descr="C:\Users\whale\git\mwb-b08\presentations\_build\icons\FaUserXmark.png">    </p:cNvPr>
+          <p:cNvPr id="17" name="Image 2" descr="">
+            <a:extLst>
+              <a:ext uri="{C183D7F6-B498-43B3-948B-1728B52AA6E4}">
+                <adec:decorative xmlns:adec="http://schemas.microsoft.com/office/drawing/2017/decorative" val="1"/>
+              </a:ext>
+            </a:extLst>
+          </p:cNvPr>
           <p:cNvPicPr>
             <a:picLocks noChangeAspect="1"/>
           </p:cNvPicPr>
@@ -14771,7 +15520,13 @@
       </p:sp>
       <p:sp>
         <p:nvSpPr>
-          <p:cNvPr id="20" name="Silent"/>
+          <p:cNvPr id="20" name="Silent" descr="">
+            <a:extLst>
+              <a:ext uri="{C183D7F6-B498-43B3-948B-1728B52AA6E4}">
+                <adec:decorative xmlns:adec="http://schemas.microsoft.com/office/drawing/2017/decorative" val="1"/>
+              </a:ext>
+            </a:extLst>
+          </p:cNvPr>
           <p:cNvSpPr/>
           <p:nvPr/>
         </p:nvSpPr>
@@ -14805,7 +15560,13 @@
       </p:sp>
       <p:sp>
         <p:nvSpPr>
-          <p:cNvPr id="21" name="Icon FaTriangleExclamation"/>
+          <p:cNvPr id="21" name="Icon FaTriangleExclamation" descr="">
+            <a:extLst>
+              <a:ext uri="{C183D7F6-B498-43B3-948B-1728B52AA6E4}">
+                <adec:decorative xmlns:adec="http://schemas.microsoft.com/office/drawing/2017/decorative" val="1"/>
+              </a:ext>
+            </a:extLst>
+          </p:cNvPr>
           <p:cNvSpPr/>
           <p:nvPr/>
         </p:nvSpPr>
@@ -14830,7 +15591,13 @@
       </p:sp>
       <p:pic>
         <p:nvPicPr>
-          <p:cNvPr id="22" name="Image 3" descr="C:\Users\whale\git\mwb-b08\presentations\_build\icons\FaTriangleExclamation.png">    </p:cNvPr>
+          <p:cNvPr id="22" name="Image 3" descr="">
+            <a:extLst>
+              <a:ext uri="{C183D7F6-B498-43B3-948B-1728B52AA6E4}">
+                <adec:decorative xmlns:adec="http://schemas.microsoft.com/office/drawing/2017/decorative" val="1"/>
+              </a:ext>
+            </a:extLst>
+          </p:cNvPr>
           <p:cNvPicPr>
             <a:picLocks noChangeAspect="1"/>
           </p:cNvPicPr>
@@ -15048,7 +15815,13 @@
       </p:sp>
       <p:sp>
         <p:nvSpPr>
-          <p:cNvPr id="3" name="Tag What"/>
+          <p:cNvPr id="3" name="Tag What" descr="">
+            <a:extLst>
+              <a:ext uri="{C183D7F6-B498-43B3-948B-1728B52AA6E4}">
+                <adec:decorative xmlns:adec="http://schemas.microsoft.com/office/drawing/2017/decorative" val="1"/>
+              </a:ext>
+            </a:extLst>
+          </p:cNvPr>
           <p:cNvSpPr/>
           <p:nvPr/>
         </p:nvSpPr>
@@ -15147,7 +15920,13 @@
       </p:sp>
       <p:sp>
         <p:nvSpPr>
-          <p:cNvPr id="6" name="Step 0"/>
+          <p:cNvPr id="6" name="Step 0" descr="">
+            <a:extLst>
+              <a:ext uri="{C183D7F6-B498-43B3-948B-1728B52AA6E4}">
+                <adec:decorative xmlns:adec="http://schemas.microsoft.com/office/drawing/2017/decorative" val="1"/>
+              </a:ext>
+            </a:extLst>
+          </p:cNvPr>
           <p:cNvSpPr/>
           <p:nvPr/>
         </p:nvSpPr>
@@ -15228,7 +16007,13 @@
       </p:sp>
       <p:sp>
         <p:nvSpPr>
-          <p:cNvPr id="8" name="Step 1"/>
+          <p:cNvPr id="8" name="Step 1" descr="">
+            <a:extLst>
+              <a:ext uri="{C183D7F6-B498-43B3-948B-1728B52AA6E4}">
+                <adec:decorative xmlns:adec="http://schemas.microsoft.com/office/drawing/2017/decorative" val="1"/>
+              </a:ext>
+            </a:extLst>
+          </p:cNvPr>
           <p:cNvSpPr/>
           <p:nvPr/>
         </p:nvSpPr>
@@ -15309,7 +16094,13 @@
       </p:sp>
       <p:sp>
         <p:nvSpPr>
-          <p:cNvPr id="10" name="Step 2"/>
+          <p:cNvPr id="10" name="Step 2" descr="">
+            <a:extLst>
+              <a:ext uri="{C183D7F6-B498-43B3-948B-1728B52AA6E4}">
+                <adec:decorative xmlns:adec="http://schemas.microsoft.com/office/drawing/2017/decorative" val="1"/>
+              </a:ext>
+            </a:extLst>
+          </p:cNvPr>
           <p:cNvSpPr/>
           <p:nvPr/>
         </p:nvSpPr>
@@ -15390,7 +16181,13 @@
       </p:sp>
       <p:sp>
         <p:nvSpPr>
-          <p:cNvPr id="12" name="Step 3"/>
+          <p:cNvPr id="12" name="Step 3" descr="">
+            <a:extLst>
+              <a:ext uri="{C183D7F6-B498-43B3-948B-1728B52AA6E4}">
+                <adec:decorative xmlns:adec="http://schemas.microsoft.com/office/drawing/2017/decorative" val="1"/>
+              </a:ext>
+            </a:extLst>
+          </p:cNvPr>
           <p:cNvSpPr/>
           <p:nvPr/>
         </p:nvSpPr>
@@ -15471,7 +16268,13 @@
       </p:sp>
       <p:sp>
         <p:nvSpPr>
-          <p:cNvPr id="14" name="DNSSEC box"/>
+          <p:cNvPr id="14" name="DNSSEC box" descr="">
+            <a:extLst>
+              <a:ext uri="{C183D7F6-B498-43B3-948B-1728B52AA6E4}">
+                <adec:decorative xmlns:adec="http://schemas.microsoft.com/office/drawing/2017/decorative" val="1"/>
+              </a:ext>
+            </a:extLst>
+          </p:cNvPr>
           <p:cNvSpPr/>
           <p:nvPr/>
         </p:nvSpPr>
@@ -15505,7 +16308,13 @@
       </p:sp>
       <p:sp>
         <p:nvSpPr>
-          <p:cNvPr id="15" name="Icon FaFileShield"/>
+          <p:cNvPr id="15" name="Icon FaFileShield" descr="">
+            <a:extLst>
+              <a:ext uri="{C183D7F6-B498-43B3-948B-1728B52AA6E4}">
+                <adec:decorative xmlns:adec="http://schemas.microsoft.com/office/drawing/2017/decorative" val="1"/>
+              </a:ext>
+            </a:extLst>
+          </p:cNvPr>
           <p:cNvSpPr/>
           <p:nvPr/>
         </p:nvSpPr>
@@ -15530,7 +16339,13 @@
       </p:sp>
       <p:pic>
         <p:nvPicPr>
-          <p:cNvPr id="16" name="Image 0" descr="C:\Users\whale\git\mwb-b08\presentations\_build\icons\FaFileShield.png">    </p:cNvPr>
+          <p:cNvPr id="16" name="Image 0" descr="">
+            <a:extLst>
+              <a:ext uri="{C183D7F6-B498-43B3-948B-1728B52AA6E4}">
+                <adec:decorative xmlns:adec="http://schemas.microsoft.com/office/drawing/2017/decorative" val="1"/>
+              </a:ext>
+            </a:extLst>
+          </p:cNvPr>
           <p:cNvPicPr>
             <a:picLocks noChangeAspect="1"/>
           </p:cNvPicPr>
@@ -15701,7 +16516,13 @@
       </p:sp>
       <p:sp>
         <p:nvSpPr>
-          <p:cNvPr id="19" name="Cert split-brain"/>
+          <p:cNvPr id="19" name="Cert split-brain" descr="">
+            <a:extLst>
+              <a:ext uri="{C183D7F6-B498-43B3-948B-1728B52AA6E4}">
+                <adec:decorative xmlns:adec="http://schemas.microsoft.com/office/drawing/2017/decorative" val="1"/>
+              </a:ext>
+            </a:extLst>
+          </p:cNvPr>
           <p:cNvSpPr/>
           <p:nvPr/>
         </p:nvSpPr>
@@ -15735,7 +16556,13 @@
       </p:sp>
       <p:sp>
         <p:nvSpPr>
-          <p:cNvPr id="20" name="Icon FaKey"/>
+          <p:cNvPr id="20" name="Icon FaKey" descr="">
+            <a:extLst>
+              <a:ext uri="{C183D7F6-B498-43B3-948B-1728B52AA6E4}">
+                <adec:decorative xmlns:adec="http://schemas.microsoft.com/office/drawing/2017/decorative" val="1"/>
+              </a:ext>
+            </a:extLst>
+          </p:cNvPr>
           <p:cNvSpPr/>
           <p:nvPr/>
         </p:nvSpPr>
@@ -15760,7 +16587,13 @@
       </p:sp>
       <p:pic>
         <p:nvPicPr>
-          <p:cNvPr id="21" name="Image 1" descr="C:\Users\whale\git\mwb-b08\presentations\_build\icons\FaKey.png">    </p:cNvPr>
+          <p:cNvPr id="21" name="Image 1" descr="">
+            <a:extLst>
+              <a:ext uri="{C183D7F6-B498-43B3-948B-1728B52AA6E4}">
+                <adec:decorative xmlns:adec="http://schemas.microsoft.com/office/drawing/2017/decorative" val="1"/>
+              </a:ext>
+            </a:extLst>
+          </p:cNvPr>
           <p:cNvPicPr>
             <a:picLocks noChangeAspect="1"/>
           </p:cNvPicPr>
@@ -15978,7 +16811,13 @@
       </p:sp>
       <p:sp>
         <p:nvSpPr>
-          <p:cNvPr id="3" name="Tag What"/>
+          <p:cNvPr id="3" name="Tag What" descr="">
+            <a:extLst>
+              <a:ext uri="{C183D7F6-B498-43B3-948B-1728B52AA6E4}">
+                <adec:decorative xmlns:adec="http://schemas.microsoft.com/office/drawing/2017/decorative" val="1"/>
+              </a:ext>
+            </a:extLst>
+          </p:cNvPr>
           <p:cNvSpPr/>
           <p:nvPr/>
         </p:nvSpPr>
@@ -16060,7 +16899,7 @@
         <a:graphic>
           <a:graphicData uri="http://schemas.openxmlformats.org/drawingml/2006/table">
             <a:tbl>
-              <a:tblPr/>
+              <a:tblPr firstRow="1" bandRow="1"/>
               <a:tblGrid>
                 <a:gridCol w="1783080"/>
                 <a:gridCol w="2423160"/>
@@ -17308,7 +18147,13 @@
       </p:graphicFrame>
       <p:sp>
         <p:nvSpPr>
-          <p:cNvPr id="6" name="Resolver box"/>
+          <p:cNvPr id="6" name="Resolver box" descr="">
+            <a:extLst>
+              <a:ext uri="{C183D7F6-B498-43B3-948B-1728B52AA6E4}">
+                <adec:decorative xmlns:adec="http://schemas.microsoft.com/office/drawing/2017/decorative" val="1"/>
+              </a:ext>
+            </a:extLst>
+          </p:cNvPr>
           <p:cNvSpPr/>
           <p:nvPr/>
         </p:nvSpPr>
@@ -17342,7 +18187,13 @@
       </p:sp>
       <p:sp>
         <p:nvSpPr>
-          <p:cNvPr id="7" name="Icon FaServer"/>
+          <p:cNvPr id="7" name="Icon FaServer" descr="">
+            <a:extLst>
+              <a:ext uri="{C183D7F6-B498-43B3-948B-1728B52AA6E4}">
+                <adec:decorative xmlns:adec="http://schemas.microsoft.com/office/drawing/2017/decorative" val="1"/>
+              </a:ext>
+            </a:extLst>
+          </p:cNvPr>
           <p:cNvSpPr/>
           <p:nvPr/>
         </p:nvSpPr>
@@ -17367,7 +18218,13 @@
       </p:sp>
       <p:pic>
         <p:nvPicPr>
-          <p:cNvPr id="8" name="Image 0" descr="C:\Users\whale\git\mwb-b08\presentations\_build\icons\FaServer.png">    </p:cNvPr>
+          <p:cNvPr id="8" name="Image 0" descr="">
+            <a:extLst>
+              <a:ext uri="{C183D7F6-B498-43B3-948B-1728B52AA6E4}">
+                <adec:decorative xmlns:adec="http://schemas.microsoft.com/office/drawing/2017/decorative" val="1"/>
+              </a:ext>
+            </a:extLst>
+          </p:cNvPr>
           <p:cNvPicPr>
             <a:picLocks noChangeAspect="1"/>
           </p:cNvPicPr>
@@ -17524,7 +18381,13 @@
       </p:sp>
       <p:sp>
         <p:nvSpPr>
-          <p:cNvPr id="11" name="IPAM"/>
+          <p:cNvPr id="11" name="IPAM" descr="">
+            <a:extLst>
+              <a:ext uri="{C183D7F6-B498-43B3-948B-1728B52AA6E4}">
+                <adec:decorative xmlns:adec="http://schemas.microsoft.com/office/drawing/2017/decorative" val="1"/>
+              </a:ext>
+            </a:extLst>
+          </p:cNvPr>
           <p:cNvSpPr/>
           <p:nvPr/>
         </p:nvSpPr>
@@ -17558,7 +18421,13 @@
       </p:sp>
       <p:sp>
         <p:nvSpPr>
-          <p:cNvPr id="12" name="Icon FaAddressBook"/>
+          <p:cNvPr id="12" name="Icon FaAddressBook" descr="">
+            <a:extLst>
+              <a:ext uri="{C183D7F6-B498-43B3-948B-1728B52AA6E4}">
+                <adec:decorative xmlns:adec="http://schemas.microsoft.com/office/drawing/2017/decorative" val="1"/>
+              </a:ext>
+            </a:extLst>
+          </p:cNvPr>
           <p:cNvSpPr/>
           <p:nvPr/>
         </p:nvSpPr>
@@ -17583,7 +18452,13 @@
       </p:sp>
       <p:pic>
         <p:nvPicPr>
-          <p:cNvPr id="13" name="Image 1" descr="C:\Users\whale\git\mwb-b08\presentations\_build\icons\FaAddressBook.png">    </p:cNvPr>
+          <p:cNvPr id="13" name="Image 1" descr="">
+            <a:extLst>
+              <a:ext uri="{C183D7F6-B498-43B3-948B-1728B52AA6E4}">
+                <adec:decorative xmlns:adec="http://schemas.microsoft.com/office/drawing/2017/decorative" val="1"/>
+              </a:ext>
+            </a:extLst>
+          </p:cNvPr>
           <p:cNvPicPr>
             <a:picLocks noChangeAspect="1"/>
           </p:cNvPicPr>
@@ -17801,7 +18676,13 @@
       </p:sp>
       <p:sp>
         <p:nvSpPr>
-          <p:cNvPr id="3" name="Tag What"/>
+          <p:cNvPr id="3" name="Tag What" descr="">
+            <a:extLst>
+              <a:ext uri="{C183D7F6-B498-43B3-948B-1728B52AA6E4}">
+                <adec:decorative xmlns:adec="http://schemas.microsoft.com/office/drawing/2017/decorative" val="1"/>
+              </a:ext>
+            </a:extLst>
+          </p:cNvPr>
           <p:cNvSpPr/>
           <p:nvPr/>
         </p:nvSpPr>
@@ -17864,7 +18745,13 @@
       </p:sp>
       <p:sp>
         <p:nvSpPr>
-          <p:cNvPr id="5" name="Flow 0"/>
+          <p:cNvPr id="5" name="Flow 0" descr="">
+            <a:extLst>
+              <a:ext uri="{C183D7F6-B498-43B3-948B-1728B52AA6E4}">
+                <adec:decorative xmlns:adec="http://schemas.microsoft.com/office/drawing/2017/decorative" val="1"/>
+              </a:ext>
+            </a:extLst>
+          </p:cNvPr>
           <p:cNvSpPr/>
           <p:nvPr/>
         </p:nvSpPr>
@@ -17970,7 +18857,13 @@
       </p:sp>
       <p:sp>
         <p:nvSpPr>
-          <p:cNvPr id="8" name="Flow 1"/>
+          <p:cNvPr id="8" name="Flow 1" descr="">
+            <a:extLst>
+              <a:ext uri="{C183D7F6-B498-43B3-948B-1728B52AA6E4}">
+                <adec:decorative xmlns:adec="http://schemas.microsoft.com/office/drawing/2017/decorative" val="1"/>
+              </a:ext>
+            </a:extLst>
+          </p:cNvPr>
           <p:cNvSpPr/>
           <p:nvPr/>
         </p:nvSpPr>
@@ -18076,7 +18969,13 @@
       </p:sp>
       <p:sp>
         <p:nvSpPr>
-          <p:cNvPr id="11" name="Flow 2"/>
+          <p:cNvPr id="11" name="Flow 2" descr="">
+            <a:extLst>
+              <a:ext uri="{C183D7F6-B498-43B3-948B-1728B52AA6E4}">
+                <adec:decorative xmlns:adec="http://schemas.microsoft.com/office/drawing/2017/decorative" val="1"/>
+              </a:ext>
+            </a:extLst>
+          </p:cNvPr>
           <p:cNvSpPr/>
           <p:nvPr/>
         </p:nvSpPr>
@@ -18182,7 +19081,13 @@
       </p:sp>
       <p:sp>
         <p:nvSpPr>
-          <p:cNvPr id="14" name="Flow 3"/>
+          <p:cNvPr id="14" name="Flow 3" descr="">
+            <a:extLst>
+              <a:ext uri="{C183D7F6-B498-43B3-948B-1728B52AA6E4}">
+                <adec:decorative xmlns:adec="http://schemas.microsoft.com/office/drawing/2017/decorative" val="1"/>
+              </a:ext>
+            </a:extLst>
+          </p:cNvPr>
           <p:cNvSpPr/>
           <p:nvPr/>
         </p:nvSpPr>
@@ -18288,7 +19193,13 @@
       </p:sp>
       <p:sp>
         <p:nvSpPr>
-          <p:cNvPr id="17" name="Flow 4"/>
+          <p:cNvPr id="17" name="Flow 4" descr="">
+            <a:extLst>
+              <a:ext uri="{C183D7F6-B498-43B3-948B-1728B52AA6E4}">
+                <adec:decorative xmlns:adec="http://schemas.microsoft.com/office/drawing/2017/decorative" val="1"/>
+              </a:ext>
+            </a:extLst>
+          </p:cNvPr>
           <p:cNvSpPr/>
           <p:nvPr/>
         </p:nvSpPr>
@@ -18358,7 +19269,13 @@
       </p:sp>
       <p:sp>
         <p:nvSpPr>
-          <p:cNvPr id="19" name="Decision 1"/>
+          <p:cNvPr id="19" name="Decision 1" descr="">
+            <a:extLst>
+              <a:ext uri="{C183D7F6-B498-43B3-948B-1728B52AA6E4}">
+                <adec:decorative xmlns:adec="http://schemas.microsoft.com/office/drawing/2017/decorative" val="1"/>
+              </a:ext>
+            </a:extLst>
+          </p:cNvPr>
           <p:cNvSpPr/>
           <p:nvPr/>
         </p:nvSpPr>
@@ -18468,7 +19385,13 @@
       </p:sp>
       <p:sp>
         <p:nvSpPr>
-          <p:cNvPr id="21" name="Decision 2"/>
+          <p:cNvPr id="21" name="Decision 2" descr="">
+            <a:extLst>
+              <a:ext uri="{C183D7F6-B498-43B3-948B-1728B52AA6E4}">
+                <adec:decorative xmlns:adec="http://schemas.microsoft.com/office/drawing/2017/decorative" val="1"/>
+              </a:ext>
+            </a:extLst>
+          </p:cNvPr>
           <p:cNvSpPr/>
           <p:nvPr/>
         </p:nvSpPr>
@@ -18578,7 +19501,13 @@
       </p:sp>
       <p:sp>
         <p:nvSpPr>
-          <p:cNvPr id="23" name="Decision 3"/>
+          <p:cNvPr id="23" name="Decision 3" descr="">
+            <a:extLst>
+              <a:ext uri="{C183D7F6-B498-43B3-948B-1728B52AA6E4}">
+                <adec:decorative xmlns:adec="http://schemas.microsoft.com/office/drawing/2017/decorative" val="1"/>
+              </a:ext>
+            </a:extLst>
+          </p:cNvPr>
           <p:cNvSpPr/>
           <p:nvPr/>
         </p:nvSpPr>
@@ -18688,7 +19617,13 @@
       </p:sp>
       <p:sp>
         <p:nvSpPr>
-          <p:cNvPr id="25" name="Decision 4"/>
+          <p:cNvPr id="25" name="Decision 4" descr="">
+            <a:extLst>
+              <a:ext uri="{C183D7F6-B498-43B3-948B-1728B52AA6E4}">
+                <adec:decorative xmlns:adec="http://schemas.microsoft.com/office/drawing/2017/decorative" val="1"/>
+              </a:ext>
+            </a:extLst>
+          </p:cNvPr>
           <p:cNvSpPr/>
           <p:nvPr/>
         </p:nvSpPr>
@@ -18798,7 +19733,13 @@
       </p:sp>
       <p:sp>
         <p:nvSpPr>
-          <p:cNvPr id="27" name="Decision 5"/>
+          <p:cNvPr id="27" name="Decision 5" descr="">
+            <a:extLst>
+              <a:ext uri="{C183D7F6-B498-43B3-948B-1728B52AA6E4}">
+                <adec:decorative xmlns:adec="http://schemas.microsoft.com/office/drawing/2017/decorative" val="1"/>
+              </a:ext>
+            </a:extLst>
+          </p:cNvPr>
           <p:cNvSpPr/>
           <p:nvPr/>
         </p:nvSpPr>
@@ -18908,7 +19849,13 @@
       </p:sp>
       <p:sp>
         <p:nvSpPr>
-          <p:cNvPr id="29" name="Check"/>
+          <p:cNvPr id="29" name="Check" descr="">
+            <a:extLst>
+              <a:ext uri="{C183D7F6-B498-43B3-948B-1728B52AA6E4}">
+                <adec:decorative xmlns:adec="http://schemas.microsoft.com/office/drawing/2017/decorative" val="1"/>
+              </a:ext>
+            </a:extLst>
+          </p:cNvPr>
           <p:cNvSpPr/>
           <p:nvPr/>
         </p:nvSpPr>
@@ -18942,7 +19889,13 @@
       </p:sp>
       <p:sp>
         <p:nvSpPr>
-          <p:cNvPr id="30" name="Icon FaClipboardCheck"/>
+          <p:cNvPr id="30" name="Icon FaClipboardCheck" descr="">
+            <a:extLst>
+              <a:ext uri="{C183D7F6-B498-43B3-948B-1728B52AA6E4}">
+                <adec:decorative xmlns:adec="http://schemas.microsoft.com/office/drawing/2017/decorative" val="1"/>
+              </a:ext>
+            </a:extLst>
+          </p:cNvPr>
           <p:cNvSpPr/>
           <p:nvPr/>
         </p:nvSpPr>
@@ -18967,7 +19920,13 @@
       </p:sp>
       <p:pic>
         <p:nvPicPr>
-          <p:cNvPr id="31" name="Image 0" descr="C:\Users\whale\git\mwb-b08\presentations\_build\icons\FaClipboardCheck.png">    </p:cNvPr>
+          <p:cNvPr id="31" name="Image 0" descr="">
+            <a:extLst>
+              <a:ext uri="{C183D7F6-B498-43B3-948B-1728B52AA6E4}">
+                <adec:decorative xmlns:adec="http://schemas.microsoft.com/office/drawing/2017/decorative" val="1"/>
+              </a:ext>
+            </a:extLst>
+          </p:cNvPr>
           <p:cNvPicPr>
             <a:picLocks noChangeAspect="1"/>
           </p:cNvPicPr>
@@ -19126,9 +20085,9 @@
 </file>
 
 <file path=ppt/theme/theme1.xml><?xml version="1.0" encoding="utf-8"?>
-<a:theme xmlns:a="http://schemas.openxmlformats.org/drawingml/2006/main" name="Modernization Workbook">
+<a:theme xmlns:a="http://schemas.openxmlformats.org/drawingml/2006/main" name="Federal Modernization Workbook">
   <a:themeElements>
-    <a:clrScheme name="Modernization Workbook">
+    <a:clrScheme name="Federal Modernization Workbook">
       <a:dk1>
         <a:srgbClr val="1F2A44"/>
       </a:dk1>
@@ -19166,7 +20125,7 @@
         <a:srgbClr val="334155"/>
       </a:folHlink>
     </a:clrScheme>
-    <a:fontScheme name="Modernization Workbook">
+    <a:fontScheme name="Federal Modernization Workbook">
       <a:majorFont>
         <a:latin typeface="Cambria"/>
         <a:ea typeface=""/>
